--- a/docs/review_response.pptx
+++ b/docs/review_response.pptx
@@ -3921,203 +3921,6 @@
   <p:transition spd="med" advClick="1">
     <p:fade/>
   </p:transition>
-  <p:timing>
-    <p:tnLst>
-      <p:par>
-        <p:cTn id="2" dur="indefinite" restart="never" nodeType="tmRoot">
-          <p:childTnLst>
-            <p:seq concurrent="1" nextAc="seek">
-              <p:cTn id="3" dur="indefinite" nodeType="mainSeq">
-                <p:childTnLst>
-                  <p:par>
-                    <p:cTn id="4" fill="hold" nodeType="withEffect">
-                      <p:stCondLst>
-                        <p:cond delay="0"/>
-                      </p:stCondLst>
-                      <p:childTnLst>
-                        <p:par>
-                          <p:cTn id="5" fill="hold" nodeType="withEffect">
-                            <p:stCondLst>
-                              <p:cond delay="0"/>
-                            </p:stCondLst>
-                            <p:childTnLst>
-                              <p:animEffect transition="in" filter="fade">
-                                <p:cBhvr>
-                                  <p:cTn id="6" dur="450"/>
-                                  <p:tgtEl>
-                                    <p:spTgt spid="2"/>
-                                  </p:tgtEl>
-                                </p:cBhvr>
-                              </p:animEffect>
-                              <p:set>
-                                <p:cBhvr>
-                                  <p:cTn id="7" dur="1" fill="hold">
-                                    <p:stCondLst>
-                                      <p:cond delay="0"/>
-                                    </p:stCondLst>
-                                  </p:cTn>
-                                  <p:tgtEl>
-                                    <p:spTgt spid="2"/>
-                                  </p:tgtEl>
-                                  <p:attrNameLst>
-                                    <p:attrName>style.visibility</p:attrName>
-                                  </p:attrNameLst>
-                                </p:cBhvr>
-                                <p:to>
-                                  <p:strVal val="visible"/>
-                                </p:to>
-                              </p:set>
-                            </p:childTnLst>
-                          </p:cTn>
-                        </p:par>
-                        <p:par>
-                          <p:cTn id="8" fill="hold" nodeType="withEffect">
-                            <p:stCondLst>
-                              <p:cond delay="0"/>
-                            </p:stCondLst>
-                            <p:childTnLst>
-                              <p:animEffect transition="in" filter="fade">
-                                <p:cBhvr>
-                                  <p:cTn id="9" dur="450"/>
-                                  <p:tgtEl>
-                                    <p:spTgt spid="3"/>
-                                  </p:tgtEl>
-                                </p:cBhvr>
-                              </p:animEffect>
-                              <p:set>
-                                <p:cBhvr>
-                                  <p:cTn id="10" dur="1" fill="hold">
-                                    <p:stCondLst>
-                                      <p:cond delay="0"/>
-                                    </p:stCondLst>
-                                  </p:cTn>
-                                  <p:tgtEl>
-                                    <p:spTgt spid="3"/>
-                                  </p:tgtEl>
-                                  <p:attrNameLst>
-                                    <p:attrName>style.visibility</p:attrName>
-                                  </p:attrNameLst>
-                                </p:cBhvr>
-                                <p:to>
-                                  <p:strVal val="visible"/>
-                                </p:to>
-                              </p:set>
-                            </p:childTnLst>
-                          </p:cTn>
-                        </p:par>
-                      </p:childTnLst>
-                    </p:cTn>
-                  </p:par>
-                  <p:par>
-                    <p:cTn id="11" fill="hold" nodeType="clickEffect">
-                      <p:stCondLst>
-                        <p:cond delay="0"/>
-                      </p:stCondLst>
-                      <p:childTnLst>
-                        <p:par>
-                          <p:cTn id="12" fill="hold" nodeType="withEffect">
-                            <p:stCondLst>
-                              <p:cond delay="0"/>
-                            </p:stCondLst>
-                            <p:childTnLst>
-                              <p:animEffect transition="in" filter="fade">
-                                <p:cBhvr>
-                                  <p:cTn id="13" dur="450"/>
-                                  <p:tgtEl>
-                                    <p:spTgt spid="4"/>
-                                  </p:tgtEl>
-                                </p:cBhvr>
-                              </p:animEffect>
-                              <p:set>
-                                <p:cBhvr>
-                                  <p:cTn id="14" dur="1" fill="hold">
-                                    <p:stCondLst>
-                                      <p:cond delay="0"/>
-                                    </p:stCondLst>
-                                  </p:cTn>
-                                  <p:tgtEl>
-                                    <p:spTgt spid="4"/>
-                                  </p:tgtEl>
-                                  <p:attrNameLst>
-                                    <p:attrName>style.visibility</p:attrName>
-                                  </p:attrNameLst>
-                                </p:cBhvr>
-                                <p:to>
-                                  <p:strVal val="visible"/>
-                                </p:to>
-                              </p:set>
-                            </p:childTnLst>
-                          </p:cTn>
-                        </p:par>
-                      </p:childTnLst>
-                    </p:cTn>
-                  </p:par>
-                  <p:par>
-                    <p:cTn id="15" fill="hold" nodeType="clickEffect">
-                      <p:stCondLst>
-                        <p:cond delay="0"/>
-                      </p:stCondLst>
-                      <p:childTnLst>
-                        <p:par>
-                          <p:cTn id="16" fill="hold" nodeType="withEffect">
-                            <p:stCondLst>
-                              <p:cond delay="0"/>
-                            </p:stCondLst>
-                            <p:childTnLst>
-                              <p:animEffect transition="in" filter="fade">
-                                <p:cBhvr>
-                                  <p:cTn id="17" dur="450"/>
-                                  <p:tgtEl>
-                                    <p:spTgt spid="5"/>
-                                  </p:tgtEl>
-                                </p:cBhvr>
-                              </p:animEffect>
-                              <p:set>
-                                <p:cBhvr>
-                                  <p:cTn id="18" dur="1" fill="hold">
-                                    <p:stCondLst>
-                                      <p:cond delay="0"/>
-                                    </p:stCondLst>
-                                  </p:cTn>
-                                  <p:tgtEl>
-                                    <p:spTgt spid="5"/>
-                                  </p:tgtEl>
-                                  <p:attrNameLst>
-                                    <p:attrName>style.visibility</p:attrName>
-                                  </p:attrNameLst>
-                                </p:cBhvr>
-                                <p:to>
-                                  <p:strVal val="visible"/>
-                                </p:to>
-                              </p:set>
-                            </p:childTnLst>
-                          </p:cTn>
-                        </p:par>
-                      </p:childTnLst>
-                    </p:cTn>
-                  </p:par>
-                </p:childTnLst>
-              </p:cTn>
-              <p:prevCondLst>
-                <p:cond evt="onPrev" delay="0">
-                  <p:tgtEl>
-                    <p:sldTgt/>
-                  </p:tgtEl>
-                </p:cond>
-              </p:prevCondLst>
-              <p:nextCondLst>
-                <p:cond evt="onNext" delay="0">
-                  <p:tgtEl>
-                    <p:sldTgt/>
-                  </p:tgtEl>
-                </p:cond>
-              </p:nextCondLst>
-            </p:seq>
-          </p:childTnLst>
-        </p:cTn>
-      </p:par>
-    </p:tnLst>
-  </p:timing>
 </p:sld>
 </file>
 
@@ -4734,448 +4537,6 @@
   <p:transition spd="med" advClick="1">
     <p:fade/>
   </p:transition>
-  <p:timing>
-    <p:tnLst>
-      <p:par>
-        <p:cTn id="2" dur="indefinite" restart="never" nodeType="tmRoot">
-          <p:childTnLst>
-            <p:seq concurrent="1" nextAc="seek">
-              <p:cTn id="3" dur="indefinite" nodeType="mainSeq">
-                <p:childTnLst>
-                  <p:par>
-                    <p:cTn id="4" fill="hold" nodeType="withEffect">
-                      <p:stCondLst>
-                        <p:cond delay="0"/>
-                      </p:stCondLst>
-                      <p:childTnLst>
-                        <p:par>
-                          <p:cTn id="5" fill="hold" nodeType="withEffect">
-                            <p:stCondLst>
-                              <p:cond delay="0"/>
-                            </p:stCondLst>
-                            <p:childTnLst>
-                              <p:animEffect transition="in" filter="fade">
-                                <p:cBhvr>
-                                  <p:cTn id="6" dur="450"/>
-                                  <p:tgtEl>
-                                    <p:spTgt spid="2"/>
-                                  </p:tgtEl>
-                                </p:cBhvr>
-                              </p:animEffect>
-                              <p:set>
-                                <p:cBhvr>
-                                  <p:cTn id="7" dur="1" fill="hold">
-                                    <p:stCondLst>
-                                      <p:cond delay="0"/>
-                                    </p:stCondLst>
-                                  </p:cTn>
-                                  <p:tgtEl>
-                                    <p:spTgt spid="2"/>
-                                  </p:tgtEl>
-                                  <p:attrNameLst>
-                                    <p:attrName>style.visibility</p:attrName>
-                                  </p:attrNameLst>
-                                </p:cBhvr>
-                                <p:to>
-                                  <p:strVal val="visible"/>
-                                </p:to>
-                              </p:set>
-                            </p:childTnLst>
-                          </p:cTn>
-                        </p:par>
-                        <p:par>
-                          <p:cTn id="8" fill="hold" nodeType="withEffect">
-                            <p:stCondLst>
-                              <p:cond delay="0"/>
-                            </p:stCondLst>
-                            <p:childTnLst>
-                              <p:animEffect transition="in" filter="fade">
-                                <p:cBhvr>
-                                  <p:cTn id="9" dur="450"/>
-                                  <p:tgtEl>
-                                    <p:spTgt spid="3"/>
-                                  </p:tgtEl>
-                                </p:cBhvr>
-                              </p:animEffect>
-                              <p:set>
-                                <p:cBhvr>
-                                  <p:cTn id="10" dur="1" fill="hold">
-                                    <p:stCondLst>
-                                      <p:cond delay="0"/>
-                                    </p:stCondLst>
-                                  </p:cTn>
-                                  <p:tgtEl>
-                                    <p:spTgt spid="3"/>
-                                  </p:tgtEl>
-                                  <p:attrNameLst>
-                                    <p:attrName>style.visibility</p:attrName>
-                                  </p:attrNameLst>
-                                </p:cBhvr>
-                                <p:to>
-                                  <p:strVal val="visible"/>
-                                </p:to>
-                              </p:set>
-                            </p:childTnLst>
-                          </p:cTn>
-                        </p:par>
-                        <p:par>
-                          <p:cTn id="11" fill="hold" nodeType="withEffect">
-                            <p:stCondLst>
-                              <p:cond delay="0"/>
-                            </p:stCondLst>
-                            <p:childTnLst>
-                              <p:animEffect transition="in" filter="fade">
-                                <p:cBhvr>
-                                  <p:cTn id="12" dur="450"/>
-                                  <p:tgtEl>
-                                    <p:spTgt spid="4"/>
-                                  </p:tgtEl>
-                                </p:cBhvr>
-                              </p:animEffect>
-                              <p:set>
-                                <p:cBhvr>
-                                  <p:cTn id="13" dur="1" fill="hold">
-                                    <p:stCondLst>
-                                      <p:cond delay="0"/>
-                                    </p:stCondLst>
-                                  </p:cTn>
-                                  <p:tgtEl>
-                                    <p:spTgt spid="4"/>
-                                  </p:tgtEl>
-                                  <p:attrNameLst>
-                                    <p:attrName>style.visibility</p:attrName>
-                                  </p:attrNameLst>
-                                </p:cBhvr>
-                                <p:to>
-                                  <p:strVal val="visible"/>
-                                </p:to>
-                              </p:set>
-                            </p:childTnLst>
-                          </p:cTn>
-                        </p:par>
-                        <p:par>
-                          <p:cTn id="14" fill="hold" nodeType="withEffect">
-                            <p:stCondLst>
-                              <p:cond delay="0"/>
-                            </p:stCondLst>
-                            <p:childTnLst>
-                              <p:animEffect transition="in" filter="fade">
-                                <p:cBhvr>
-                                  <p:cTn id="15" dur="450"/>
-                                  <p:tgtEl>
-                                    <p:spTgt spid="5"/>
-                                  </p:tgtEl>
-                                </p:cBhvr>
-                              </p:animEffect>
-                              <p:set>
-                                <p:cBhvr>
-                                  <p:cTn id="16" dur="1" fill="hold">
-                                    <p:stCondLst>
-                                      <p:cond delay="0"/>
-                                    </p:stCondLst>
-                                  </p:cTn>
-                                  <p:tgtEl>
-                                    <p:spTgt spid="5"/>
-                                  </p:tgtEl>
-                                  <p:attrNameLst>
-                                    <p:attrName>style.visibility</p:attrName>
-                                  </p:attrNameLst>
-                                </p:cBhvr>
-                                <p:to>
-                                  <p:strVal val="visible"/>
-                                </p:to>
-                              </p:set>
-                            </p:childTnLst>
-                          </p:cTn>
-                        </p:par>
-                        <p:par>
-                          <p:cTn id="17" fill="hold" nodeType="withEffect">
-                            <p:stCondLst>
-                              <p:cond delay="0"/>
-                            </p:stCondLst>
-                            <p:childTnLst>
-                              <p:animEffect transition="in" filter="fade">
-                                <p:cBhvr>
-                                  <p:cTn id="18" dur="450"/>
-                                  <p:tgtEl>
-                                    <p:spTgt spid="6"/>
-                                  </p:tgtEl>
-                                </p:cBhvr>
-                              </p:animEffect>
-                              <p:set>
-                                <p:cBhvr>
-                                  <p:cTn id="19" dur="1" fill="hold">
-                                    <p:stCondLst>
-                                      <p:cond delay="0"/>
-                                    </p:stCondLst>
-                                  </p:cTn>
-                                  <p:tgtEl>
-                                    <p:spTgt spid="6"/>
-                                  </p:tgtEl>
-                                  <p:attrNameLst>
-                                    <p:attrName>style.visibility</p:attrName>
-                                  </p:attrNameLst>
-                                </p:cBhvr>
-                                <p:to>
-                                  <p:strVal val="visible"/>
-                                </p:to>
-                              </p:set>
-                            </p:childTnLst>
-                          </p:cTn>
-                        </p:par>
-                        <p:par>
-                          <p:cTn id="20" fill="hold" nodeType="withEffect">
-                            <p:stCondLst>
-                              <p:cond delay="0"/>
-                            </p:stCondLst>
-                            <p:childTnLst>
-                              <p:animEffect transition="in" filter="fade">
-                                <p:cBhvr>
-                                  <p:cTn id="21" dur="450"/>
-                                  <p:tgtEl>
-                                    <p:spTgt spid="7"/>
-                                  </p:tgtEl>
-                                </p:cBhvr>
-                              </p:animEffect>
-                              <p:set>
-                                <p:cBhvr>
-                                  <p:cTn id="22" dur="1" fill="hold">
-                                    <p:stCondLst>
-                                      <p:cond delay="0"/>
-                                    </p:stCondLst>
-                                  </p:cTn>
-                                  <p:tgtEl>
-                                    <p:spTgt spid="7"/>
-                                  </p:tgtEl>
-                                  <p:attrNameLst>
-                                    <p:attrName>style.visibility</p:attrName>
-                                  </p:attrNameLst>
-                                </p:cBhvr>
-                                <p:to>
-                                  <p:strVal val="visible"/>
-                                </p:to>
-                              </p:set>
-                            </p:childTnLst>
-                          </p:cTn>
-                        </p:par>
-                      </p:childTnLst>
-                    </p:cTn>
-                  </p:par>
-                  <p:par>
-                    <p:cTn id="23" fill="hold" nodeType="clickEffect">
-                      <p:stCondLst>
-                        <p:cond delay="0"/>
-                      </p:stCondLst>
-                      <p:childTnLst>
-                        <p:par>
-                          <p:cTn id="24" fill="hold" nodeType="withEffect">
-                            <p:stCondLst>
-                              <p:cond delay="0"/>
-                            </p:stCondLst>
-                            <p:childTnLst>
-                              <p:animEffect transition="in" filter="fade">
-                                <p:cBhvr>
-                                  <p:cTn id="25" dur="450"/>
-                                  <p:tgtEl>
-                                    <p:spTgt spid="8"/>
-                                  </p:tgtEl>
-                                </p:cBhvr>
-                              </p:animEffect>
-                              <p:set>
-                                <p:cBhvr>
-                                  <p:cTn id="26" dur="1" fill="hold">
-                                    <p:stCondLst>
-                                      <p:cond delay="0"/>
-                                    </p:stCondLst>
-                                  </p:cTn>
-                                  <p:tgtEl>
-                                    <p:spTgt spid="8"/>
-                                  </p:tgtEl>
-                                  <p:attrNameLst>
-                                    <p:attrName>style.visibility</p:attrName>
-                                  </p:attrNameLst>
-                                </p:cBhvr>
-                                <p:to>
-                                  <p:strVal val="visible"/>
-                                </p:to>
-                              </p:set>
-                            </p:childTnLst>
-                          </p:cTn>
-                        </p:par>
-                        <p:par>
-                          <p:cTn id="27" fill="hold" nodeType="withEffect">
-                            <p:stCondLst>
-                              <p:cond delay="0"/>
-                            </p:stCondLst>
-                            <p:childTnLst>
-                              <p:animEffect transition="in" filter="fade">
-                                <p:cBhvr>
-                                  <p:cTn id="28" dur="450"/>
-                                  <p:tgtEl>
-                                    <p:spTgt spid="10"/>
-                                  </p:tgtEl>
-                                </p:cBhvr>
-                              </p:animEffect>
-                              <p:set>
-                                <p:cBhvr>
-                                  <p:cTn id="29" dur="1" fill="hold">
-                                    <p:stCondLst>
-                                      <p:cond delay="0"/>
-                                    </p:stCondLst>
-                                  </p:cTn>
-                                  <p:tgtEl>
-                                    <p:spTgt spid="10"/>
-                                  </p:tgtEl>
-                                  <p:attrNameLst>
-                                    <p:attrName>style.visibility</p:attrName>
-                                  </p:attrNameLst>
-                                </p:cBhvr>
-                                <p:to>
-                                  <p:strVal val="visible"/>
-                                </p:to>
-                              </p:set>
-                            </p:childTnLst>
-                          </p:cTn>
-                        </p:par>
-                      </p:childTnLst>
-                    </p:cTn>
-                  </p:par>
-                  <p:par>
-                    <p:cTn id="30" fill="hold" nodeType="clickEffect">
-                      <p:stCondLst>
-                        <p:cond delay="0"/>
-                      </p:stCondLst>
-                      <p:childTnLst>
-                        <p:par>
-                          <p:cTn id="31" fill="hold" nodeType="withEffect">
-                            <p:stCondLst>
-                              <p:cond delay="0"/>
-                            </p:stCondLst>
-                            <p:childTnLst>
-                              <p:animEffect transition="in" filter="fade">
-                                <p:cBhvr>
-                                  <p:cTn id="32" dur="450"/>
-                                  <p:tgtEl>
-                                    <p:spTgt spid="9"/>
-                                  </p:tgtEl>
-                                </p:cBhvr>
-                              </p:animEffect>
-                              <p:set>
-                                <p:cBhvr>
-                                  <p:cTn id="33" dur="1" fill="hold">
-                                    <p:stCondLst>
-                                      <p:cond delay="0"/>
-                                    </p:stCondLst>
-                                  </p:cTn>
-                                  <p:tgtEl>
-                                    <p:spTgt spid="9"/>
-                                  </p:tgtEl>
-                                  <p:attrNameLst>
-                                    <p:attrName>style.visibility</p:attrName>
-                                  </p:attrNameLst>
-                                </p:cBhvr>
-                                <p:to>
-                                  <p:strVal val="visible"/>
-                                </p:to>
-                              </p:set>
-                            </p:childTnLst>
-                          </p:cTn>
-                        </p:par>
-                        <p:par>
-                          <p:cTn id="34" fill="hold" nodeType="withEffect">
-                            <p:stCondLst>
-                              <p:cond delay="0"/>
-                            </p:stCondLst>
-                            <p:childTnLst>
-                              <p:animEffect transition="in" filter="fade">
-                                <p:cBhvr>
-                                  <p:cTn id="35" dur="450"/>
-                                  <p:tgtEl>
-                                    <p:spTgt spid="11"/>
-                                  </p:tgtEl>
-                                </p:cBhvr>
-                              </p:animEffect>
-                              <p:set>
-                                <p:cBhvr>
-                                  <p:cTn id="36" dur="1" fill="hold">
-                                    <p:stCondLst>
-                                      <p:cond delay="0"/>
-                                    </p:stCondLst>
-                                  </p:cTn>
-                                  <p:tgtEl>
-                                    <p:spTgt spid="11"/>
-                                  </p:tgtEl>
-                                  <p:attrNameLst>
-                                    <p:attrName>style.visibility</p:attrName>
-                                  </p:attrNameLst>
-                                </p:cBhvr>
-                                <p:to>
-                                  <p:strVal val="visible"/>
-                                </p:to>
-                              </p:set>
-                            </p:childTnLst>
-                          </p:cTn>
-                        </p:par>
-                        <p:par>
-                          <p:cTn id="37" fill="hold" nodeType="withEffect">
-                            <p:stCondLst>
-                              <p:cond delay="0"/>
-                            </p:stCondLst>
-                            <p:childTnLst>
-                              <p:animEffect transition="in" filter="fade">
-                                <p:cBhvr>
-                                  <p:cTn id="38" dur="450"/>
-                                  <p:tgtEl>
-                                    <p:spTgt spid="12"/>
-                                  </p:tgtEl>
-                                </p:cBhvr>
-                              </p:animEffect>
-                              <p:set>
-                                <p:cBhvr>
-                                  <p:cTn id="39" dur="1" fill="hold">
-                                    <p:stCondLst>
-                                      <p:cond delay="0"/>
-                                    </p:stCondLst>
-                                  </p:cTn>
-                                  <p:tgtEl>
-                                    <p:spTgt spid="12"/>
-                                  </p:tgtEl>
-                                  <p:attrNameLst>
-                                    <p:attrName>style.visibility</p:attrName>
-                                  </p:attrNameLst>
-                                </p:cBhvr>
-                                <p:to>
-                                  <p:strVal val="visible"/>
-                                </p:to>
-                              </p:set>
-                            </p:childTnLst>
-                          </p:cTn>
-                        </p:par>
-                      </p:childTnLst>
-                    </p:cTn>
-                  </p:par>
-                </p:childTnLst>
-              </p:cTn>
-              <p:prevCondLst>
-                <p:cond evt="onPrev" delay="0">
-                  <p:tgtEl>
-                    <p:sldTgt/>
-                  </p:tgtEl>
-                </p:cond>
-              </p:prevCondLst>
-              <p:nextCondLst>
-                <p:cond evt="onNext" delay="0">
-                  <p:tgtEl>
-                    <p:sldTgt/>
-                  </p:tgtEl>
-                </p:cond>
-              </p:nextCondLst>
-            </p:seq>
-          </p:childTnLst>
-        </p:cTn>
-      </p:par>
-    </p:tnLst>
-  </p:timing>
 </p:sld>
 </file>
 
@@ -5792,448 +5153,6 @@
   <p:transition spd="med" advClick="1">
     <p:fade/>
   </p:transition>
-  <p:timing>
-    <p:tnLst>
-      <p:par>
-        <p:cTn id="2" dur="indefinite" restart="never" nodeType="tmRoot">
-          <p:childTnLst>
-            <p:seq concurrent="1" nextAc="seek">
-              <p:cTn id="3" dur="indefinite" nodeType="mainSeq">
-                <p:childTnLst>
-                  <p:par>
-                    <p:cTn id="4" fill="hold" nodeType="withEffect">
-                      <p:stCondLst>
-                        <p:cond delay="0"/>
-                      </p:stCondLst>
-                      <p:childTnLst>
-                        <p:par>
-                          <p:cTn id="5" fill="hold" nodeType="withEffect">
-                            <p:stCondLst>
-                              <p:cond delay="0"/>
-                            </p:stCondLst>
-                            <p:childTnLst>
-                              <p:animEffect transition="in" filter="fade">
-                                <p:cBhvr>
-                                  <p:cTn id="6" dur="450"/>
-                                  <p:tgtEl>
-                                    <p:spTgt spid="2"/>
-                                  </p:tgtEl>
-                                </p:cBhvr>
-                              </p:animEffect>
-                              <p:set>
-                                <p:cBhvr>
-                                  <p:cTn id="7" dur="1" fill="hold">
-                                    <p:stCondLst>
-                                      <p:cond delay="0"/>
-                                    </p:stCondLst>
-                                  </p:cTn>
-                                  <p:tgtEl>
-                                    <p:spTgt spid="2"/>
-                                  </p:tgtEl>
-                                  <p:attrNameLst>
-                                    <p:attrName>style.visibility</p:attrName>
-                                  </p:attrNameLst>
-                                </p:cBhvr>
-                                <p:to>
-                                  <p:strVal val="visible"/>
-                                </p:to>
-                              </p:set>
-                            </p:childTnLst>
-                          </p:cTn>
-                        </p:par>
-                        <p:par>
-                          <p:cTn id="8" fill="hold" nodeType="withEffect">
-                            <p:stCondLst>
-                              <p:cond delay="0"/>
-                            </p:stCondLst>
-                            <p:childTnLst>
-                              <p:animEffect transition="in" filter="fade">
-                                <p:cBhvr>
-                                  <p:cTn id="9" dur="450"/>
-                                  <p:tgtEl>
-                                    <p:spTgt spid="3"/>
-                                  </p:tgtEl>
-                                </p:cBhvr>
-                              </p:animEffect>
-                              <p:set>
-                                <p:cBhvr>
-                                  <p:cTn id="10" dur="1" fill="hold">
-                                    <p:stCondLst>
-                                      <p:cond delay="0"/>
-                                    </p:stCondLst>
-                                  </p:cTn>
-                                  <p:tgtEl>
-                                    <p:spTgt spid="3"/>
-                                  </p:tgtEl>
-                                  <p:attrNameLst>
-                                    <p:attrName>style.visibility</p:attrName>
-                                  </p:attrNameLst>
-                                </p:cBhvr>
-                                <p:to>
-                                  <p:strVal val="visible"/>
-                                </p:to>
-                              </p:set>
-                            </p:childTnLst>
-                          </p:cTn>
-                        </p:par>
-                        <p:par>
-                          <p:cTn id="11" fill="hold" nodeType="withEffect">
-                            <p:stCondLst>
-                              <p:cond delay="0"/>
-                            </p:stCondLst>
-                            <p:childTnLst>
-                              <p:animEffect transition="in" filter="fade">
-                                <p:cBhvr>
-                                  <p:cTn id="12" dur="450"/>
-                                  <p:tgtEl>
-                                    <p:spTgt spid="4"/>
-                                  </p:tgtEl>
-                                </p:cBhvr>
-                              </p:animEffect>
-                              <p:set>
-                                <p:cBhvr>
-                                  <p:cTn id="13" dur="1" fill="hold">
-                                    <p:stCondLst>
-                                      <p:cond delay="0"/>
-                                    </p:stCondLst>
-                                  </p:cTn>
-                                  <p:tgtEl>
-                                    <p:spTgt spid="4"/>
-                                  </p:tgtEl>
-                                  <p:attrNameLst>
-                                    <p:attrName>style.visibility</p:attrName>
-                                  </p:attrNameLst>
-                                </p:cBhvr>
-                                <p:to>
-                                  <p:strVal val="visible"/>
-                                </p:to>
-                              </p:set>
-                            </p:childTnLst>
-                          </p:cTn>
-                        </p:par>
-                        <p:par>
-                          <p:cTn id="14" fill="hold" nodeType="withEffect">
-                            <p:stCondLst>
-                              <p:cond delay="0"/>
-                            </p:stCondLst>
-                            <p:childTnLst>
-                              <p:animEffect transition="in" filter="fade">
-                                <p:cBhvr>
-                                  <p:cTn id="15" dur="450"/>
-                                  <p:tgtEl>
-                                    <p:spTgt spid="5"/>
-                                  </p:tgtEl>
-                                </p:cBhvr>
-                              </p:animEffect>
-                              <p:set>
-                                <p:cBhvr>
-                                  <p:cTn id="16" dur="1" fill="hold">
-                                    <p:stCondLst>
-                                      <p:cond delay="0"/>
-                                    </p:stCondLst>
-                                  </p:cTn>
-                                  <p:tgtEl>
-                                    <p:spTgt spid="5"/>
-                                  </p:tgtEl>
-                                  <p:attrNameLst>
-                                    <p:attrName>style.visibility</p:attrName>
-                                  </p:attrNameLst>
-                                </p:cBhvr>
-                                <p:to>
-                                  <p:strVal val="visible"/>
-                                </p:to>
-                              </p:set>
-                            </p:childTnLst>
-                          </p:cTn>
-                        </p:par>
-                        <p:par>
-                          <p:cTn id="17" fill="hold" nodeType="withEffect">
-                            <p:stCondLst>
-                              <p:cond delay="0"/>
-                            </p:stCondLst>
-                            <p:childTnLst>
-                              <p:animEffect transition="in" filter="fade">
-                                <p:cBhvr>
-                                  <p:cTn id="18" dur="450"/>
-                                  <p:tgtEl>
-                                    <p:spTgt spid="6"/>
-                                  </p:tgtEl>
-                                </p:cBhvr>
-                              </p:animEffect>
-                              <p:set>
-                                <p:cBhvr>
-                                  <p:cTn id="19" dur="1" fill="hold">
-                                    <p:stCondLst>
-                                      <p:cond delay="0"/>
-                                    </p:stCondLst>
-                                  </p:cTn>
-                                  <p:tgtEl>
-                                    <p:spTgt spid="6"/>
-                                  </p:tgtEl>
-                                  <p:attrNameLst>
-                                    <p:attrName>style.visibility</p:attrName>
-                                  </p:attrNameLst>
-                                </p:cBhvr>
-                                <p:to>
-                                  <p:strVal val="visible"/>
-                                </p:to>
-                              </p:set>
-                            </p:childTnLst>
-                          </p:cTn>
-                        </p:par>
-                        <p:par>
-                          <p:cTn id="20" fill="hold" nodeType="withEffect">
-                            <p:stCondLst>
-                              <p:cond delay="0"/>
-                            </p:stCondLst>
-                            <p:childTnLst>
-                              <p:animEffect transition="in" filter="fade">
-                                <p:cBhvr>
-                                  <p:cTn id="21" dur="450"/>
-                                  <p:tgtEl>
-                                    <p:spTgt spid="7"/>
-                                  </p:tgtEl>
-                                </p:cBhvr>
-                              </p:animEffect>
-                              <p:set>
-                                <p:cBhvr>
-                                  <p:cTn id="22" dur="1" fill="hold">
-                                    <p:stCondLst>
-                                      <p:cond delay="0"/>
-                                    </p:stCondLst>
-                                  </p:cTn>
-                                  <p:tgtEl>
-                                    <p:spTgt spid="7"/>
-                                  </p:tgtEl>
-                                  <p:attrNameLst>
-                                    <p:attrName>style.visibility</p:attrName>
-                                  </p:attrNameLst>
-                                </p:cBhvr>
-                                <p:to>
-                                  <p:strVal val="visible"/>
-                                </p:to>
-                              </p:set>
-                            </p:childTnLst>
-                          </p:cTn>
-                        </p:par>
-                      </p:childTnLst>
-                    </p:cTn>
-                  </p:par>
-                  <p:par>
-                    <p:cTn id="23" fill="hold" nodeType="clickEffect">
-                      <p:stCondLst>
-                        <p:cond delay="0"/>
-                      </p:stCondLst>
-                      <p:childTnLst>
-                        <p:par>
-                          <p:cTn id="24" fill="hold" nodeType="withEffect">
-                            <p:stCondLst>
-                              <p:cond delay="0"/>
-                            </p:stCondLst>
-                            <p:childTnLst>
-                              <p:animEffect transition="in" filter="fade">
-                                <p:cBhvr>
-                                  <p:cTn id="25" dur="450"/>
-                                  <p:tgtEl>
-                                    <p:spTgt spid="8"/>
-                                  </p:tgtEl>
-                                </p:cBhvr>
-                              </p:animEffect>
-                              <p:set>
-                                <p:cBhvr>
-                                  <p:cTn id="26" dur="1" fill="hold">
-                                    <p:stCondLst>
-                                      <p:cond delay="0"/>
-                                    </p:stCondLst>
-                                  </p:cTn>
-                                  <p:tgtEl>
-                                    <p:spTgt spid="8"/>
-                                  </p:tgtEl>
-                                  <p:attrNameLst>
-                                    <p:attrName>style.visibility</p:attrName>
-                                  </p:attrNameLst>
-                                </p:cBhvr>
-                                <p:to>
-                                  <p:strVal val="visible"/>
-                                </p:to>
-                              </p:set>
-                            </p:childTnLst>
-                          </p:cTn>
-                        </p:par>
-                        <p:par>
-                          <p:cTn id="27" fill="hold" nodeType="withEffect">
-                            <p:stCondLst>
-                              <p:cond delay="0"/>
-                            </p:stCondLst>
-                            <p:childTnLst>
-                              <p:animEffect transition="in" filter="fade">
-                                <p:cBhvr>
-                                  <p:cTn id="28" dur="450"/>
-                                  <p:tgtEl>
-                                    <p:spTgt spid="10"/>
-                                  </p:tgtEl>
-                                </p:cBhvr>
-                              </p:animEffect>
-                              <p:set>
-                                <p:cBhvr>
-                                  <p:cTn id="29" dur="1" fill="hold">
-                                    <p:stCondLst>
-                                      <p:cond delay="0"/>
-                                    </p:stCondLst>
-                                  </p:cTn>
-                                  <p:tgtEl>
-                                    <p:spTgt spid="10"/>
-                                  </p:tgtEl>
-                                  <p:attrNameLst>
-                                    <p:attrName>style.visibility</p:attrName>
-                                  </p:attrNameLst>
-                                </p:cBhvr>
-                                <p:to>
-                                  <p:strVal val="visible"/>
-                                </p:to>
-                              </p:set>
-                            </p:childTnLst>
-                          </p:cTn>
-                        </p:par>
-                      </p:childTnLst>
-                    </p:cTn>
-                  </p:par>
-                  <p:par>
-                    <p:cTn id="30" fill="hold" nodeType="clickEffect">
-                      <p:stCondLst>
-                        <p:cond delay="0"/>
-                      </p:stCondLst>
-                      <p:childTnLst>
-                        <p:par>
-                          <p:cTn id="31" fill="hold" nodeType="withEffect">
-                            <p:stCondLst>
-                              <p:cond delay="0"/>
-                            </p:stCondLst>
-                            <p:childTnLst>
-                              <p:animEffect transition="in" filter="fade">
-                                <p:cBhvr>
-                                  <p:cTn id="32" dur="450"/>
-                                  <p:tgtEl>
-                                    <p:spTgt spid="9"/>
-                                  </p:tgtEl>
-                                </p:cBhvr>
-                              </p:animEffect>
-                              <p:set>
-                                <p:cBhvr>
-                                  <p:cTn id="33" dur="1" fill="hold">
-                                    <p:stCondLst>
-                                      <p:cond delay="0"/>
-                                    </p:stCondLst>
-                                  </p:cTn>
-                                  <p:tgtEl>
-                                    <p:spTgt spid="9"/>
-                                  </p:tgtEl>
-                                  <p:attrNameLst>
-                                    <p:attrName>style.visibility</p:attrName>
-                                  </p:attrNameLst>
-                                </p:cBhvr>
-                                <p:to>
-                                  <p:strVal val="visible"/>
-                                </p:to>
-                              </p:set>
-                            </p:childTnLst>
-                          </p:cTn>
-                        </p:par>
-                        <p:par>
-                          <p:cTn id="34" fill="hold" nodeType="withEffect">
-                            <p:stCondLst>
-                              <p:cond delay="0"/>
-                            </p:stCondLst>
-                            <p:childTnLst>
-                              <p:animEffect transition="in" filter="fade">
-                                <p:cBhvr>
-                                  <p:cTn id="35" dur="450"/>
-                                  <p:tgtEl>
-                                    <p:spTgt spid="11"/>
-                                  </p:tgtEl>
-                                </p:cBhvr>
-                              </p:animEffect>
-                              <p:set>
-                                <p:cBhvr>
-                                  <p:cTn id="36" dur="1" fill="hold">
-                                    <p:stCondLst>
-                                      <p:cond delay="0"/>
-                                    </p:stCondLst>
-                                  </p:cTn>
-                                  <p:tgtEl>
-                                    <p:spTgt spid="11"/>
-                                  </p:tgtEl>
-                                  <p:attrNameLst>
-                                    <p:attrName>style.visibility</p:attrName>
-                                  </p:attrNameLst>
-                                </p:cBhvr>
-                                <p:to>
-                                  <p:strVal val="visible"/>
-                                </p:to>
-                              </p:set>
-                            </p:childTnLst>
-                          </p:cTn>
-                        </p:par>
-                        <p:par>
-                          <p:cTn id="37" fill="hold" nodeType="withEffect">
-                            <p:stCondLst>
-                              <p:cond delay="0"/>
-                            </p:stCondLst>
-                            <p:childTnLst>
-                              <p:animEffect transition="in" filter="fade">
-                                <p:cBhvr>
-                                  <p:cTn id="38" dur="450"/>
-                                  <p:tgtEl>
-                                    <p:spTgt spid="12"/>
-                                  </p:tgtEl>
-                                </p:cBhvr>
-                              </p:animEffect>
-                              <p:set>
-                                <p:cBhvr>
-                                  <p:cTn id="39" dur="1" fill="hold">
-                                    <p:stCondLst>
-                                      <p:cond delay="0"/>
-                                    </p:stCondLst>
-                                  </p:cTn>
-                                  <p:tgtEl>
-                                    <p:spTgt spid="12"/>
-                                  </p:tgtEl>
-                                  <p:attrNameLst>
-                                    <p:attrName>style.visibility</p:attrName>
-                                  </p:attrNameLst>
-                                </p:cBhvr>
-                                <p:to>
-                                  <p:strVal val="visible"/>
-                                </p:to>
-                              </p:set>
-                            </p:childTnLst>
-                          </p:cTn>
-                        </p:par>
-                      </p:childTnLst>
-                    </p:cTn>
-                  </p:par>
-                </p:childTnLst>
-              </p:cTn>
-              <p:prevCondLst>
-                <p:cond evt="onPrev" delay="0">
-                  <p:tgtEl>
-                    <p:sldTgt/>
-                  </p:tgtEl>
-                </p:cond>
-              </p:prevCondLst>
-              <p:nextCondLst>
-                <p:cond evt="onNext" delay="0">
-                  <p:tgtEl>
-                    <p:sldTgt/>
-                  </p:tgtEl>
-                </p:cond>
-              </p:nextCondLst>
-            </p:seq>
-          </p:childTnLst>
-        </p:cTn>
-      </p:par>
-    </p:tnLst>
-  </p:timing>
 </p:sld>
 </file>
 
@@ -6850,448 +5769,6 @@
   <p:transition spd="med" advClick="1">
     <p:fade/>
   </p:transition>
-  <p:timing>
-    <p:tnLst>
-      <p:par>
-        <p:cTn id="2" dur="indefinite" restart="never" nodeType="tmRoot">
-          <p:childTnLst>
-            <p:seq concurrent="1" nextAc="seek">
-              <p:cTn id="3" dur="indefinite" nodeType="mainSeq">
-                <p:childTnLst>
-                  <p:par>
-                    <p:cTn id="4" fill="hold" nodeType="withEffect">
-                      <p:stCondLst>
-                        <p:cond delay="0"/>
-                      </p:stCondLst>
-                      <p:childTnLst>
-                        <p:par>
-                          <p:cTn id="5" fill="hold" nodeType="withEffect">
-                            <p:stCondLst>
-                              <p:cond delay="0"/>
-                            </p:stCondLst>
-                            <p:childTnLst>
-                              <p:animEffect transition="in" filter="fade">
-                                <p:cBhvr>
-                                  <p:cTn id="6" dur="450"/>
-                                  <p:tgtEl>
-                                    <p:spTgt spid="2"/>
-                                  </p:tgtEl>
-                                </p:cBhvr>
-                              </p:animEffect>
-                              <p:set>
-                                <p:cBhvr>
-                                  <p:cTn id="7" dur="1" fill="hold">
-                                    <p:stCondLst>
-                                      <p:cond delay="0"/>
-                                    </p:stCondLst>
-                                  </p:cTn>
-                                  <p:tgtEl>
-                                    <p:spTgt spid="2"/>
-                                  </p:tgtEl>
-                                  <p:attrNameLst>
-                                    <p:attrName>style.visibility</p:attrName>
-                                  </p:attrNameLst>
-                                </p:cBhvr>
-                                <p:to>
-                                  <p:strVal val="visible"/>
-                                </p:to>
-                              </p:set>
-                            </p:childTnLst>
-                          </p:cTn>
-                        </p:par>
-                        <p:par>
-                          <p:cTn id="8" fill="hold" nodeType="withEffect">
-                            <p:stCondLst>
-                              <p:cond delay="0"/>
-                            </p:stCondLst>
-                            <p:childTnLst>
-                              <p:animEffect transition="in" filter="fade">
-                                <p:cBhvr>
-                                  <p:cTn id="9" dur="450"/>
-                                  <p:tgtEl>
-                                    <p:spTgt spid="3"/>
-                                  </p:tgtEl>
-                                </p:cBhvr>
-                              </p:animEffect>
-                              <p:set>
-                                <p:cBhvr>
-                                  <p:cTn id="10" dur="1" fill="hold">
-                                    <p:stCondLst>
-                                      <p:cond delay="0"/>
-                                    </p:stCondLst>
-                                  </p:cTn>
-                                  <p:tgtEl>
-                                    <p:spTgt spid="3"/>
-                                  </p:tgtEl>
-                                  <p:attrNameLst>
-                                    <p:attrName>style.visibility</p:attrName>
-                                  </p:attrNameLst>
-                                </p:cBhvr>
-                                <p:to>
-                                  <p:strVal val="visible"/>
-                                </p:to>
-                              </p:set>
-                            </p:childTnLst>
-                          </p:cTn>
-                        </p:par>
-                        <p:par>
-                          <p:cTn id="11" fill="hold" nodeType="withEffect">
-                            <p:stCondLst>
-                              <p:cond delay="0"/>
-                            </p:stCondLst>
-                            <p:childTnLst>
-                              <p:animEffect transition="in" filter="fade">
-                                <p:cBhvr>
-                                  <p:cTn id="12" dur="450"/>
-                                  <p:tgtEl>
-                                    <p:spTgt spid="4"/>
-                                  </p:tgtEl>
-                                </p:cBhvr>
-                              </p:animEffect>
-                              <p:set>
-                                <p:cBhvr>
-                                  <p:cTn id="13" dur="1" fill="hold">
-                                    <p:stCondLst>
-                                      <p:cond delay="0"/>
-                                    </p:stCondLst>
-                                  </p:cTn>
-                                  <p:tgtEl>
-                                    <p:spTgt spid="4"/>
-                                  </p:tgtEl>
-                                  <p:attrNameLst>
-                                    <p:attrName>style.visibility</p:attrName>
-                                  </p:attrNameLst>
-                                </p:cBhvr>
-                                <p:to>
-                                  <p:strVal val="visible"/>
-                                </p:to>
-                              </p:set>
-                            </p:childTnLst>
-                          </p:cTn>
-                        </p:par>
-                        <p:par>
-                          <p:cTn id="14" fill="hold" nodeType="withEffect">
-                            <p:stCondLst>
-                              <p:cond delay="0"/>
-                            </p:stCondLst>
-                            <p:childTnLst>
-                              <p:animEffect transition="in" filter="fade">
-                                <p:cBhvr>
-                                  <p:cTn id="15" dur="450"/>
-                                  <p:tgtEl>
-                                    <p:spTgt spid="5"/>
-                                  </p:tgtEl>
-                                </p:cBhvr>
-                              </p:animEffect>
-                              <p:set>
-                                <p:cBhvr>
-                                  <p:cTn id="16" dur="1" fill="hold">
-                                    <p:stCondLst>
-                                      <p:cond delay="0"/>
-                                    </p:stCondLst>
-                                  </p:cTn>
-                                  <p:tgtEl>
-                                    <p:spTgt spid="5"/>
-                                  </p:tgtEl>
-                                  <p:attrNameLst>
-                                    <p:attrName>style.visibility</p:attrName>
-                                  </p:attrNameLst>
-                                </p:cBhvr>
-                                <p:to>
-                                  <p:strVal val="visible"/>
-                                </p:to>
-                              </p:set>
-                            </p:childTnLst>
-                          </p:cTn>
-                        </p:par>
-                        <p:par>
-                          <p:cTn id="17" fill="hold" nodeType="withEffect">
-                            <p:stCondLst>
-                              <p:cond delay="0"/>
-                            </p:stCondLst>
-                            <p:childTnLst>
-                              <p:animEffect transition="in" filter="fade">
-                                <p:cBhvr>
-                                  <p:cTn id="18" dur="450"/>
-                                  <p:tgtEl>
-                                    <p:spTgt spid="6"/>
-                                  </p:tgtEl>
-                                </p:cBhvr>
-                              </p:animEffect>
-                              <p:set>
-                                <p:cBhvr>
-                                  <p:cTn id="19" dur="1" fill="hold">
-                                    <p:stCondLst>
-                                      <p:cond delay="0"/>
-                                    </p:stCondLst>
-                                  </p:cTn>
-                                  <p:tgtEl>
-                                    <p:spTgt spid="6"/>
-                                  </p:tgtEl>
-                                  <p:attrNameLst>
-                                    <p:attrName>style.visibility</p:attrName>
-                                  </p:attrNameLst>
-                                </p:cBhvr>
-                                <p:to>
-                                  <p:strVal val="visible"/>
-                                </p:to>
-                              </p:set>
-                            </p:childTnLst>
-                          </p:cTn>
-                        </p:par>
-                        <p:par>
-                          <p:cTn id="20" fill="hold" nodeType="withEffect">
-                            <p:stCondLst>
-                              <p:cond delay="0"/>
-                            </p:stCondLst>
-                            <p:childTnLst>
-                              <p:animEffect transition="in" filter="fade">
-                                <p:cBhvr>
-                                  <p:cTn id="21" dur="450"/>
-                                  <p:tgtEl>
-                                    <p:spTgt spid="7"/>
-                                  </p:tgtEl>
-                                </p:cBhvr>
-                              </p:animEffect>
-                              <p:set>
-                                <p:cBhvr>
-                                  <p:cTn id="22" dur="1" fill="hold">
-                                    <p:stCondLst>
-                                      <p:cond delay="0"/>
-                                    </p:stCondLst>
-                                  </p:cTn>
-                                  <p:tgtEl>
-                                    <p:spTgt spid="7"/>
-                                  </p:tgtEl>
-                                  <p:attrNameLst>
-                                    <p:attrName>style.visibility</p:attrName>
-                                  </p:attrNameLst>
-                                </p:cBhvr>
-                                <p:to>
-                                  <p:strVal val="visible"/>
-                                </p:to>
-                              </p:set>
-                            </p:childTnLst>
-                          </p:cTn>
-                        </p:par>
-                      </p:childTnLst>
-                    </p:cTn>
-                  </p:par>
-                  <p:par>
-                    <p:cTn id="23" fill="hold" nodeType="clickEffect">
-                      <p:stCondLst>
-                        <p:cond delay="0"/>
-                      </p:stCondLst>
-                      <p:childTnLst>
-                        <p:par>
-                          <p:cTn id="24" fill="hold" nodeType="withEffect">
-                            <p:stCondLst>
-                              <p:cond delay="0"/>
-                            </p:stCondLst>
-                            <p:childTnLst>
-                              <p:animEffect transition="in" filter="fade">
-                                <p:cBhvr>
-                                  <p:cTn id="25" dur="450"/>
-                                  <p:tgtEl>
-                                    <p:spTgt spid="8"/>
-                                  </p:tgtEl>
-                                </p:cBhvr>
-                              </p:animEffect>
-                              <p:set>
-                                <p:cBhvr>
-                                  <p:cTn id="26" dur="1" fill="hold">
-                                    <p:stCondLst>
-                                      <p:cond delay="0"/>
-                                    </p:stCondLst>
-                                  </p:cTn>
-                                  <p:tgtEl>
-                                    <p:spTgt spid="8"/>
-                                  </p:tgtEl>
-                                  <p:attrNameLst>
-                                    <p:attrName>style.visibility</p:attrName>
-                                  </p:attrNameLst>
-                                </p:cBhvr>
-                                <p:to>
-                                  <p:strVal val="visible"/>
-                                </p:to>
-                              </p:set>
-                            </p:childTnLst>
-                          </p:cTn>
-                        </p:par>
-                        <p:par>
-                          <p:cTn id="27" fill="hold" nodeType="withEffect">
-                            <p:stCondLst>
-                              <p:cond delay="0"/>
-                            </p:stCondLst>
-                            <p:childTnLst>
-                              <p:animEffect transition="in" filter="fade">
-                                <p:cBhvr>
-                                  <p:cTn id="28" dur="450"/>
-                                  <p:tgtEl>
-                                    <p:spTgt spid="10"/>
-                                  </p:tgtEl>
-                                </p:cBhvr>
-                              </p:animEffect>
-                              <p:set>
-                                <p:cBhvr>
-                                  <p:cTn id="29" dur="1" fill="hold">
-                                    <p:stCondLst>
-                                      <p:cond delay="0"/>
-                                    </p:stCondLst>
-                                  </p:cTn>
-                                  <p:tgtEl>
-                                    <p:spTgt spid="10"/>
-                                  </p:tgtEl>
-                                  <p:attrNameLst>
-                                    <p:attrName>style.visibility</p:attrName>
-                                  </p:attrNameLst>
-                                </p:cBhvr>
-                                <p:to>
-                                  <p:strVal val="visible"/>
-                                </p:to>
-                              </p:set>
-                            </p:childTnLst>
-                          </p:cTn>
-                        </p:par>
-                      </p:childTnLst>
-                    </p:cTn>
-                  </p:par>
-                  <p:par>
-                    <p:cTn id="30" fill="hold" nodeType="clickEffect">
-                      <p:stCondLst>
-                        <p:cond delay="0"/>
-                      </p:stCondLst>
-                      <p:childTnLst>
-                        <p:par>
-                          <p:cTn id="31" fill="hold" nodeType="withEffect">
-                            <p:stCondLst>
-                              <p:cond delay="0"/>
-                            </p:stCondLst>
-                            <p:childTnLst>
-                              <p:animEffect transition="in" filter="fade">
-                                <p:cBhvr>
-                                  <p:cTn id="32" dur="450"/>
-                                  <p:tgtEl>
-                                    <p:spTgt spid="9"/>
-                                  </p:tgtEl>
-                                </p:cBhvr>
-                              </p:animEffect>
-                              <p:set>
-                                <p:cBhvr>
-                                  <p:cTn id="33" dur="1" fill="hold">
-                                    <p:stCondLst>
-                                      <p:cond delay="0"/>
-                                    </p:stCondLst>
-                                  </p:cTn>
-                                  <p:tgtEl>
-                                    <p:spTgt spid="9"/>
-                                  </p:tgtEl>
-                                  <p:attrNameLst>
-                                    <p:attrName>style.visibility</p:attrName>
-                                  </p:attrNameLst>
-                                </p:cBhvr>
-                                <p:to>
-                                  <p:strVal val="visible"/>
-                                </p:to>
-                              </p:set>
-                            </p:childTnLst>
-                          </p:cTn>
-                        </p:par>
-                        <p:par>
-                          <p:cTn id="34" fill="hold" nodeType="withEffect">
-                            <p:stCondLst>
-                              <p:cond delay="0"/>
-                            </p:stCondLst>
-                            <p:childTnLst>
-                              <p:animEffect transition="in" filter="fade">
-                                <p:cBhvr>
-                                  <p:cTn id="35" dur="450"/>
-                                  <p:tgtEl>
-                                    <p:spTgt spid="11"/>
-                                  </p:tgtEl>
-                                </p:cBhvr>
-                              </p:animEffect>
-                              <p:set>
-                                <p:cBhvr>
-                                  <p:cTn id="36" dur="1" fill="hold">
-                                    <p:stCondLst>
-                                      <p:cond delay="0"/>
-                                    </p:stCondLst>
-                                  </p:cTn>
-                                  <p:tgtEl>
-                                    <p:spTgt spid="11"/>
-                                  </p:tgtEl>
-                                  <p:attrNameLst>
-                                    <p:attrName>style.visibility</p:attrName>
-                                  </p:attrNameLst>
-                                </p:cBhvr>
-                                <p:to>
-                                  <p:strVal val="visible"/>
-                                </p:to>
-                              </p:set>
-                            </p:childTnLst>
-                          </p:cTn>
-                        </p:par>
-                        <p:par>
-                          <p:cTn id="37" fill="hold" nodeType="withEffect">
-                            <p:stCondLst>
-                              <p:cond delay="0"/>
-                            </p:stCondLst>
-                            <p:childTnLst>
-                              <p:animEffect transition="in" filter="fade">
-                                <p:cBhvr>
-                                  <p:cTn id="38" dur="450"/>
-                                  <p:tgtEl>
-                                    <p:spTgt spid="12"/>
-                                  </p:tgtEl>
-                                </p:cBhvr>
-                              </p:animEffect>
-                              <p:set>
-                                <p:cBhvr>
-                                  <p:cTn id="39" dur="1" fill="hold">
-                                    <p:stCondLst>
-                                      <p:cond delay="0"/>
-                                    </p:stCondLst>
-                                  </p:cTn>
-                                  <p:tgtEl>
-                                    <p:spTgt spid="12"/>
-                                  </p:tgtEl>
-                                  <p:attrNameLst>
-                                    <p:attrName>style.visibility</p:attrName>
-                                  </p:attrNameLst>
-                                </p:cBhvr>
-                                <p:to>
-                                  <p:strVal val="visible"/>
-                                </p:to>
-                              </p:set>
-                            </p:childTnLst>
-                          </p:cTn>
-                        </p:par>
-                      </p:childTnLst>
-                    </p:cTn>
-                  </p:par>
-                </p:childTnLst>
-              </p:cTn>
-              <p:prevCondLst>
-                <p:cond evt="onPrev" delay="0">
-                  <p:tgtEl>
-                    <p:sldTgt/>
-                  </p:tgtEl>
-                </p:cond>
-              </p:prevCondLst>
-              <p:nextCondLst>
-                <p:cond evt="onNext" delay="0">
-                  <p:tgtEl>
-                    <p:sldTgt/>
-                  </p:tgtEl>
-                </p:cond>
-              </p:nextCondLst>
-            </p:seq>
-          </p:childTnLst>
-        </p:cTn>
-      </p:par>
-    </p:tnLst>
-  </p:timing>
 </p:sld>
 </file>
 
@@ -7924,588 +6401,6 @@
   <p:transition spd="med" advClick="1">
     <p:fade/>
   </p:transition>
-  <p:timing>
-    <p:tnLst>
-      <p:par>
-        <p:cTn id="2" dur="indefinite" restart="never" nodeType="tmRoot">
-          <p:childTnLst>
-            <p:seq concurrent="1" nextAc="seek">
-              <p:cTn id="3" dur="indefinite" nodeType="mainSeq">
-                <p:childTnLst>
-                  <p:par>
-                    <p:cTn id="4" fill="hold" nodeType="withEffect">
-                      <p:stCondLst>
-                        <p:cond delay="0"/>
-                      </p:stCondLst>
-                      <p:childTnLst>
-                        <p:par>
-                          <p:cTn id="5" fill="hold" nodeType="withEffect">
-                            <p:stCondLst>
-                              <p:cond delay="0"/>
-                            </p:stCondLst>
-                            <p:childTnLst>
-                              <p:animEffect transition="in" filter="fade">
-                                <p:cBhvr>
-                                  <p:cTn id="6" dur="450"/>
-                                  <p:tgtEl>
-                                    <p:spTgt spid="2"/>
-                                  </p:tgtEl>
-                                </p:cBhvr>
-                              </p:animEffect>
-                              <p:set>
-                                <p:cBhvr>
-                                  <p:cTn id="7" dur="1" fill="hold">
-                                    <p:stCondLst>
-                                      <p:cond delay="0"/>
-                                    </p:stCondLst>
-                                  </p:cTn>
-                                  <p:tgtEl>
-                                    <p:spTgt spid="2"/>
-                                  </p:tgtEl>
-                                  <p:attrNameLst>
-                                    <p:attrName>style.visibility</p:attrName>
-                                  </p:attrNameLst>
-                                </p:cBhvr>
-                                <p:to>
-                                  <p:strVal val="visible"/>
-                                </p:to>
-                              </p:set>
-                            </p:childTnLst>
-                          </p:cTn>
-                        </p:par>
-                        <p:par>
-                          <p:cTn id="8" fill="hold" nodeType="withEffect">
-                            <p:stCondLst>
-                              <p:cond delay="0"/>
-                            </p:stCondLst>
-                            <p:childTnLst>
-                              <p:animEffect transition="in" filter="fade">
-                                <p:cBhvr>
-                                  <p:cTn id="9" dur="450"/>
-                                  <p:tgtEl>
-                                    <p:spTgt spid="3"/>
-                                  </p:tgtEl>
-                                </p:cBhvr>
-                              </p:animEffect>
-                              <p:set>
-                                <p:cBhvr>
-                                  <p:cTn id="10" dur="1" fill="hold">
-                                    <p:stCondLst>
-                                      <p:cond delay="0"/>
-                                    </p:stCondLst>
-                                  </p:cTn>
-                                  <p:tgtEl>
-                                    <p:spTgt spid="3"/>
-                                  </p:tgtEl>
-                                  <p:attrNameLst>
-                                    <p:attrName>style.visibility</p:attrName>
-                                  </p:attrNameLst>
-                                </p:cBhvr>
-                                <p:to>
-                                  <p:strVal val="visible"/>
-                                </p:to>
-                              </p:set>
-                            </p:childTnLst>
-                          </p:cTn>
-                        </p:par>
-                        <p:par>
-                          <p:cTn id="11" fill="hold" nodeType="withEffect">
-                            <p:stCondLst>
-                              <p:cond delay="0"/>
-                            </p:stCondLst>
-                            <p:childTnLst>
-                              <p:animEffect transition="in" filter="fade">
-                                <p:cBhvr>
-                                  <p:cTn id="12" dur="450"/>
-                                  <p:tgtEl>
-                                    <p:spTgt spid="4"/>
-                                  </p:tgtEl>
-                                </p:cBhvr>
-                              </p:animEffect>
-                              <p:set>
-                                <p:cBhvr>
-                                  <p:cTn id="13" dur="1" fill="hold">
-                                    <p:stCondLst>
-                                      <p:cond delay="0"/>
-                                    </p:stCondLst>
-                                  </p:cTn>
-                                  <p:tgtEl>
-                                    <p:spTgt spid="4"/>
-                                  </p:tgtEl>
-                                  <p:attrNameLst>
-                                    <p:attrName>style.visibility</p:attrName>
-                                  </p:attrNameLst>
-                                </p:cBhvr>
-                                <p:to>
-                                  <p:strVal val="visible"/>
-                                </p:to>
-                              </p:set>
-                            </p:childTnLst>
-                          </p:cTn>
-                        </p:par>
-                        <p:par>
-                          <p:cTn id="14" fill="hold" nodeType="withEffect">
-                            <p:stCondLst>
-                              <p:cond delay="0"/>
-                            </p:stCondLst>
-                            <p:childTnLst>
-                              <p:animEffect transition="in" filter="fade">
-                                <p:cBhvr>
-                                  <p:cTn id="15" dur="450"/>
-                                  <p:tgtEl>
-                                    <p:spTgt spid="5"/>
-                                  </p:tgtEl>
-                                </p:cBhvr>
-                              </p:animEffect>
-                              <p:set>
-                                <p:cBhvr>
-                                  <p:cTn id="16" dur="1" fill="hold">
-                                    <p:stCondLst>
-                                      <p:cond delay="0"/>
-                                    </p:stCondLst>
-                                  </p:cTn>
-                                  <p:tgtEl>
-                                    <p:spTgt spid="5"/>
-                                  </p:tgtEl>
-                                  <p:attrNameLst>
-                                    <p:attrName>style.visibility</p:attrName>
-                                  </p:attrNameLst>
-                                </p:cBhvr>
-                                <p:to>
-                                  <p:strVal val="visible"/>
-                                </p:to>
-                              </p:set>
-                            </p:childTnLst>
-                          </p:cTn>
-                        </p:par>
-                        <p:par>
-                          <p:cTn id="17" fill="hold" nodeType="withEffect">
-                            <p:stCondLst>
-                              <p:cond delay="0"/>
-                            </p:stCondLst>
-                            <p:childTnLst>
-                              <p:animEffect transition="in" filter="fade">
-                                <p:cBhvr>
-                                  <p:cTn id="18" dur="450"/>
-                                  <p:tgtEl>
-                                    <p:spTgt spid="6"/>
-                                  </p:tgtEl>
-                                </p:cBhvr>
-                              </p:animEffect>
-                              <p:set>
-                                <p:cBhvr>
-                                  <p:cTn id="19" dur="1" fill="hold">
-                                    <p:stCondLst>
-                                      <p:cond delay="0"/>
-                                    </p:stCondLst>
-                                  </p:cTn>
-                                  <p:tgtEl>
-                                    <p:spTgt spid="6"/>
-                                  </p:tgtEl>
-                                  <p:attrNameLst>
-                                    <p:attrName>style.visibility</p:attrName>
-                                  </p:attrNameLst>
-                                </p:cBhvr>
-                                <p:to>
-                                  <p:strVal val="visible"/>
-                                </p:to>
-                              </p:set>
-                            </p:childTnLst>
-                          </p:cTn>
-                        </p:par>
-                      </p:childTnLst>
-                    </p:cTn>
-                  </p:par>
-                  <p:par>
-                    <p:cTn id="20" fill="hold" nodeType="clickEffect">
-                      <p:stCondLst>
-                        <p:cond delay="0"/>
-                      </p:stCondLst>
-                      <p:childTnLst>
-                        <p:par>
-                          <p:cTn id="21" fill="hold" nodeType="withEffect">
-                            <p:stCondLst>
-                              <p:cond delay="0"/>
-                            </p:stCondLst>
-                            <p:childTnLst>
-                              <p:animEffect transition="in" filter="fade">
-                                <p:cBhvr>
-                                  <p:cTn id="22" dur="450"/>
-                                  <p:tgtEl>
-                                    <p:spTgt spid="7"/>
-                                  </p:tgtEl>
-                                </p:cBhvr>
-                              </p:animEffect>
-                              <p:set>
-                                <p:cBhvr>
-                                  <p:cTn id="23" dur="1" fill="hold">
-                                    <p:stCondLst>
-                                      <p:cond delay="0"/>
-                                    </p:stCondLst>
-                                  </p:cTn>
-                                  <p:tgtEl>
-                                    <p:spTgt spid="7"/>
-                                  </p:tgtEl>
-                                  <p:attrNameLst>
-                                    <p:attrName>style.visibility</p:attrName>
-                                  </p:attrNameLst>
-                                </p:cBhvr>
-                                <p:to>
-                                  <p:strVal val="visible"/>
-                                </p:to>
-                              </p:set>
-                            </p:childTnLst>
-                          </p:cTn>
-                        </p:par>
-                        <p:par>
-                          <p:cTn id="24" fill="hold" nodeType="withEffect">
-                            <p:stCondLst>
-                              <p:cond delay="0"/>
-                            </p:stCondLst>
-                            <p:childTnLst>
-                              <p:animEffect transition="in" filter="fade">
-                                <p:cBhvr>
-                                  <p:cTn id="25" dur="450"/>
-                                  <p:tgtEl>
-                                    <p:spTgt spid="8"/>
-                                  </p:tgtEl>
-                                </p:cBhvr>
-                              </p:animEffect>
-                              <p:set>
-                                <p:cBhvr>
-                                  <p:cTn id="26" dur="1" fill="hold">
-                                    <p:stCondLst>
-                                      <p:cond delay="0"/>
-                                    </p:stCondLst>
-                                  </p:cTn>
-                                  <p:tgtEl>
-                                    <p:spTgt spid="8"/>
-                                  </p:tgtEl>
-                                  <p:attrNameLst>
-                                    <p:attrName>style.visibility</p:attrName>
-                                  </p:attrNameLst>
-                                </p:cBhvr>
-                                <p:to>
-                                  <p:strVal val="visible"/>
-                                </p:to>
-                              </p:set>
-                            </p:childTnLst>
-                          </p:cTn>
-                        </p:par>
-                        <p:par>
-                          <p:cTn id="27" fill="hold" nodeType="withEffect">
-                            <p:stCondLst>
-                              <p:cond delay="0"/>
-                            </p:stCondLst>
-                            <p:childTnLst>
-                              <p:animEffect transition="in" filter="fade">
-                                <p:cBhvr>
-                                  <p:cTn id="28" dur="450"/>
-                                  <p:tgtEl>
-                                    <p:spTgt spid="9"/>
-                                  </p:tgtEl>
-                                </p:cBhvr>
-                              </p:animEffect>
-                              <p:set>
-                                <p:cBhvr>
-                                  <p:cTn id="29" dur="1" fill="hold">
-                                    <p:stCondLst>
-                                      <p:cond delay="0"/>
-                                    </p:stCondLst>
-                                  </p:cTn>
-                                  <p:tgtEl>
-                                    <p:spTgt spid="9"/>
-                                  </p:tgtEl>
-                                  <p:attrNameLst>
-                                    <p:attrName>style.visibility</p:attrName>
-                                  </p:attrNameLst>
-                                </p:cBhvr>
-                                <p:to>
-                                  <p:strVal val="visible"/>
-                                </p:to>
-                              </p:set>
-                            </p:childTnLst>
-                          </p:cTn>
-                        </p:par>
-                        <p:par>
-                          <p:cTn id="30" fill="hold" nodeType="withEffect">
-                            <p:stCondLst>
-                              <p:cond delay="0"/>
-                            </p:stCondLst>
-                            <p:childTnLst>
-                              <p:animEffect transition="in" filter="fade">
-                                <p:cBhvr>
-                                  <p:cTn id="31" dur="450"/>
-                                  <p:tgtEl>
-                                    <p:spTgt spid="10"/>
-                                  </p:tgtEl>
-                                </p:cBhvr>
-                              </p:animEffect>
-                              <p:set>
-                                <p:cBhvr>
-                                  <p:cTn id="32" dur="1" fill="hold">
-                                    <p:stCondLst>
-                                      <p:cond delay="0"/>
-                                    </p:stCondLst>
-                                  </p:cTn>
-                                  <p:tgtEl>
-                                    <p:spTgt spid="10"/>
-                                  </p:tgtEl>
-                                  <p:attrNameLst>
-                                    <p:attrName>style.visibility</p:attrName>
-                                  </p:attrNameLst>
-                                </p:cBhvr>
-                                <p:to>
-                                  <p:strVal val="visible"/>
-                                </p:to>
-                              </p:set>
-                            </p:childTnLst>
-                          </p:cTn>
-                        </p:par>
-                      </p:childTnLst>
-                    </p:cTn>
-                  </p:par>
-                  <p:par>
-                    <p:cTn id="33" fill="hold" nodeType="clickEffect">
-                      <p:stCondLst>
-                        <p:cond delay="0"/>
-                      </p:stCondLst>
-                      <p:childTnLst>
-                        <p:par>
-                          <p:cTn id="34" fill="hold" nodeType="withEffect">
-                            <p:stCondLst>
-                              <p:cond delay="0"/>
-                            </p:stCondLst>
-                            <p:childTnLst>
-                              <p:animEffect transition="in" filter="fade">
-                                <p:cBhvr>
-                                  <p:cTn id="35" dur="450"/>
-                                  <p:tgtEl>
-                                    <p:spTgt spid="11"/>
-                                  </p:tgtEl>
-                                </p:cBhvr>
-                              </p:animEffect>
-                              <p:set>
-                                <p:cBhvr>
-                                  <p:cTn id="36" dur="1" fill="hold">
-                                    <p:stCondLst>
-                                      <p:cond delay="0"/>
-                                    </p:stCondLst>
-                                  </p:cTn>
-                                  <p:tgtEl>
-                                    <p:spTgt spid="11"/>
-                                  </p:tgtEl>
-                                  <p:attrNameLst>
-                                    <p:attrName>style.visibility</p:attrName>
-                                  </p:attrNameLst>
-                                </p:cBhvr>
-                                <p:to>
-                                  <p:strVal val="visible"/>
-                                </p:to>
-                              </p:set>
-                            </p:childTnLst>
-                          </p:cTn>
-                        </p:par>
-                        <p:par>
-                          <p:cTn id="37" fill="hold" nodeType="withEffect">
-                            <p:stCondLst>
-                              <p:cond delay="0"/>
-                            </p:stCondLst>
-                            <p:childTnLst>
-                              <p:animEffect transition="in" filter="fade">
-                                <p:cBhvr>
-                                  <p:cTn id="38" dur="450"/>
-                                  <p:tgtEl>
-                                    <p:spTgt spid="12"/>
-                                  </p:tgtEl>
-                                </p:cBhvr>
-                              </p:animEffect>
-                              <p:set>
-                                <p:cBhvr>
-                                  <p:cTn id="39" dur="1" fill="hold">
-                                    <p:stCondLst>
-                                      <p:cond delay="0"/>
-                                    </p:stCondLst>
-                                  </p:cTn>
-                                  <p:tgtEl>
-                                    <p:spTgt spid="12"/>
-                                  </p:tgtEl>
-                                  <p:attrNameLst>
-                                    <p:attrName>style.visibility</p:attrName>
-                                  </p:attrNameLst>
-                                </p:cBhvr>
-                                <p:to>
-                                  <p:strVal val="visible"/>
-                                </p:to>
-                              </p:set>
-                            </p:childTnLst>
-                          </p:cTn>
-                        </p:par>
-                        <p:par>
-                          <p:cTn id="40" fill="hold" nodeType="withEffect">
-                            <p:stCondLst>
-                              <p:cond delay="0"/>
-                            </p:stCondLst>
-                            <p:childTnLst>
-                              <p:animEffect transition="in" filter="fade">
-                                <p:cBhvr>
-                                  <p:cTn id="41" dur="450"/>
-                                  <p:tgtEl>
-                                    <p:spTgt spid="13"/>
-                                  </p:tgtEl>
-                                </p:cBhvr>
-                              </p:animEffect>
-                              <p:set>
-                                <p:cBhvr>
-                                  <p:cTn id="42" dur="1" fill="hold">
-                                    <p:stCondLst>
-                                      <p:cond delay="0"/>
-                                    </p:stCondLst>
-                                  </p:cTn>
-                                  <p:tgtEl>
-                                    <p:spTgt spid="13"/>
-                                  </p:tgtEl>
-                                  <p:attrNameLst>
-                                    <p:attrName>style.visibility</p:attrName>
-                                  </p:attrNameLst>
-                                </p:cBhvr>
-                                <p:to>
-                                  <p:strVal val="visible"/>
-                                </p:to>
-                              </p:set>
-                            </p:childTnLst>
-                          </p:cTn>
-                        </p:par>
-                        <p:par>
-                          <p:cTn id="43" fill="hold" nodeType="withEffect">
-                            <p:stCondLst>
-                              <p:cond delay="0"/>
-                            </p:stCondLst>
-                            <p:childTnLst>
-                              <p:animEffect transition="in" filter="fade">
-                                <p:cBhvr>
-                                  <p:cTn id="44" dur="450"/>
-                                  <p:tgtEl>
-                                    <p:spTgt spid="14"/>
-                                  </p:tgtEl>
-                                </p:cBhvr>
-                              </p:animEffect>
-                              <p:set>
-                                <p:cBhvr>
-                                  <p:cTn id="45" dur="1" fill="hold">
-                                    <p:stCondLst>
-                                      <p:cond delay="0"/>
-                                    </p:stCondLst>
-                                  </p:cTn>
-                                  <p:tgtEl>
-                                    <p:spTgt spid="14"/>
-                                  </p:tgtEl>
-                                  <p:attrNameLst>
-                                    <p:attrName>style.visibility</p:attrName>
-                                  </p:attrNameLst>
-                                </p:cBhvr>
-                                <p:to>
-                                  <p:strVal val="visible"/>
-                                </p:to>
-                              </p:set>
-                            </p:childTnLst>
-                          </p:cTn>
-                        </p:par>
-                        <p:par>
-                          <p:cTn id="46" fill="hold" nodeType="withEffect">
-                            <p:stCondLst>
-                              <p:cond delay="0"/>
-                            </p:stCondLst>
-                            <p:childTnLst>
-                              <p:animEffect transition="in" filter="fade">
-                                <p:cBhvr>
-                                  <p:cTn id="47" dur="450"/>
-                                  <p:tgtEl>
-                                    <p:spTgt spid="15"/>
-                                  </p:tgtEl>
-                                </p:cBhvr>
-                              </p:animEffect>
-                              <p:set>
-                                <p:cBhvr>
-                                  <p:cTn id="48" dur="1" fill="hold">
-                                    <p:stCondLst>
-                                      <p:cond delay="0"/>
-                                    </p:stCondLst>
-                                  </p:cTn>
-                                  <p:tgtEl>
-                                    <p:spTgt spid="15"/>
-                                  </p:tgtEl>
-                                  <p:attrNameLst>
-                                    <p:attrName>style.visibility</p:attrName>
-                                  </p:attrNameLst>
-                                </p:cBhvr>
-                                <p:to>
-                                  <p:strVal val="visible"/>
-                                </p:to>
-                              </p:set>
-                            </p:childTnLst>
-                          </p:cTn>
-                        </p:par>
-                        <p:par>
-                          <p:cTn id="49" fill="hold" nodeType="withEffect">
-                            <p:stCondLst>
-                              <p:cond delay="0"/>
-                            </p:stCondLst>
-                            <p:childTnLst>
-                              <p:animEffect transition="in" filter="fade">
-                                <p:cBhvr>
-                                  <p:cTn id="50" dur="450"/>
-                                  <p:tgtEl>
-                                    <p:spTgt spid="16"/>
-                                  </p:tgtEl>
-                                </p:cBhvr>
-                              </p:animEffect>
-                              <p:set>
-                                <p:cBhvr>
-                                  <p:cTn id="51" dur="1" fill="hold">
-                                    <p:stCondLst>
-                                      <p:cond delay="0"/>
-                                    </p:stCondLst>
-                                  </p:cTn>
-                                  <p:tgtEl>
-                                    <p:spTgt spid="16"/>
-                                  </p:tgtEl>
-                                  <p:attrNameLst>
-                                    <p:attrName>style.visibility</p:attrName>
-                                  </p:attrNameLst>
-                                </p:cBhvr>
-                                <p:to>
-                                  <p:strVal val="visible"/>
-                                </p:to>
-                              </p:set>
-                            </p:childTnLst>
-                          </p:cTn>
-                        </p:par>
-                      </p:childTnLst>
-                    </p:cTn>
-                  </p:par>
-                </p:childTnLst>
-              </p:cTn>
-              <p:prevCondLst>
-                <p:cond evt="onPrev" delay="0">
-                  <p:tgtEl>
-                    <p:sldTgt/>
-                  </p:tgtEl>
-                </p:cond>
-              </p:prevCondLst>
-              <p:nextCondLst>
-                <p:cond evt="onNext" delay="0">
-                  <p:tgtEl>
-                    <p:sldTgt/>
-                  </p:tgtEl>
-                </p:cond>
-              </p:nextCondLst>
-            </p:seq>
-          </p:childTnLst>
-        </p:cTn>
-      </p:par>
-    </p:tnLst>
-  </p:timing>
 </p:sld>
 </file>
 
@@ -8717,203 +6612,6 @@
   <p:transition spd="med" advClick="1">
     <p:fade/>
   </p:transition>
-  <p:timing>
-    <p:tnLst>
-      <p:par>
-        <p:cTn id="2" dur="indefinite" restart="never" nodeType="tmRoot">
-          <p:childTnLst>
-            <p:seq concurrent="1" nextAc="seek">
-              <p:cTn id="3" dur="indefinite" nodeType="mainSeq">
-                <p:childTnLst>
-                  <p:par>
-                    <p:cTn id="4" fill="hold" nodeType="withEffect">
-                      <p:stCondLst>
-                        <p:cond delay="0"/>
-                      </p:stCondLst>
-                      <p:childTnLst>
-                        <p:par>
-                          <p:cTn id="5" fill="hold" nodeType="withEffect">
-                            <p:stCondLst>
-                              <p:cond delay="0"/>
-                            </p:stCondLst>
-                            <p:childTnLst>
-                              <p:animEffect transition="in" filter="fade">
-                                <p:cBhvr>
-                                  <p:cTn id="6" dur="450"/>
-                                  <p:tgtEl>
-                                    <p:spTgt spid="2"/>
-                                  </p:tgtEl>
-                                </p:cBhvr>
-                              </p:animEffect>
-                              <p:set>
-                                <p:cBhvr>
-                                  <p:cTn id="7" dur="1" fill="hold">
-                                    <p:stCondLst>
-                                      <p:cond delay="0"/>
-                                    </p:stCondLst>
-                                  </p:cTn>
-                                  <p:tgtEl>
-                                    <p:spTgt spid="2"/>
-                                  </p:tgtEl>
-                                  <p:attrNameLst>
-                                    <p:attrName>style.visibility</p:attrName>
-                                  </p:attrNameLst>
-                                </p:cBhvr>
-                                <p:to>
-                                  <p:strVal val="visible"/>
-                                </p:to>
-                              </p:set>
-                            </p:childTnLst>
-                          </p:cTn>
-                        </p:par>
-                        <p:par>
-                          <p:cTn id="8" fill="hold" nodeType="withEffect">
-                            <p:stCondLst>
-                              <p:cond delay="0"/>
-                            </p:stCondLst>
-                            <p:childTnLst>
-                              <p:animEffect transition="in" filter="fade">
-                                <p:cBhvr>
-                                  <p:cTn id="9" dur="450"/>
-                                  <p:tgtEl>
-                                    <p:spTgt spid="3"/>
-                                  </p:tgtEl>
-                                </p:cBhvr>
-                              </p:animEffect>
-                              <p:set>
-                                <p:cBhvr>
-                                  <p:cTn id="10" dur="1" fill="hold">
-                                    <p:stCondLst>
-                                      <p:cond delay="0"/>
-                                    </p:stCondLst>
-                                  </p:cTn>
-                                  <p:tgtEl>
-                                    <p:spTgt spid="3"/>
-                                  </p:tgtEl>
-                                  <p:attrNameLst>
-                                    <p:attrName>style.visibility</p:attrName>
-                                  </p:attrNameLst>
-                                </p:cBhvr>
-                                <p:to>
-                                  <p:strVal val="visible"/>
-                                </p:to>
-                              </p:set>
-                            </p:childTnLst>
-                          </p:cTn>
-                        </p:par>
-                      </p:childTnLst>
-                    </p:cTn>
-                  </p:par>
-                  <p:par>
-                    <p:cTn id="11" fill="hold" nodeType="clickEffect">
-                      <p:stCondLst>
-                        <p:cond delay="0"/>
-                      </p:stCondLst>
-                      <p:childTnLst>
-                        <p:par>
-                          <p:cTn id="12" fill="hold" nodeType="withEffect">
-                            <p:stCondLst>
-                              <p:cond delay="0"/>
-                            </p:stCondLst>
-                            <p:childTnLst>
-                              <p:animEffect transition="in" filter="fade">
-                                <p:cBhvr>
-                                  <p:cTn id="13" dur="450"/>
-                                  <p:tgtEl>
-                                    <p:spTgt spid="4"/>
-                                  </p:tgtEl>
-                                </p:cBhvr>
-                              </p:animEffect>
-                              <p:set>
-                                <p:cBhvr>
-                                  <p:cTn id="14" dur="1" fill="hold">
-                                    <p:stCondLst>
-                                      <p:cond delay="0"/>
-                                    </p:stCondLst>
-                                  </p:cTn>
-                                  <p:tgtEl>
-                                    <p:spTgt spid="4"/>
-                                  </p:tgtEl>
-                                  <p:attrNameLst>
-                                    <p:attrName>style.visibility</p:attrName>
-                                  </p:attrNameLst>
-                                </p:cBhvr>
-                                <p:to>
-                                  <p:strVal val="visible"/>
-                                </p:to>
-                              </p:set>
-                            </p:childTnLst>
-                          </p:cTn>
-                        </p:par>
-                      </p:childTnLst>
-                    </p:cTn>
-                  </p:par>
-                  <p:par>
-                    <p:cTn id="15" fill="hold" nodeType="clickEffect">
-                      <p:stCondLst>
-                        <p:cond delay="0"/>
-                      </p:stCondLst>
-                      <p:childTnLst>
-                        <p:par>
-                          <p:cTn id="16" fill="hold" nodeType="withEffect">
-                            <p:stCondLst>
-                              <p:cond delay="0"/>
-                            </p:stCondLst>
-                            <p:childTnLst>
-                              <p:animEffect transition="in" filter="fade">
-                                <p:cBhvr>
-                                  <p:cTn id="17" dur="450"/>
-                                  <p:tgtEl>
-                                    <p:spTgt spid="5"/>
-                                  </p:tgtEl>
-                                </p:cBhvr>
-                              </p:animEffect>
-                              <p:set>
-                                <p:cBhvr>
-                                  <p:cTn id="18" dur="1" fill="hold">
-                                    <p:stCondLst>
-                                      <p:cond delay="0"/>
-                                    </p:stCondLst>
-                                  </p:cTn>
-                                  <p:tgtEl>
-                                    <p:spTgt spid="5"/>
-                                  </p:tgtEl>
-                                  <p:attrNameLst>
-                                    <p:attrName>style.visibility</p:attrName>
-                                  </p:attrNameLst>
-                                </p:cBhvr>
-                                <p:to>
-                                  <p:strVal val="visible"/>
-                                </p:to>
-                              </p:set>
-                            </p:childTnLst>
-                          </p:cTn>
-                        </p:par>
-                      </p:childTnLst>
-                    </p:cTn>
-                  </p:par>
-                </p:childTnLst>
-              </p:cTn>
-              <p:prevCondLst>
-                <p:cond evt="onPrev" delay="0">
-                  <p:tgtEl>
-                    <p:sldTgt/>
-                  </p:tgtEl>
-                </p:cond>
-              </p:prevCondLst>
-              <p:nextCondLst>
-                <p:cond evt="onNext" delay="0">
-                  <p:tgtEl>
-                    <p:sldTgt/>
-                  </p:tgtEl>
-                </p:cond>
-              </p:nextCondLst>
-            </p:seq>
-          </p:childTnLst>
-        </p:cTn>
-      </p:par>
-    </p:tnLst>
-  </p:timing>
 </p:sld>
 </file>
 
@@ -11214,299 +8912,6 @@
   <p:transition spd="med" advClick="1">
     <p:fade/>
   </p:transition>
-  <p:timing>
-    <p:tnLst>
-      <p:par>
-        <p:cTn id="2" dur="indefinite" restart="never" nodeType="tmRoot">
-          <p:childTnLst>
-            <p:seq concurrent="1" nextAc="seek">
-              <p:cTn id="3" dur="indefinite" nodeType="mainSeq">
-                <p:childTnLst>
-                  <p:par>
-                    <p:cTn id="4" fill="hold" nodeType="withEffect">
-                      <p:stCondLst>
-                        <p:cond delay="0"/>
-                      </p:stCondLst>
-                      <p:childTnLst>
-                        <p:par>
-                          <p:cTn id="5" fill="hold" nodeType="withEffect">
-                            <p:stCondLst>
-                              <p:cond delay="0"/>
-                            </p:stCondLst>
-                            <p:childTnLst>
-                              <p:animEffect transition="in" filter="fade">
-                                <p:cBhvr>
-                                  <p:cTn id="6" dur="450"/>
-                                  <p:tgtEl>
-                                    <p:spTgt spid="2"/>
-                                  </p:tgtEl>
-                                </p:cBhvr>
-                              </p:animEffect>
-                              <p:set>
-                                <p:cBhvr>
-                                  <p:cTn id="7" dur="1" fill="hold">
-                                    <p:stCondLst>
-                                      <p:cond delay="0"/>
-                                    </p:stCondLst>
-                                  </p:cTn>
-                                  <p:tgtEl>
-                                    <p:spTgt spid="2"/>
-                                  </p:tgtEl>
-                                  <p:attrNameLst>
-                                    <p:attrName>style.visibility</p:attrName>
-                                  </p:attrNameLst>
-                                </p:cBhvr>
-                                <p:to>
-                                  <p:strVal val="visible"/>
-                                </p:to>
-                              </p:set>
-                            </p:childTnLst>
-                          </p:cTn>
-                        </p:par>
-                        <p:par>
-                          <p:cTn id="8" fill="hold" nodeType="withEffect">
-                            <p:stCondLst>
-                              <p:cond delay="0"/>
-                            </p:stCondLst>
-                            <p:childTnLst>
-                              <p:animEffect transition="in" filter="fade">
-                                <p:cBhvr>
-                                  <p:cTn id="9" dur="450"/>
-                                  <p:tgtEl>
-                                    <p:spTgt spid="3"/>
-                                  </p:tgtEl>
-                                </p:cBhvr>
-                              </p:animEffect>
-                              <p:set>
-                                <p:cBhvr>
-                                  <p:cTn id="10" dur="1" fill="hold">
-                                    <p:stCondLst>
-                                      <p:cond delay="0"/>
-                                    </p:stCondLst>
-                                  </p:cTn>
-                                  <p:tgtEl>
-                                    <p:spTgt spid="3"/>
-                                  </p:tgtEl>
-                                  <p:attrNameLst>
-                                    <p:attrName>style.visibility</p:attrName>
-                                  </p:attrNameLst>
-                                </p:cBhvr>
-                                <p:to>
-                                  <p:strVal val="visible"/>
-                                </p:to>
-                              </p:set>
-                            </p:childTnLst>
-                          </p:cTn>
-                        </p:par>
-                        <p:par>
-                          <p:cTn id="11" fill="hold" nodeType="withEffect">
-                            <p:stCondLst>
-                              <p:cond delay="0"/>
-                            </p:stCondLst>
-                            <p:childTnLst>
-                              <p:animEffect transition="in" filter="fade">
-                                <p:cBhvr>
-                                  <p:cTn id="12" dur="450"/>
-                                  <p:tgtEl>
-                                    <p:spTgt spid="4"/>
-                                  </p:tgtEl>
-                                </p:cBhvr>
-                              </p:animEffect>
-                              <p:set>
-                                <p:cBhvr>
-                                  <p:cTn id="13" dur="1" fill="hold">
-                                    <p:stCondLst>
-                                      <p:cond delay="0"/>
-                                    </p:stCondLst>
-                                  </p:cTn>
-                                  <p:tgtEl>
-                                    <p:spTgt spid="4"/>
-                                  </p:tgtEl>
-                                  <p:attrNameLst>
-                                    <p:attrName>style.visibility</p:attrName>
-                                  </p:attrNameLst>
-                                </p:cBhvr>
-                                <p:to>
-                                  <p:strVal val="visible"/>
-                                </p:to>
-                              </p:set>
-                            </p:childTnLst>
-                          </p:cTn>
-                        </p:par>
-                        <p:par>
-                          <p:cTn id="14" fill="hold" nodeType="withEffect">
-                            <p:stCondLst>
-                              <p:cond delay="0"/>
-                            </p:stCondLst>
-                            <p:childTnLst>
-                              <p:animEffect transition="in" filter="fade">
-                                <p:cBhvr>
-                                  <p:cTn id="15" dur="450"/>
-                                  <p:tgtEl>
-                                    <p:spTgt spid="5"/>
-                                  </p:tgtEl>
-                                </p:cBhvr>
-                              </p:animEffect>
-                              <p:set>
-                                <p:cBhvr>
-                                  <p:cTn id="16" dur="1" fill="hold">
-                                    <p:stCondLst>
-                                      <p:cond delay="0"/>
-                                    </p:stCondLst>
-                                  </p:cTn>
-                                  <p:tgtEl>
-                                    <p:spTgt spid="5"/>
-                                  </p:tgtEl>
-                                  <p:attrNameLst>
-                                    <p:attrName>style.visibility</p:attrName>
-                                  </p:attrNameLst>
-                                </p:cBhvr>
-                                <p:to>
-                                  <p:strVal val="visible"/>
-                                </p:to>
-                              </p:set>
-                            </p:childTnLst>
-                          </p:cTn>
-                        </p:par>
-                        <p:par>
-                          <p:cTn id="17" fill="hold" nodeType="withEffect">
-                            <p:stCondLst>
-                              <p:cond delay="0"/>
-                            </p:stCondLst>
-                            <p:childTnLst>
-                              <p:animEffect transition="in" filter="fade">
-                                <p:cBhvr>
-                                  <p:cTn id="18" dur="450"/>
-                                  <p:tgtEl>
-                                    <p:spTgt spid="6"/>
-                                  </p:tgtEl>
-                                </p:cBhvr>
-                              </p:animEffect>
-                              <p:set>
-                                <p:cBhvr>
-                                  <p:cTn id="19" dur="1" fill="hold">
-                                    <p:stCondLst>
-                                      <p:cond delay="0"/>
-                                    </p:stCondLst>
-                                  </p:cTn>
-                                  <p:tgtEl>
-                                    <p:spTgt spid="6"/>
-                                  </p:tgtEl>
-                                  <p:attrNameLst>
-                                    <p:attrName>style.visibility</p:attrName>
-                                  </p:attrNameLst>
-                                </p:cBhvr>
-                                <p:to>
-                                  <p:strVal val="visible"/>
-                                </p:to>
-                              </p:set>
-                            </p:childTnLst>
-                          </p:cTn>
-                        </p:par>
-                      </p:childTnLst>
-                    </p:cTn>
-                  </p:par>
-                  <p:par>
-                    <p:cTn id="20" fill="hold" nodeType="clickEffect">
-                      <p:stCondLst>
-                        <p:cond delay="0"/>
-                      </p:stCondLst>
-                      <p:childTnLst>
-                        <p:par>
-                          <p:cTn id="21" fill="hold" nodeType="withEffect">
-                            <p:stCondLst>
-                              <p:cond delay="0"/>
-                            </p:stCondLst>
-                            <p:childTnLst>
-                              <p:animEffect transition="in" filter="fade">
-                                <p:cBhvr>
-                                  <p:cTn id="22" dur="450"/>
-                                  <p:tgtEl>
-                                    <p:spTgt spid="7"/>
-                                  </p:tgtEl>
-                                </p:cBhvr>
-                              </p:animEffect>
-                              <p:set>
-                                <p:cBhvr>
-                                  <p:cTn id="23" dur="1" fill="hold">
-                                    <p:stCondLst>
-                                      <p:cond delay="0"/>
-                                    </p:stCondLst>
-                                  </p:cTn>
-                                  <p:tgtEl>
-                                    <p:spTgt spid="7"/>
-                                  </p:tgtEl>
-                                  <p:attrNameLst>
-                                    <p:attrName>style.visibility</p:attrName>
-                                  </p:attrNameLst>
-                                </p:cBhvr>
-                                <p:to>
-                                  <p:strVal val="visible"/>
-                                </p:to>
-                              </p:set>
-                            </p:childTnLst>
-                          </p:cTn>
-                        </p:par>
-                        <p:par>
-                          <p:cTn id="24" fill="hold" nodeType="withEffect">
-                            <p:stCondLst>
-                              <p:cond delay="0"/>
-                            </p:stCondLst>
-                            <p:childTnLst>
-                              <p:animEffect transition="in" filter="fade">
-                                <p:cBhvr>
-                                  <p:cTn id="25" dur="450"/>
-                                  <p:tgtEl>
-                                    <p:spTgt spid="8"/>
-                                  </p:tgtEl>
-                                </p:cBhvr>
-                              </p:animEffect>
-                              <p:set>
-                                <p:cBhvr>
-                                  <p:cTn id="26" dur="1" fill="hold">
-                                    <p:stCondLst>
-                                      <p:cond delay="0"/>
-                                    </p:stCondLst>
-                                  </p:cTn>
-                                  <p:tgtEl>
-                                    <p:spTgt spid="8"/>
-                                  </p:tgtEl>
-                                  <p:attrNameLst>
-                                    <p:attrName>style.visibility</p:attrName>
-                                  </p:attrNameLst>
-                                </p:cBhvr>
-                                <p:to>
-                                  <p:strVal val="visible"/>
-                                </p:to>
-                              </p:set>
-                            </p:childTnLst>
-                          </p:cTn>
-                        </p:par>
-                      </p:childTnLst>
-                    </p:cTn>
-                  </p:par>
-                </p:childTnLst>
-              </p:cTn>
-              <p:prevCondLst>
-                <p:cond evt="onPrev" delay="0">
-                  <p:tgtEl>
-                    <p:sldTgt/>
-                  </p:tgtEl>
-                </p:cond>
-              </p:prevCondLst>
-              <p:nextCondLst>
-                <p:cond evt="onNext" delay="0">
-                  <p:tgtEl>
-                    <p:sldTgt/>
-                  </p:tgtEl>
-                </p:cond>
-              </p:nextCondLst>
-            </p:seq>
-          </p:childTnLst>
-        </p:cTn>
-      </p:par>
-    </p:tnLst>
-  </p:timing>
 </p:sld>
 </file>
 
@@ -12501,868 +9906,6 @@
   <p:transition spd="med" advClick="1">
     <p:fade/>
   </p:transition>
-  <p:timing>
-    <p:tnLst>
-      <p:par>
-        <p:cTn id="2" dur="indefinite" restart="never" nodeType="tmRoot">
-          <p:childTnLst>
-            <p:seq concurrent="1" nextAc="seek">
-              <p:cTn id="3" dur="indefinite" nodeType="mainSeq">
-                <p:childTnLst>
-                  <p:par>
-                    <p:cTn id="4" fill="hold" nodeType="withEffect">
-                      <p:stCondLst>
-                        <p:cond delay="0"/>
-                      </p:stCondLst>
-                      <p:childTnLst>
-                        <p:par>
-                          <p:cTn id="5" fill="hold" nodeType="withEffect">
-                            <p:stCondLst>
-                              <p:cond delay="0"/>
-                            </p:stCondLst>
-                            <p:childTnLst>
-                              <p:animEffect transition="in" filter="fade">
-                                <p:cBhvr>
-                                  <p:cTn id="6" dur="450"/>
-                                  <p:tgtEl>
-                                    <p:spTgt spid="2"/>
-                                  </p:tgtEl>
-                                </p:cBhvr>
-                              </p:animEffect>
-                              <p:set>
-                                <p:cBhvr>
-                                  <p:cTn id="7" dur="1" fill="hold">
-                                    <p:stCondLst>
-                                      <p:cond delay="0"/>
-                                    </p:stCondLst>
-                                  </p:cTn>
-                                  <p:tgtEl>
-                                    <p:spTgt spid="2"/>
-                                  </p:tgtEl>
-                                  <p:attrNameLst>
-                                    <p:attrName>style.visibility</p:attrName>
-                                  </p:attrNameLst>
-                                </p:cBhvr>
-                                <p:to>
-                                  <p:strVal val="visible"/>
-                                </p:to>
-                              </p:set>
-                            </p:childTnLst>
-                          </p:cTn>
-                        </p:par>
-                        <p:par>
-                          <p:cTn id="8" fill="hold" nodeType="withEffect">
-                            <p:stCondLst>
-                              <p:cond delay="0"/>
-                            </p:stCondLst>
-                            <p:childTnLst>
-                              <p:animEffect transition="in" filter="fade">
-                                <p:cBhvr>
-                                  <p:cTn id="9" dur="450"/>
-                                  <p:tgtEl>
-                                    <p:spTgt spid="3"/>
-                                  </p:tgtEl>
-                                </p:cBhvr>
-                              </p:animEffect>
-                              <p:set>
-                                <p:cBhvr>
-                                  <p:cTn id="10" dur="1" fill="hold">
-                                    <p:stCondLst>
-                                      <p:cond delay="0"/>
-                                    </p:stCondLst>
-                                  </p:cTn>
-                                  <p:tgtEl>
-                                    <p:spTgt spid="3"/>
-                                  </p:tgtEl>
-                                  <p:attrNameLst>
-                                    <p:attrName>style.visibility</p:attrName>
-                                  </p:attrNameLst>
-                                </p:cBhvr>
-                                <p:to>
-                                  <p:strVal val="visible"/>
-                                </p:to>
-                              </p:set>
-                            </p:childTnLst>
-                          </p:cTn>
-                        </p:par>
-                        <p:par>
-                          <p:cTn id="11" fill="hold" nodeType="withEffect">
-                            <p:stCondLst>
-                              <p:cond delay="0"/>
-                            </p:stCondLst>
-                            <p:childTnLst>
-                              <p:animEffect transition="in" filter="fade">
-                                <p:cBhvr>
-                                  <p:cTn id="12" dur="450"/>
-                                  <p:tgtEl>
-                                    <p:spTgt spid="4"/>
-                                  </p:tgtEl>
-                                </p:cBhvr>
-                              </p:animEffect>
-                              <p:set>
-                                <p:cBhvr>
-                                  <p:cTn id="13" dur="1" fill="hold">
-                                    <p:stCondLst>
-                                      <p:cond delay="0"/>
-                                    </p:stCondLst>
-                                  </p:cTn>
-                                  <p:tgtEl>
-                                    <p:spTgt spid="4"/>
-                                  </p:tgtEl>
-                                  <p:attrNameLst>
-                                    <p:attrName>style.visibility</p:attrName>
-                                  </p:attrNameLst>
-                                </p:cBhvr>
-                                <p:to>
-                                  <p:strVal val="visible"/>
-                                </p:to>
-                              </p:set>
-                            </p:childTnLst>
-                          </p:cTn>
-                        </p:par>
-                        <p:par>
-                          <p:cTn id="14" fill="hold" nodeType="withEffect">
-                            <p:stCondLst>
-                              <p:cond delay="0"/>
-                            </p:stCondLst>
-                            <p:childTnLst>
-                              <p:animEffect transition="in" filter="fade">
-                                <p:cBhvr>
-                                  <p:cTn id="15" dur="450"/>
-                                  <p:tgtEl>
-                                    <p:spTgt spid="5"/>
-                                  </p:tgtEl>
-                                </p:cBhvr>
-                              </p:animEffect>
-                              <p:set>
-                                <p:cBhvr>
-                                  <p:cTn id="16" dur="1" fill="hold">
-                                    <p:stCondLst>
-                                      <p:cond delay="0"/>
-                                    </p:stCondLst>
-                                  </p:cTn>
-                                  <p:tgtEl>
-                                    <p:spTgt spid="5"/>
-                                  </p:tgtEl>
-                                  <p:attrNameLst>
-                                    <p:attrName>style.visibility</p:attrName>
-                                  </p:attrNameLst>
-                                </p:cBhvr>
-                                <p:to>
-                                  <p:strVal val="visible"/>
-                                </p:to>
-                              </p:set>
-                            </p:childTnLst>
-                          </p:cTn>
-                        </p:par>
-                        <p:par>
-                          <p:cTn id="17" fill="hold" nodeType="withEffect">
-                            <p:stCondLst>
-                              <p:cond delay="0"/>
-                            </p:stCondLst>
-                            <p:childTnLst>
-                              <p:animEffect transition="in" filter="fade">
-                                <p:cBhvr>
-                                  <p:cTn id="18" dur="450"/>
-                                  <p:tgtEl>
-                                    <p:spTgt spid="6"/>
-                                  </p:tgtEl>
-                                </p:cBhvr>
-                              </p:animEffect>
-                              <p:set>
-                                <p:cBhvr>
-                                  <p:cTn id="19" dur="1" fill="hold">
-                                    <p:stCondLst>
-                                      <p:cond delay="0"/>
-                                    </p:stCondLst>
-                                  </p:cTn>
-                                  <p:tgtEl>
-                                    <p:spTgt spid="6"/>
-                                  </p:tgtEl>
-                                  <p:attrNameLst>
-                                    <p:attrName>style.visibility</p:attrName>
-                                  </p:attrNameLst>
-                                </p:cBhvr>
-                                <p:to>
-                                  <p:strVal val="visible"/>
-                                </p:to>
-                              </p:set>
-                            </p:childTnLst>
-                          </p:cTn>
-                        </p:par>
-                      </p:childTnLst>
-                    </p:cTn>
-                  </p:par>
-                  <p:par>
-                    <p:cTn id="20" fill="hold" nodeType="clickEffect">
-                      <p:stCondLst>
-                        <p:cond delay="0"/>
-                      </p:stCondLst>
-                      <p:childTnLst>
-                        <p:par>
-                          <p:cTn id="21" fill="hold" nodeType="withEffect">
-                            <p:stCondLst>
-                              <p:cond delay="0"/>
-                            </p:stCondLst>
-                            <p:childTnLst>
-                              <p:animEffect transition="in" filter="fade">
-                                <p:cBhvr>
-                                  <p:cTn id="22" dur="450"/>
-                                  <p:tgtEl>
-                                    <p:spTgt spid="7"/>
-                                  </p:tgtEl>
-                                </p:cBhvr>
-                              </p:animEffect>
-                              <p:set>
-                                <p:cBhvr>
-                                  <p:cTn id="23" dur="1" fill="hold">
-                                    <p:stCondLst>
-                                      <p:cond delay="0"/>
-                                    </p:stCondLst>
-                                  </p:cTn>
-                                  <p:tgtEl>
-                                    <p:spTgt spid="7"/>
-                                  </p:tgtEl>
-                                  <p:attrNameLst>
-                                    <p:attrName>style.visibility</p:attrName>
-                                  </p:attrNameLst>
-                                </p:cBhvr>
-                                <p:to>
-                                  <p:strVal val="visible"/>
-                                </p:to>
-                              </p:set>
-                            </p:childTnLst>
-                          </p:cTn>
-                        </p:par>
-                        <p:par>
-                          <p:cTn id="24" fill="hold" nodeType="withEffect">
-                            <p:stCondLst>
-                              <p:cond delay="0"/>
-                            </p:stCondLst>
-                            <p:childTnLst>
-                              <p:animEffect transition="in" filter="fade">
-                                <p:cBhvr>
-                                  <p:cTn id="25" dur="450"/>
-                                  <p:tgtEl>
-                                    <p:spTgt spid="8"/>
-                                  </p:tgtEl>
-                                </p:cBhvr>
-                              </p:animEffect>
-                              <p:set>
-                                <p:cBhvr>
-                                  <p:cTn id="26" dur="1" fill="hold">
-                                    <p:stCondLst>
-                                      <p:cond delay="0"/>
-                                    </p:stCondLst>
-                                  </p:cTn>
-                                  <p:tgtEl>
-                                    <p:spTgt spid="8"/>
-                                  </p:tgtEl>
-                                  <p:attrNameLst>
-                                    <p:attrName>style.visibility</p:attrName>
-                                  </p:attrNameLst>
-                                </p:cBhvr>
-                                <p:to>
-                                  <p:strVal val="visible"/>
-                                </p:to>
-                              </p:set>
-                            </p:childTnLst>
-                          </p:cTn>
-                        </p:par>
-                        <p:par>
-                          <p:cTn id="27" fill="hold" nodeType="withEffect">
-                            <p:stCondLst>
-                              <p:cond delay="0"/>
-                            </p:stCondLst>
-                            <p:childTnLst>
-                              <p:animEffect transition="in" filter="fade">
-                                <p:cBhvr>
-                                  <p:cTn id="28" dur="450"/>
-                                  <p:tgtEl>
-                                    <p:spTgt spid="9"/>
-                                  </p:tgtEl>
-                                </p:cBhvr>
-                              </p:animEffect>
-                              <p:set>
-                                <p:cBhvr>
-                                  <p:cTn id="29" dur="1" fill="hold">
-                                    <p:stCondLst>
-                                      <p:cond delay="0"/>
-                                    </p:stCondLst>
-                                  </p:cTn>
-                                  <p:tgtEl>
-                                    <p:spTgt spid="9"/>
-                                  </p:tgtEl>
-                                  <p:attrNameLst>
-                                    <p:attrName>style.visibility</p:attrName>
-                                  </p:attrNameLst>
-                                </p:cBhvr>
-                                <p:to>
-                                  <p:strVal val="visible"/>
-                                </p:to>
-                              </p:set>
-                            </p:childTnLst>
-                          </p:cTn>
-                        </p:par>
-                        <p:par>
-                          <p:cTn id="30" fill="hold" nodeType="withEffect">
-                            <p:stCondLst>
-                              <p:cond delay="0"/>
-                            </p:stCondLst>
-                            <p:childTnLst>
-                              <p:animEffect transition="in" filter="fade">
-                                <p:cBhvr>
-                                  <p:cTn id="31" dur="450"/>
-                                  <p:tgtEl>
-                                    <p:spTgt spid="10"/>
-                                  </p:tgtEl>
-                                </p:cBhvr>
-                              </p:animEffect>
-                              <p:set>
-                                <p:cBhvr>
-                                  <p:cTn id="32" dur="1" fill="hold">
-                                    <p:stCondLst>
-                                      <p:cond delay="0"/>
-                                    </p:stCondLst>
-                                  </p:cTn>
-                                  <p:tgtEl>
-                                    <p:spTgt spid="10"/>
-                                  </p:tgtEl>
-                                  <p:attrNameLst>
-                                    <p:attrName>style.visibility</p:attrName>
-                                  </p:attrNameLst>
-                                </p:cBhvr>
-                                <p:to>
-                                  <p:strVal val="visible"/>
-                                </p:to>
-                              </p:set>
-                            </p:childTnLst>
-                          </p:cTn>
-                        </p:par>
-                        <p:par>
-                          <p:cTn id="33" fill="hold" nodeType="withEffect">
-                            <p:stCondLst>
-                              <p:cond delay="0"/>
-                            </p:stCondLst>
-                            <p:childTnLst>
-                              <p:animEffect transition="in" filter="fade">
-                                <p:cBhvr>
-                                  <p:cTn id="34" dur="450"/>
-                                  <p:tgtEl>
-                                    <p:spTgt spid="11"/>
-                                  </p:tgtEl>
-                                </p:cBhvr>
-                              </p:animEffect>
-                              <p:set>
-                                <p:cBhvr>
-                                  <p:cTn id="35" dur="1" fill="hold">
-                                    <p:stCondLst>
-                                      <p:cond delay="0"/>
-                                    </p:stCondLst>
-                                  </p:cTn>
-                                  <p:tgtEl>
-                                    <p:spTgt spid="11"/>
-                                  </p:tgtEl>
-                                  <p:attrNameLst>
-                                    <p:attrName>style.visibility</p:attrName>
-                                  </p:attrNameLst>
-                                </p:cBhvr>
-                                <p:to>
-                                  <p:strVal val="visible"/>
-                                </p:to>
-                              </p:set>
-                            </p:childTnLst>
-                          </p:cTn>
-                        </p:par>
-                        <p:par>
-                          <p:cTn id="36" fill="hold" nodeType="withEffect">
-                            <p:stCondLst>
-                              <p:cond delay="0"/>
-                            </p:stCondLst>
-                            <p:childTnLst>
-                              <p:animEffect transition="in" filter="fade">
-                                <p:cBhvr>
-                                  <p:cTn id="37" dur="450"/>
-                                  <p:tgtEl>
-                                    <p:spTgt spid="12"/>
-                                  </p:tgtEl>
-                                </p:cBhvr>
-                              </p:animEffect>
-                              <p:set>
-                                <p:cBhvr>
-                                  <p:cTn id="38" dur="1" fill="hold">
-                                    <p:stCondLst>
-                                      <p:cond delay="0"/>
-                                    </p:stCondLst>
-                                  </p:cTn>
-                                  <p:tgtEl>
-                                    <p:spTgt spid="12"/>
-                                  </p:tgtEl>
-                                  <p:attrNameLst>
-                                    <p:attrName>style.visibility</p:attrName>
-                                  </p:attrNameLst>
-                                </p:cBhvr>
-                                <p:to>
-                                  <p:strVal val="visible"/>
-                                </p:to>
-                              </p:set>
-                            </p:childTnLst>
-                          </p:cTn>
-                        </p:par>
-                        <p:par>
-                          <p:cTn id="39" fill="hold" nodeType="withEffect">
-                            <p:stCondLst>
-                              <p:cond delay="0"/>
-                            </p:stCondLst>
-                            <p:childTnLst>
-                              <p:animEffect transition="in" filter="fade">
-                                <p:cBhvr>
-                                  <p:cTn id="40" dur="450"/>
-                                  <p:tgtEl>
-                                    <p:spTgt spid="13"/>
-                                  </p:tgtEl>
-                                </p:cBhvr>
-                              </p:animEffect>
-                              <p:set>
-                                <p:cBhvr>
-                                  <p:cTn id="41" dur="1" fill="hold">
-                                    <p:stCondLst>
-                                      <p:cond delay="0"/>
-                                    </p:stCondLst>
-                                  </p:cTn>
-                                  <p:tgtEl>
-                                    <p:spTgt spid="13"/>
-                                  </p:tgtEl>
-                                  <p:attrNameLst>
-                                    <p:attrName>style.visibility</p:attrName>
-                                  </p:attrNameLst>
-                                </p:cBhvr>
-                                <p:to>
-                                  <p:strVal val="visible"/>
-                                </p:to>
-                              </p:set>
-                            </p:childTnLst>
-                          </p:cTn>
-                        </p:par>
-                        <p:par>
-                          <p:cTn id="42" fill="hold" nodeType="withEffect">
-                            <p:stCondLst>
-                              <p:cond delay="0"/>
-                            </p:stCondLst>
-                            <p:childTnLst>
-                              <p:animEffect transition="in" filter="fade">
-                                <p:cBhvr>
-                                  <p:cTn id="43" dur="450"/>
-                                  <p:tgtEl>
-                                    <p:spTgt spid="14"/>
-                                  </p:tgtEl>
-                                </p:cBhvr>
-                              </p:animEffect>
-                              <p:set>
-                                <p:cBhvr>
-                                  <p:cTn id="44" dur="1" fill="hold">
-                                    <p:stCondLst>
-                                      <p:cond delay="0"/>
-                                    </p:stCondLst>
-                                  </p:cTn>
-                                  <p:tgtEl>
-                                    <p:spTgt spid="14"/>
-                                  </p:tgtEl>
-                                  <p:attrNameLst>
-                                    <p:attrName>style.visibility</p:attrName>
-                                  </p:attrNameLst>
-                                </p:cBhvr>
-                                <p:to>
-                                  <p:strVal val="visible"/>
-                                </p:to>
-                              </p:set>
-                            </p:childTnLst>
-                          </p:cTn>
-                        </p:par>
-                        <p:par>
-                          <p:cTn id="45" fill="hold" nodeType="withEffect">
-                            <p:stCondLst>
-                              <p:cond delay="0"/>
-                            </p:stCondLst>
-                            <p:childTnLst>
-                              <p:animEffect transition="in" filter="fade">
-                                <p:cBhvr>
-                                  <p:cTn id="46" dur="450"/>
-                                  <p:tgtEl>
-                                    <p:spTgt spid="15"/>
-                                  </p:tgtEl>
-                                </p:cBhvr>
-                              </p:animEffect>
-                              <p:set>
-                                <p:cBhvr>
-                                  <p:cTn id="47" dur="1" fill="hold">
-                                    <p:stCondLst>
-                                      <p:cond delay="0"/>
-                                    </p:stCondLst>
-                                  </p:cTn>
-                                  <p:tgtEl>
-                                    <p:spTgt spid="15"/>
-                                  </p:tgtEl>
-                                  <p:attrNameLst>
-                                    <p:attrName>style.visibility</p:attrName>
-                                  </p:attrNameLst>
-                                </p:cBhvr>
-                                <p:to>
-                                  <p:strVal val="visible"/>
-                                </p:to>
-                              </p:set>
-                            </p:childTnLst>
-                          </p:cTn>
-                        </p:par>
-                      </p:childTnLst>
-                    </p:cTn>
-                  </p:par>
-                  <p:par>
-                    <p:cTn id="48" fill="hold" nodeType="clickEffect">
-                      <p:stCondLst>
-                        <p:cond delay="0"/>
-                      </p:stCondLst>
-                      <p:childTnLst>
-                        <p:par>
-                          <p:cTn id="49" fill="hold" nodeType="withEffect">
-                            <p:stCondLst>
-                              <p:cond delay="0"/>
-                            </p:stCondLst>
-                            <p:childTnLst>
-                              <p:animEffect transition="in" filter="fade">
-                                <p:cBhvr>
-                                  <p:cTn id="50" dur="450"/>
-                                  <p:tgtEl>
-                                    <p:spTgt spid="16"/>
-                                  </p:tgtEl>
-                                </p:cBhvr>
-                              </p:animEffect>
-                              <p:set>
-                                <p:cBhvr>
-                                  <p:cTn id="51" dur="1" fill="hold">
-                                    <p:stCondLst>
-                                      <p:cond delay="0"/>
-                                    </p:stCondLst>
-                                  </p:cTn>
-                                  <p:tgtEl>
-                                    <p:spTgt spid="16"/>
-                                  </p:tgtEl>
-                                  <p:attrNameLst>
-                                    <p:attrName>style.visibility</p:attrName>
-                                  </p:attrNameLst>
-                                </p:cBhvr>
-                                <p:to>
-                                  <p:strVal val="visible"/>
-                                </p:to>
-                              </p:set>
-                            </p:childTnLst>
-                          </p:cTn>
-                        </p:par>
-                        <p:par>
-                          <p:cTn id="52" fill="hold" nodeType="withEffect">
-                            <p:stCondLst>
-                              <p:cond delay="0"/>
-                            </p:stCondLst>
-                            <p:childTnLst>
-                              <p:animEffect transition="in" filter="fade">
-                                <p:cBhvr>
-                                  <p:cTn id="53" dur="450"/>
-                                  <p:tgtEl>
-                                    <p:spTgt spid="17"/>
-                                  </p:tgtEl>
-                                </p:cBhvr>
-                              </p:animEffect>
-                              <p:set>
-                                <p:cBhvr>
-                                  <p:cTn id="54" dur="1" fill="hold">
-                                    <p:stCondLst>
-                                      <p:cond delay="0"/>
-                                    </p:stCondLst>
-                                  </p:cTn>
-                                  <p:tgtEl>
-                                    <p:spTgt spid="17"/>
-                                  </p:tgtEl>
-                                  <p:attrNameLst>
-                                    <p:attrName>style.visibility</p:attrName>
-                                  </p:attrNameLst>
-                                </p:cBhvr>
-                                <p:to>
-                                  <p:strVal val="visible"/>
-                                </p:to>
-                              </p:set>
-                            </p:childTnLst>
-                          </p:cTn>
-                        </p:par>
-                        <p:par>
-                          <p:cTn id="55" fill="hold" nodeType="withEffect">
-                            <p:stCondLst>
-                              <p:cond delay="0"/>
-                            </p:stCondLst>
-                            <p:childTnLst>
-                              <p:animEffect transition="in" filter="fade">
-                                <p:cBhvr>
-                                  <p:cTn id="56" dur="450"/>
-                                  <p:tgtEl>
-                                    <p:spTgt spid="18"/>
-                                  </p:tgtEl>
-                                </p:cBhvr>
-                              </p:animEffect>
-                              <p:set>
-                                <p:cBhvr>
-                                  <p:cTn id="57" dur="1" fill="hold">
-                                    <p:stCondLst>
-                                      <p:cond delay="0"/>
-                                    </p:stCondLst>
-                                  </p:cTn>
-                                  <p:tgtEl>
-                                    <p:spTgt spid="18"/>
-                                  </p:tgtEl>
-                                  <p:attrNameLst>
-                                    <p:attrName>style.visibility</p:attrName>
-                                  </p:attrNameLst>
-                                </p:cBhvr>
-                                <p:to>
-                                  <p:strVal val="visible"/>
-                                </p:to>
-                              </p:set>
-                            </p:childTnLst>
-                          </p:cTn>
-                        </p:par>
-                        <p:par>
-                          <p:cTn id="58" fill="hold" nodeType="withEffect">
-                            <p:stCondLst>
-                              <p:cond delay="0"/>
-                            </p:stCondLst>
-                            <p:childTnLst>
-                              <p:animEffect transition="in" filter="fade">
-                                <p:cBhvr>
-                                  <p:cTn id="59" dur="450"/>
-                                  <p:tgtEl>
-                                    <p:spTgt spid="19"/>
-                                  </p:tgtEl>
-                                </p:cBhvr>
-                              </p:animEffect>
-                              <p:set>
-                                <p:cBhvr>
-                                  <p:cTn id="60" dur="1" fill="hold">
-                                    <p:stCondLst>
-                                      <p:cond delay="0"/>
-                                    </p:stCondLst>
-                                  </p:cTn>
-                                  <p:tgtEl>
-                                    <p:spTgt spid="19"/>
-                                  </p:tgtEl>
-                                  <p:attrNameLst>
-                                    <p:attrName>style.visibility</p:attrName>
-                                  </p:attrNameLst>
-                                </p:cBhvr>
-                                <p:to>
-                                  <p:strVal val="visible"/>
-                                </p:to>
-                              </p:set>
-                            </p:childTnLst>
-                          </p:cTn>
-                        </p:par>
-                        <p:par>
-                          <p:cTn id="61" fill="hold" nodeType="withEffect">
-                            <p:stCondLst>
-                              <p:cond delay="0"/>
-                            </p:stCondLst>
-                            <p:childTnLst>
-                              <p:animEffect transition="in" filter="fade">
-                                <p:cBhvr>
-                                  <p:cTn id="62" dur="450"/>
-                                  <p:tgtEl>
-                                    <p:spTgt spid="20"/>
-                                  </p:tgtEl>
-                                </p:cBhvr>
-                              </p:animEffect>
-                              <p:set>
-                                <p:cBhvr>
-                                  <p:cTn id="63" dur="1" fill="hold">
-                                    <p:stCondLst>
-                                      <p:cond delay="0"/>
-                                    </p:stCondLst>
-                                  </p:cTn>
-                                  <p:tgtEl>
-                                    <p:spTgt spid="20"/>
-                                  </p:tgtEl>
-                                  <p:attrNameLst>
-                                    <p:attrName>style.visibility</p:attrName>
-                                  </p:attrNameLst>
-                                </p:cBhvr>
-                                <p:to>
-                                  <p:strVal val="visible"/>
-                                </p:to>
-                              </p:set>
-                            </p:childTnLst>
-                          </p:cTn>
-                        </p:par>
-                        <p:par>
-                          <p:cTn id="64" fill="hold" nodeType="withEffect">
-                            <p:stCondLst>
-                              <p:cond delay="0"/>
-                            </p:stCondLst>
-                            <p:childTnLst>
-                              <p:animEffect transition="in" filter="fade">
-                                <p:cBhvr>
-                                  <p:cTn id="65" dur="450"/>
-                                  <p:tgtEl>
-                                    <p:spTgt spid="21"/>
-                                  </p:tgtEl>
-                                </p:cBhvr>
-                              </p:animEffect>
-                              <p:set>
-                                <p:cBhvr>
-                                  <p:cTn id="66" dur="1" fill="hold">
-                                    <p:stCondLst>
-                                      <p:cond delay="0"/>
-                                    </p:stCondLst>
-                                  </p:cTn>
-                                  <p:tgtEl>
-                                    <p:spTgt spid="21"/>
-                                  </p:tgtEl>
-                                  <p:attrNameLst>
-                                    <p:attrName>style.visibility</p:attrName>
-                                  </p:attrNameLst>
-                                </p:cBhvr>
-                                <p:to>
-                                  <p:strVal val="visible"/>
-                                </p:to>
-                              </p:set>
-                            </p:childTnLst>
-                          </p:cTn>
-                        </p:par>
-                        <p:par>
-                          <p:cTn id="67" fill="hold" nodeType="withEffect">
-                            <p:stCondLst>
-                              <p:cond delay="0"/>
-                            </p:stCondLst>
-                            <p:childTnLst>
-                              <p:animEffect transition="in" filter="fade">
-                                <p:cBhvr>
-                                  <p:cTn id="68" dur="450"/>
-                                  <p:tgtEl>
-                                    <p:spTgt spid="22"/>
-                                  </p:tgtEl>
-                                </p:cBhvr>
-                              </p:animEffect>
-                              <p:set>
-                                <p:cBhvr>
-                                  <p:cTn id="69" dur="1" fill="hold">
-                                    <p:stCondLst>
-                                      <p:cond delay="0"/>
-                                    </p:stCondLst>
-                                  </p:cTn>
-                                  <p:tgtEl>
-                                    <p:spTgt spid="22"/>
-                                  </p:tgtEl>
-                                  <p:attrNameLst>
-                                    <p:attrName>style.visibility</p:attrName>
-                                  </p:attrNameLst>
-                                </p:cBhvr>
-                                <p:to>
-                                  <p:strVal val="visible"/>
-                                </p:to>
-                              </p:set>
-                            </p:childTnLst>
-                          </p:cTn>
-                        </p:par>
-                        <p:par>
-                          <p:cTn id="70" fill="hold" nodeType="withEffect">
-                            <p:stCondLst>
-                              <p:cond delay="0"/>
-                            </p:stCondLst>
-                            <p:childTnLst>
-                              <p:animEffect transition="in" filter="fade">
-                                <p:cBhvr>
-                                  <p:cTn id="71" dur="450"/>
-                                  <p:tgtEl>
-                                    <p:spTgt spid="23"/>
-                                  </p:tgtEl>
-                                </p:cBhvr>
-                              </p:animEffect>
-                              <p:set>
-                                <p:cBhvr>
-                                  <p:cTn id="72" dur="1" fill="hold">
-                                    <p:stCondLst>
-                                      <p:cond delay="0"/>
-                                    </p:stCondLst>
-                                  </p:cTn>
-                                  <p:tgtEl>
-                                    <p:spTgt spid="23"/>
-                                  </p:tgtEl>
-                                  <p:attrNameLst>
-                                    <p:attrName>style.visibility</p:attrName>
-                                  </p:attrNameLst>
-                                </p:cBhvr>
-                                <p:to>
-                                  <p:strVal val="visible"/>
-                                </p:to>
-                              </p:set>
-                            </p:childTnLst>
-                          </p:cTn>
-                        </p:par>
-                        <p:par>
-                          <p:cTn id="73" fill="hold" nodeType="withEffect">
-                            <p:stCondLst>
-                              <p:cond delay="0"/>
-                            </p:stCondLst>
-                            <p:childTnLst>
-                              <p:animEffect transition="in" filter="fade">
-                                <p:cBhvr>
-                                  <p:cTn id="74" dur="450"/>
-                                  <p:tgtEl>
-                                    <p:spTgt spid="24"/>
-                                  </p:tgtEl>
-                                </p:cBhvr>
-                              </p:animEffect>
-                              <p:set>
-                                <p:cBhvr>
-                                  <p:cTn id="75" dur="1" fill="hold">
-                                    <p:stCondLst>
-                                      <p:cond delay="0"/>
-                                    </p:stCondLst>
-                                  </p:cTn>
-                                  <p:tgtEl>
-                                    <p:spTgt spid="24"/>
-                                  </p:tgtEl>
-                                  <p:attrNameLst>
-                                    <p:attrName>style.visibility</p:attrName>
-                                  </p:attrNameLst>
-                                </p:cBhvr>
-                                <p:to>
-                                  <p:strVal val="visible"/>
-                                </p:to>
-                              </p:set>
-                            </p:childTnLst>
-                          </p:cTn>
-                        </p:par>
-                      </p:childTnLst>
-                    </p:cTn>
-                  </p:par>
-                </p:childTnLst>
-              </p:cTn>
-              <p:prevCondLst>
-                <p:cond evt="onPrev" delay="0">
-                  <p:tgtEl>
-                    <p:sldTgt/>
-                  </p:tgtEl>
-                </p:cond>
-              </p:prevCondLst>
-              <p:nextCondLst>
-                <p:cond evt="onNext" delay="0">
-                  <p:tgtEl>
-                    <p:sldTgt/>
-                  </p:tgtEl>
-                </p:cond>
-              </p:nextCondLst>
-            </p:seq>
-          </p:childTnLst>
-        </p:cTn>
-      </p:par>
-    </p:tnLst>
-  </p:timing>
 </p:sld>
 </file>
 
@@ -13915,518 +10458,6 @@
   <p:transition spd="med" advClick="1">
     <p:fade/>
   </p:transition>
-  <p:timing>
-    <p:tnLst>
-      <p:par>
-        <p:cTn id="2" dur="indefinite" restart="never" nodeType="tmRoot">
-          <p:childTnLst>
-            <p:seq concurrent="1" nextAc="seek">
-              <p:cTn id="3" dur="indefinite" nodeType="mainSeq">
-                <p:childTnLst>
-                  <p:par>
-                    <p:cTn id="4" fill="hold" nodeType="withEffect">
-                      <p:stCondLst>
-                        <p:cond delay="0"/>
-                      </p:stCondLst>
-                      <p:childTnLst>
-                        <p:par>
-                          <p:cTn id="5" fill="hold" nodeType="withEffect">
-                            <p:stCondLst>
-                              <p:cond delay="0"/>
-                            </p:stCondLst>
-                            <p:childTnLst>
-                              <p:animEffect transition="in" filter="fade">
-                                <p:cBhvr>
-                                  <p:cTn id="6" dur="450"/>
-                                  <p:tgtEl>
-                                    <p:spTgt spid="2"/>
-                                  </p:tgtEl>
-                                </p:cBhvr>
-                              </p:animEffect>
-                              <p:set>
-                                <p:cBhvr>
-                                  <p:cTn id="7" dur="1" fill="hold">
-                                    <p:stCondLst>
-                                      <p:cond delay="0"/>
-                                    </p:stCondLst>
-                                  </p:cTn>
-                                  <p:tgtEl>
-                                    <p:spTgt spid="2"/>
-                                  </p:tgtEl>
-                                  <p:attrNameLst>
-                                    <p:attrName>style.visibility</p:attrName>
-                                  </p:attrNameLst>
-                                </p:cBhvr>
-                                <p:to>
-                                  <p:strVal val="visible"/>
-                                </p:to>
-                              </p:set>
-                            </p:childTnLst>
-                          </p:cTn>
-                        </p:par>
-                        <p:par>
-                          <p:cTn id="8" fill="hold" nodeType="withEffect">
-                            <p:stCondLst>
-                              <p:cond delay="0"/>
-                            </p:stCondLst>
-                            <p:childTnLst>
-                              <p:animEffect transition="in" filter="fade">
-                                <p:cBhvr>
-                                  <p:cTn id="9" dur="450"/>
-                                  <p:tgtEl>
-                                    <p:spTgt spid="3"/>
-                                  </p:tgtEl>
-                                </p:cBhvr>
-                              </p:animEffect>
-                              <p:set>
-                                <p:cBhvr>
-                                  <p:cTn id="10" dur="1" fill="hold">
-                                    <p:stCondLst>
-                                      <p:cond delay="0"/>
-                                    </p:stCondLst>
-                                  </p:cTn>
-                                  <p:tgtEl>
-                                    <p:spTgt spid="3"/>
-                                  </p:tgtEl>
-                                  <p:attrNameLst>
-                                    <p:attrName>style.visibility</p:attrName>
-                                  </p:attrNameLst>
-                                </p:cBhvr>
-                                <p:to>
-                                  <p:strVal val="visible"/>
-                                </p:to>
-                              </p:set>
-                            </p:childTnLst>
-                          </p:cTn>
-                        </p:par>
-                        <p:par>
-                          <p:cTn id="11" fill="hold" nodeType="withEffect">
-                            <p:stCondLst>
-                              <p:cond delay="0"/>
-                            </p:stCondLst>
-                            <p:childTnLst>
-                              <p:animEffect transition="in" filter="fade">
-                                <p:cBhvr>
-                                  <p:cTn id="12" dur="450"/>
-                                  <p:tgtEl>
-                                    <p:spTgt spid="4"/>
-                                  </p:tgtEl>
-                                </p:cBhvr>
-                              </p:animEffect>
-                              <p:set>
-                                <p:cBhvr>
-                                  <p:cTn id="13" dur="1" fill="hold">
-                                    <p:stCondLst>
-                                      <p:cond delay="0"/>
-                                    </p:stCondLst>
-                                  </p:cTn>
-                                  <p:tgtEl>
-                                    <p:spTgt spid="4"/>
-                                  </p:tgtEl>
-                                  <p:attrNameLst>
-                                    <p:attrName>style.visibility</p:attrName>
-                                  </p:attrNameLst>
-                                </p:cBhvr>
-                                <p:to>
-                                  <p:strVal val="visible"/>
-                                </p:to>
-                              </p:set>
-                            </p:childTnLst>
-                          </p:cTn>
-                        </p:par>
-                        <p:par>
-                          <p:cTn id="14" fill="hold" nodeType="withEffect">
-                            <p:stCondLst>
-                              <p:cond delay="0"/>
-                            </p:stCondLst>
-                            <p:childTnLst>
-                              <p:animEffect transition="in" filter="fade">
-                                <p:cBhvr>
-                                  <p:cTn id="15" dur="450"/>
-                                  <p:tgtEl>
-                                    <p:spTgt spid="5"/>
-                                  </p:tgtEl>
-                                </p:cBhvr>
-                              </p:animEffect>
-                              <p:set>
-                                <p:cBhvr>
-                                  <p:cTn id="16" dur="1" fill="hold">
-                                    <p:stCondLst>
-                                      <p:cond delay="0"/>
-                                    </p:stCondLst>
-                                  </p:cTn>
-                                  <p:tgtEl>
-                                    <p:spTgt spid="5"/>
-                                  </p:tgtEl>
-                                  <p:attrNameLst>
-                                    <p:attrName>style.visibility</p:attrName>
-                                  </p:attrNameLst>
-                                </p:cBhvr>
-                                <p:to>
-                                  <p:strVal val="visible"/>
-                                </p:to>
-                              </p:set>
-                            </p:childTnLst>
-                          </p:cTn>
-                        </p:par>
-                        <p:par>
-                          <p:cTn id="17" fill="hold" nodeType="withEffect">
-                            <p:stCondLst>
-                              <p:cond delay="0"/>
-                            </p:stCondLst>
-                            <p:childTnLst>
-                              <p:animEffect transition="in" filter="fade">
-                                <p:cBhvr>
-                                  <p:cTn id="18" dur="450"/>
-                                  <p:tgtEl>
-                                    <p:spTgt spid="6"/>
-                                  </p:tgtEl>
-                                </p:cBhvr>
-                              </p:animEffect>
-                              <p:set>
-                                <p:cBhvr>
-                                  <p:cTn id="19" dur="1" fill="hold">
-                                    <p:stCondLst>
-                                      <p:cond delay="0"/>
-                                    </p:stCondLst>
-                                  </p:cTn>
-                                  <p:tgtEl>
-                                    <p:spTgt spid="6"/>
-                                  </p:tgtEl>
-                                  <p:attrNameLst>
-                                    <p:attrName>style.visibility</p:attrName>
-                                  </p:attrNameLst>
-                                </p:cBhvr>
-                                <p:to>
-                                  <p:strVal val="visible"/>
-                                </p:to>
-                              </p:set>
-                            </p:childTnLst>
-                          </p:cTn>
-                        </p:par>
-                      </p:childTnLst>
-                    </p:cTn>
-                  </p:par>
-                  <p:par>
-                    <p:cTn id="20" fill="hold" nodeType="clickEffect">
-                      <p:stCondLst>
-                        <p:cond delay="0"/>
-                      </p:stCondLst>
-                      <p:childTnLst>
-                        <p:par>
-                          <p:cTn id="21" fill="hold" nodeType="withEffect">
-                            <p:stCondLst>
-                              <p:cond delay="0"/>
-                            </p:stCondLst>
-                            <p:childTnLst>
-                              <p:animEffect transition="in" filter="fade">
-                                <p:cBhvr>
-                                  <p:cTn id="22" dur="450"/>
-                                  <p:tgtEl>
-                                    <p:spTgt spid="7"/>
-                                  </p:tgtEl>
-                                </p:cBhvr>
-                              </p:animEffect>
-                              <p:set>
-                                <p:cBhvr>
-                                  <p:cTn id="23" dur="1" fill="hold">
-                                    <p:stCondLst>
-                                      <p:cond delay="0"/>
-                                    </p:stCondLst>
-                                  </p:cTn>
-                                  <p:tgtEl>
-                                    <p:spTgt spid="7"/>
-                                  </p:tgtEl>
-                                  <p:attrNameLst>
-                                    <p:attrName>style.visibility</p:attrName>
-                                  </p:attrNameLst>
-                                </p:cBhvr>
-                                <p:to>
-                                  <p:strVal val="visible"/>
-                                </p:to>
-                              </p:set>
-                            </p:childTnLst>
-                          </p:cTn>
-                        </p:par>
-                        <p:par>
-                          <p:cTn id="24" fill="hold" nodeType="withEffect">
-                            <p:stCondLst>
-                              <p:cond delay="0"/>
-                            </p:stCondLst>
-                            <p:childTnLst>
-                              <p:animEffect transition="in" filter="fade">
-                                <p:cBhvr>
-                                  <p:cTn id="25" dur="450"/>
-                                  <p:tgtEl>
-                                    <p:spTgt spid="8"/>
-                                  </p:tgtEl>
-                                </p:cBhvr>
-                              </p:animEffect>
-                              <p:set>
-                                <p:cBhvr>
-                                  <p:cTn id="26" dur="1" fill="hold">
-                                    <p:stCondLst>
-                                      <p:cond delay="0"/>
-                                    </p:stCondLst>
-                                  </p:cTn>
-                                  <p:tgtEl>
-                                    <p:spTgt spid="8"/>
-                                  </p:tgtEl>
-                                  <p:attrNameLst>
-                                    <p:attrName>style.visibility</p:attrName>
-                                  </p:attrNameLst>
-                                </p:cBhvr>
-                                <p:to>
-                                  <p:strVal val="visible"/>
-                                </p:to>
-                              </p:set>
-                            </p:childTnLst>
-                          </p:cTn>
-                        </p:par>
-                        <p:par>
-                          <p:cTn id="27" fill="hold" nodeType="withEffect">
-                            <p:stCondLst>
-                              <p:cond delay="0"/>
-                            </p:stCondLst>
-                            <p:childTnLst>
-                              <p:animEffect transition="in" filter="fade">
-                                <p:cBhvr>
-                                  <p:cTn id="28" dur="450"/>
-                                  <p:tgtEl>
-                                    <p:spTgt spid="9"/>
-                                  </p:tgtEl>
-                                </p:cBhvr>
-                              </p:animEffect>
-                              <p:set>
-                                <p:cBhvr>
-                                  <p:cTn id="29" dur="1" fill="hold">
-                                    <p:stCondLst>
-                                      <p:cond delay="0"/>
-                                    </p:stCondLst>
-                                  </p:cTn>
-                                  <p:tgtEl>
-                                    <p:spTgt spid="9"/>
-                                  </p:tgtEl>
-                                  <p:attrNameLst>
-                                    <p:attrName>style.visibility</p:attrName>
-                                  </p:attrNameLst>
-                                </p:cBhvr>
-                                <p:to>
-                                  <p:strVal val="visible"/>
-                                </p:to>
-                              </p:set>
-                            </p:childTnLst>
-                          </p:cTn>
-                        </p:par>
-                        <p:par>
-                          <p:cTn id="30" fill="hold" nodeType="withEffect">
-                            <p:stCondLst>
-                              <p:cond delay="0"/>
-                            </p:stCondLst>
-                            <p:childTnLst>
-                              <p:animEffect transition="in" filter="fade">
-                                <p:cBhvr>
-                                  <p:cTn id="31" dur="450"/>
-                                  <p:tgtEl>
-                                    <p:spTgt spid="10"/>
-                                  </p:tgtEl>
-                                </p:cBhvr>
-                              </p:animEffect>
-                              <p:set>
-                                <p:cBhvr>
-                                  <p:cTn id="32" dur="1" fill="hold">
-                                    <p:stCondLst>
-                                      <p:cond delay="0"/>
-                                    </p:stCondLst>
-                                  </p:cTn>
-                                  <p:tgtEl>
-                                    <p:spTgt spid="10"/>
-                                  </p:tgtEl>
-                                  <p:attrNameLst>
-                                    <p:attrName>style.visibility</p:attrName>
-                                  </p:attrNameLst>
-                                </p:cBhvr>
-                                <p:to>
-                                  <p:strVal val="visible"/>
-                                </p:to>
-                              </p:set>
-                            </p:childTnLst>
-                          </p:cTn>
-                        </p:par>
-                      </p:childTnLst>
-                    </p:cTn>
-                  </p:par>
-                  <p:par>
-                    <p:cTn id="33" fill="hold" nodeType="clickEffect">
-                      <p:stCondLst>
-                        <p:cond delay="0"/>
-                      </p:stCondLst>
-                      <p:childTnLst>
-                        <p:par>
-                          <p:cTn id="34" fill="hold" nodeType="withEffect">
-                            <p:stCondLst>
-                              <p:cond delay="0"/>
-                            </p:stCondLst>
-                            <p:childTnLst>
-                              <p:animEffect transition="in" filter="fade">
-                                <p:cBhvr>
-                                  <p:cTn id="35" dur="450"/>
-                                  <p:tgtEl>
-                                    <p:spTgt spid="11"/>
-                                  </p:tgtEl>
-                                </p:cBhvr>
-                              </p:animEffect>
-                              <p:set>
-                                <p:cBhvr>
-                                  <p:cTn id="36" dur="1" fill="hold">
-                                    <p:stCondLst>
-                                      <p:cond delay="0"/>
-                                    </p:stCondLst>
-                                  </p:cTn>
-                                  <p:tgtEl>
-                                    <p:spTgt spid="11"/>
-                                  </p:tgtEl>
-                                  <p:attrNameLst>
-                                    <p:attrName>style.visibility</p:attrName>
-                                  </p:attrNameLst>
-                                </p:cBhvr>
-                                <p:to>
-                                  <p:strVal val="visible"/>
-                                </p:to>
-                              </p:set>
-                            </p:childTnLst>
-                          </p:cTn>
-                        </p:par>
-                        <p:par>
-                          <p:cTn id="37" fill="hold" nodeType="withEffect">
-                            <p:stCondLst>
-                              <p:cond delay="0"/>
-                            </p:stCondLst>
-                            <p:childTnLst>
-                              <p:animEffect transition="in" filter="fade">
-                                <p:cBhvr>
-                                  <p:cTn id="38" dur="450"/>
-                                  <p:tgtEl>
-                                    <p:spTgt spid="12"/>
-                                  </p:tgtEl>
-                                </p:cBhvr>
-                              </p:animEffect>
-                              <p:set>
-                                <p:cBhvr>
-                                  <p:cTn id="39" dur="1" fill="hold">
-                                    <p:stCondLst>
-                                      <p:cond delay="0"/>
-                                    </p:stCondLst>
-                                  </p:cTn>
-                                  <p:tgtEl>
-                                    <p:spTgt spid="12"/>
-                                  </p:tgtEl>
-                                  <p:attrNameLst>
-                                    <p:attrName>style.visibility</p:attrName>
-                                  </p:attrNameLst>
-                                </p:cBhvr>
-                                <p:to>
-                                  <p:strVal val="visible"/>
-                                </p:to>
-                              </p:set>
-                            </p:childTnLst>
-                          </p:cTn>
-                        </p:par>
-                        <p:par>
-                          <p:cTn id="40" fill="hold" nodeType="withEffect">
-                            <p:stCondLst>
-                              <p:cond delay="0"/>
-                            </p:stCondLst>
-                            <p:childTnLst>
-                              <p:animEffect transition="in" filter="fade">
-                                <p:cBhvr>
-                                  <p:cTn id="41" dur="450"/>
-                                  <p:tgtEl>
-                                    <p:spTgt spid="13"/>
-                                  </p:tgtEl>
-                                </p:cBhvr>
-                              </p:animEffect>
-                              <p:set>
-                                <p:cBhvr>
-                                  <p:cTn id="42" dur="1" fill="hold">
-                                    <p:stCondLst>
-                                      <p:cond delay="0"/>
-                                    </p:stCondLst>
-                                  </p:cTn>
-                                  <p:tgtEl>
-                                    <p:spTgt spid="13"/>
-                                  </p:tgtEl>
-                                  <p:attrNameLst>
-                                    <p:attrName>style.visibility</p:attrName>
-                                  </p:attrNameLst>
-                                </p:cBhvr>
-                                <p:to>
-                                  <p:strVal val="visible"/>
-                                </p:to>
-                              </p:set>
-                            </p:childTnLst>
-                          </p:cTn>
-                        </p:par>
-                        <p:par>
-                          <p:cTn id="43" fill="hold" nodeType="withEffect">
-                            <p:stCondLst>
-                              <p:cond delay="0"/>
-                            </p:stCondLst>
-                            <p:childTnLst>
-                              <p:animEffect transition="in" filter="fade">
-                                <p:cBhvr>
-                                  <p:cTn id="44" dur="450"/>
-                                  <p:tgtEl>
-                                    <p:spTgt spid="14"/>
-                                  </p:tgtEl>
-                                </p:cBhvr>
-                              </p:animEffect>
-                              <p:set>
-                                <p:cBhvr>
-                                  <p:cTn id="45" dur="1" fill="hold">
-                                    <p:stCondLst>
-                                      <p:cond delay="0"/>
-                                    </p:stCondLst>
-                                  </p:cTn>
-                                  <p:tgtEl>
-                                    <p:spTgt spid="14"/>
-                                  </p:tgtEl>
-                                  <p:attrNameLst>
-                                    <p:attrName>style.visibility</p:attrName>
-                                  </p:attrNameLst>
-                                </p:cBhvr>
-                                <p:to>
-                                  <p:strVal val="visible"/>
-                                </p:to>
-                              </p:set>
-                            </p:childTnLst>
-                          </p:cTn>
-                        </p:par>
-                      </p:childTnLst>
-                    </p:cTn>
-                  </p:par>
-                </p:childTnLst>
-              </p:cTn>
-              <p:prevCondLst>
-                <p:cond evt="onPrev" delay="0">
-                  <p:tgtEl>
-                    <p:sldTgt/>
-                  </p:tgtEl>
-                </p:cond>
-              </p:prevCondLst>
-              <p:nextCondLst>
-                <p:cond evt="onNext" delay="0">
-                  <p:tgtEl>
-                    <p:sldTgt/>
-                  </p:tgtEl>
-                </p:cond>
-              </p:nextCondLst>
-            </p:seq>
-          </p:childTnLst>
-        </p:cTn>
-      </p:par>
-    </p:tnLst>
-  </p:timing>
 </p:sld>
 </file>
 
@@ -15603,1000 +11634,6 @@
   <p:transition spd="med" advClick="1">
     <p:fade/>
   </p:transition>
-  <p:timing>
-    <p:tnLst>
-      <p:par>
-        <p:cTn id="2" dur="indefinite" restart="never" nodeType="tmRoot">
-          <p:childTnLst>
-            <p:seq concurrent="1" nextAc="seek">
-              <p:cTn id="3" dur="indefinite" nodeType="mainSeq">
-                <p:childTnLst>
-                  <p:par>
-                    <p:cTn id="4" fill="hold" nodeType="withEffect">
-                      <p:stCondLst>
-                        <p:cond delay="0"/>
-                      </p:stCondLst>
-                      <p:childTnLst>
-                        <p:par>
-                          <p:cTn id="5" fill="hold" nodeType="withEffect">
-                            <p:stCondLst>
-                              <p:cond delay="0"/>
-                            </p:stCondLst>
-                            <p:childTnLst>
-                              <p:animEffect transition="in" filter="fade">
-                                <p:cBhvr>
-                                  <p:cTn id="6" dur="450"/>
-                                  <p:tgtEl>
-                                    <p:spTgt spid="2"/>
-                                  </p:tgtEl>
-                                </p:cBhvr>
-                              </p:animEffect>
-                              <p:set>
-                                <p:cBhvr>
-                                  <p:cTn id="7" dur="1" fill="hold">
-                                    <p:stCondLst>
-                                      <p:cond delay="0"/>
-                                    </p:stCondLst>
-                                  </p:cTn>
-                                  <p:tgtEl>
-                                    <p:spTgt spid="2"/>
-                                  </p:tgtEl>
-                                  <p:attrNameLst>
-                                    <p:attrName>style.visibility</p:attrName>
-                                  </p:attrNameLst>
-                                </p:cBhvr>
-                                <p:to>
-                                  <p:strVal val="visible"/>
-                                </p:to>
-                              </p:set>
-                            </p:childTnLst>
-                          </p:cTn>
-                        </p:par>
-                        <p:par>
-                          <p:cTn id="8" fill="hold" nodeType="withEffect">
-                            <p:stCondLst>
-                              <p:cond delay="0"/>
-                            </p:stCondLst>
-                            <p:childTnLst>
-                              <p:animEffect transition="in" filter="fade">
-                                <p:cBhvr>
-                                  <p:cTn id="9" dur="450"/>
-                                  <p:tgtEl>
-                                    <p:spTgt spid="3"/>
-                                  </p:tgtEl>
-                                </p:cBhvr>
-                              </p:animEffect>
-                              <p:set>
-                                <p:cBhvr>
-                                  <p:cTn id="10" dur="1" fill="hold">
-                                    <p:stCondLst>
-                                      <p:cond delay="0"/>
-                                    </p:stCondLst>
-                                  </p:cTn>
-                                  <p:tgtEl>
-                                    <p:spTgt spid="3"/>
-                                  </p:tgtEl>
-                                  <p:attrNameLst>
-                                    <p:attrName>style.visibility</p:attrName>
-                                  </p:attrNameLst>
-                                </p:cBhvr>
-                                <p:to>
-                                  <p:strVal val="visible"/>
-                                </p:to>
-                              </p:set>
-                            </p:childTnLst>
-                          </p:cTn>
-                        </p:par>
-                        <p:par>
-                          <p:cTn id="11" fill="hold" nodeType="withEffect">
-                            <p:stCondLst>
-                              <p:cond delay="0"/>
-                            </p:stCondLst>
-                            <p:childTnLst>
-                              <p:animEffect transition="in" filter="fade">
-                                <p:cBhvr>
-                                  <p:cTn id="12" dur="450"/>
-                                  <p:tgtEl>
-                                    <p:spTgt spid="4"/>
-                                  </p:tgtEl>
-                                </p:cBhvr>
-                              </p:animEffect>
-                              <p:set>
-                                <p:cBhvr>
-                                  <p:cTn id="13" dur="1" fill="hold">
-                                    <p:stCondLst>
-                                      <p:cond delay="0"/>
-                                    </p:stCondLst>
-                                  </p:cTn>
-                                  <p:tgtEl>
-                                    <p:spTgt spid="4"/>
-                                  </p:tgtEl>
-                                  <p:attrNameLst>
-                                    <p:attrName>style.visibility</p:attrName>
-                                  </p:attrNameLst>
-                                </p:cBhvr>
-                                <p:to>
-                                  <p:strVal val="visible"/>
-                                </p:to>
-                              </p:set>
-                            </p:childTnLst>
-                          </p:cTn>
-                        </p:par>
-                        <p:par>
-                          <p:cTn id="14" fill="hold" nodeType="withEffect">
-                            <p:stCondLst>
-                              <p:cond delay="0"/>
-                            </p:stCondLst>
-                            <p:childTnLst>
-                              <p:animEffect transition="in" filter="fade">
-                                <p:cBhvr>
-                                  <p:cTn id="15" dur="450"/>
-                                  <p:tgtEl>
-                                    <p:spTgt spid="5"/>
-                                  </p:tgtEl>
-                                </p:cBhvr>
-                              </p:animEffect>
-                              <p:set>
-                                <p:cBhvr>
-                                  <p:cTn id="16" dur="1" fill="hold">
-                                    <p:stCondLst>
-                                      <p:cond delay="0"/>
-                                    </p:stCondLst>
-                                  </p:cTn>
-                                  <p:tgtEl>
-                                    <p:spTgt spid="5"/>
-                                  </p:tgtEl>
-                                  <p:attrNameLst>
-                                    <p:attrName>style.visibility</p:attrName>
-                                  </p:attrNameLst>
-                                </p:cBhvr>
-                                <p:to>
-                                  <p:strVal val="visible"/>
-                                </p:to>
-                              </p:set>
-                            </p:childTnLst>
-                          </p:cTn>
-                        </p:par>
-                        <p:par>
-                          <p:cTn id="17" fill="hold" nodeType="withEffect">
-                            <p:stCondLst>
-                              <p:cond delay="0"/>
-                            </p:stCondLst>
-                            <p:childTnLst>
-                              <p:animEffect transition="in" filter="fade">
-                                <p:cBhvr>
-                                  <p:cTn id="18" dur="450"/>
-                                  <p:tgtEl>
-                                    <p:spTgt spid="6"/>
-                                  </p:tgtEl>
-                                </p:cBhvr>
-                              </p:animEffect>
-                              <p:set>
-                                <p:cBhvr>
-                                  <p:cTn id="19" dur="1" fill="hold">
-                                    <p:stCondLst>
-                                      <p:cond delay="0"/>
-                                    </p:stCondLst>
-                                  </p:cTn>
-                                  <p:tgtEl>
-                                    <p:spTgt spid="6"/>
-                                  </p:tgtEl>
-                                  <p:attrNameLst>
-                                    <p:attrName>style.visibility</p:attrName>
-                                  </p:attrNameLst>
-                                </p:cBhvr>
-                                <p:to>
-                                  <p:strVal val="visible"/>
-                                </p:to>
-                              </p:set>
-                            </p:childTnLst>
-                          </p:cTn>
-                        </p:par>
-                        <p:par>
-                          <p:cTn id="20" fill="hold" nodeType="withEffect">
-                            <p:stCondLst>
-                              <p:cond delay="0"/>
-                            </p:stCondLst>
-                            <p:childTnLst>
-                              <p:animEffect transition="in" filter="fade">
-                                <p:cBhvr>
-                                  <p:cTn id="21" dur="450"/>
-                                  <p:tgtEl>
-                                    <p:spTgt spid="7"/>
-                                  </p:tgtEl>
-                                </p:cBhvr>
-                              </p:animEffect>
-                              <p:set>
-                                <p:cBhvr>
-                                  <p:cTn id="22" dur="1" fill="hold">
-                                    <p:stCondLst>
-                                      <p:cond delay="0"/>
-                                    </p:stCondLst>
-                                  </p:cTn>
-                                  <p:tgtEl>
-                                    <p:spTgt spid="7"/>
-                                  </p:tgtEl>
-                                  <p:attrNameLst>
-                                    <p:attrName>style.visibility</p:attrName>
-                                  </p:attrNameLst>
-                                </p:cBhvr>
-                                <p:to>
-                                  <p:strVal val="visible"/>
-                                </p:to>
-                              </p:set>
-                            </p:childTnLst>
-                          </p:cTn>
-                        </p:par>
-                      </p:childTnLst>
-                    </p:cTn>
-                  </p:par>
-                  <p:par>
-                    <p:cTn id="23" fill="hold" nodeType="clickEffect">
-                      <p:stCondLst>
-                        <p:cond delay="0"/>
-                      </p:stCondLst>
-                      <p:childTnLst>
-                        <p:par>
-                          <p:cTn id="24" fill="hold" nodeType="withEffect">
-                            <p:stCondLst>
-                              <p:cond delay="0"/>
-                            </p:stCondLst>
-                            <p:childTnLst>
-                              <p:animEffect transition="in" filter="fade">
-                                <p:cBhvr>
-                                  <p:cTn id="25" dur="450"/>
-                                  <p:tgtEl>
-                                    <p:spTgt spid="8"/>
-                                  </p:tgtEl>
-                                </p:cBhvr>
-                              </p:animEffect>
-                              <p:set>
-                                <p:cBhvr>
-                                  <p:cTn id="26" dur="1" fill="hold">
-                                    <p:stCondLst>
-                                      <p:cond delay="0"/>
-                                    </p:stCondLst>
-                                  </p:cTn>
-                                  <p:tgtEl>
-                                    <p:spTgt spid="8"/>
-                                  </p:tgtEl>
-                                  <p:attrNameLst>
-                                    <p:attrName>style.visibility</p:attrName>
-                                  </p:attrNameLst>
-                                </p:cBhvr>
-                                <p:to>
-                                  <p:strVal val="visible"/>
-                                </p:to>
-                              </p:set>
-                            </p:childTnLst>
-                          </p:cTn>
-                        </p:par>
-                        <p:par>
-                          <p:cTn id="27" fill="hold" nodeType="withEffect">
-                            <p:stCondLst>
-                              <p:cond delay="0"/>
-                            </p:stCondLst>
-                            <p:childTnLst>
-                              <p:animEffect transition="in" filter="fade">
-                                <p:cBhvr>
-                                  <p:cTn id="28" dur="450"/>
-                                  <p:tgtEl>
-                                    <p:spTgt spid="9"/>
-                                  </p:tgtEl>
-                                </p:cBhvr>
-                              </p:animEffect>
-                              <p:set>
-                                <p:cBhvr>
-                                  <p:cTn id="29" dur="1" fill="hold">
-                                    <p:stCondLst>
-                                      <p:cond delay="0"/>
-                                    </p:stCondLst>
-                                  </p:cTn>
-                                  <p:tgtEl>
-                                    <p:spTgt spid="9"/>
-                                  </p:tgtEl>
-                                  <p:attrNameLst>
-                                    <p:attrName>style.visibility</p:attrName>
-                                  </p:attrNameLst>
-                                </p:cBhvr>
-                                <p:to>
-                                  <p:strVal val="visible"/>
-                                </p:to>
-                              </p:set>
-                            </p:childTnLst>
-                          </p:cTn>
-                        </p:par>
-                        <p:par>
-                          <p:cTn id="30" fill="hold" nodeType="withEffect">
-                            <p:stCondLst>
-                              <p:cond delay="0"/>
-                            </p:stCondLst>
-                            <p:childTnLst>
-                              <p:animEffect transition="in" filter="fade">
-                                <p:cBhvr>
-                                  <p:cTn id="31" dur="450"/>
-                                  <p:tgtEl>
-                                    <p:spTgt spid="10"/>
-                                  </p:tgtEl>
-                                </p:cBhvr>
-                              </p:animEffect>
-                              <p:set>
-                                <p:cBhvr>
-                                  <p:cTn id="32" dur="1" fill="hold">
-                                    <p:stCondLst>
-                                      <p:cond delay="0"/>
-                                    </p:stCondLst>
-                                  </p:cTn>
-                                  <p:tgtEl>
-                                    <p:spTgt spid="10"/>
-                                  </p:tgtEl>
-                                  <p:attrNameLst>
-                                    <p:attrName>style.visibility</p:attrName>
-                                  </p:attrNameLst>
-                                </p:cBhvr>
-                                <p:to>
-                                  <p:strVal val="visible"/>
-                                </p:to>
-                              </p:set>
-                            </p:childTnLst>
-                          </p:cTn>
-                        </p:par>
-                        <p:par>
-                          <p:cTn id="33" fill="hold" nodeType="withEffect">
-                            <p:stCondLst>
-                              <p:cond delay="0"/>
-                            </p:stCondLst>
-                            <p:childTnLst>
-                              <p:animEffect transition="in" filter="fade">
-                                <p:cBhvr>
-                                  <p:cTn id="34" dur="450"/>
-                                  <p:tgtEl>
-                                    <p:spTgt spid="11"/>
-                                  </p:tgtEl>
-                                </p:cBhvr>
-                              </p:animEffect>
-                              <p:set>
-                                <p:cBhvr>
-                                  <p:cTn id="35" dur="1" fill="hold">
-                                    <p:stCondLst>
-                                      <p:cond delay="0"/>
-                                    </p:stCondLst>
-                                  </p:cTn>
-                                  <p:tgtEl>
-                                    <p:spTgt spid="11"/>
-                                  </p:tgtEl>
-                                  <p:attrNameLst>
-                                    <p:attrName>style.visibility</p:attrName>
-                                  </p:attrNameLst>
-                                </p:cBhvr>
-                                <p:to>
-                                  <p:strVal val="visible"/>
-                                </p:to>
-                              </p:set>
-                            </p:childTnLst>
-                          </p:cTn>
-                        </p:par>
-                      </p:childTnLst>
-                    </p:cTn>
-                  </p:par>
-                  <p:par>
-                    <p:cTn id="36" fill="hold" nodeType="clickEffect">
-                      <p:stCondLst>
-                        <p:cond delay="0"/>
-                      </p:stCondLst>
-                      <p:childTnLst>
-                        <p:par>
-                          <p:cTn id="37" fill="hold" nodeType="withEffect">
-                            <p:stCondLst>
-                              <p:cond delay="0"/>
-                            </p:stCondLst>
-                            <p:childTnLst>
-                              <p:animEffect transition="in" filter="fade">
-                                <p:cBhvr>
-                                  <p:cTn id="38" dur="450"/>
-                                  <p:tgtEl>
-                                    <p:spTgt spid="12"/>
-                                  </p:tgtEl>
-                                </p:cBhvr>
-                              </p:animEffect>
-                              <p:set>
-                                <p:cBhvr>
-                                  <p:cTn id="39" dur="1" fill="hold">
-                                    <p:stCondLst>
-                                      <p:cond delay="0"/>
-                                    </p:stCondLst>
-                                  </p:cTn>
-                                  <p:tgtEl>
-                                    <p:spTgt spid="12"/>
-                                  </p:tgtEl>
-                                  <p:attrNameLst>
-                                    <p:attrName>style.visibility</p:attrName>
-                                  </p:attrNameLst>
-                                </p:cBhvr>
-                                <p:to>
-                                  <p:strVal val="visible"/>
-                                </p:to>
-                              </p:set>
-                            </p:childTnLst>
-                          </p:cTn>
-                        </p:par>
-                        <p:par>
-                          <p:cTn id="40" fill="hold" nodeType="withEffect">
-                            <p:stCondLst>
-                              <p:cond delay="0"/>
-                            </p:stCondLst>
-                            <p:childTnLst>
-                              <p:animEffect transition="in" filter="fade">
-                                <p:cBhvr>
-                                  <p:cTn id="41" dur="450"/>
-                                  <p:tgtEl>
-                                    <p:spTgt spid="13"/>
-                                  </p:tgtEl>
-                                </p:cBhvr>
-                              </p:animEffect>
-                              <p:set>
-                                <p:cBhvr>
-                                  <p:cTn id="42" dur="1" fill="hold">
-                                    <p:stCondLst>
-                                      <p:cond delay="0"/>
-                                    </p:stCondLst>
-                                  </p:cTn>
-                                  <p:tgtEl>
-                                    <p:spTgt spid="13"/>
-                                  </p:tgtEl>
-                                  <p:attrNameLst>
-                                    <p:attrName>style.visibility</p:attrName>
-                                  </p:attrNameLst>
-                                </p:cBhvr>
-                                <p:to>
-                                  <p:strVal val="visible"/>
-                                </p:to>
-                              </p:set>
-                            </p:childTnLst>
-                          </p:cTn>
-                        </p:par>
-                        <p:par>
-                          <p:cTn id="43" fill="hold" nodeType="withEffect">
-                            <p:stCondLst>
-                              <p:cond delay="0"/>
-                            </p:stCondLst>
-                            <p:childTnLst>
-                              <p:animEffect transition="in" filter="fade">
-                                <p:cBhvr>
-                                  <p:cTn id="44" dur="450"/>
-                                  <p:tgtEl>
-                                    <p:spTgt spid="14"/>
-                                  </p:tgtEl>
-                                </p:cBhvr>
-                              </p:animEffect>
-                              <p:set>
-                                <p:cBhvr>
-                                  <p:cTn id="45" dur="1" fill="hold">
-                                    <p:stCondLst>
-                                      <p:cond delay="0"/>
-                                    </p:stCondLst>
-                                  </p:cTn>
-                                  <p:tgtEl>
-                                    <p:spTgt spid="14"/>
-                                  </p:tgtEl>
-                                  <p:attrNameLst>
-                                    <p:attrName>style.visibility</p:attrName>
-                                  </p:attrNameLst>
-                                </p:cBhvr>
-                                <p:to>
-                                  <p:strVal val="visible"/>
-                                </p:to>
-                              </p:set>
-                            </p:childTnLst>
-                          </p:cTn>
-                        </p:par>
-                        <p:par>
-                          <p:cTn id="46" fill="hold" nodeType="withEffect">
-                            <p:stCondLst>
-                              <p:cond delay="0"/>
-                            </p:stCondLst>
-                            <p:childTnLst>
-                              <p:animEffect transition="in" filter="fade">
-                                <p:cBhvr>
-                                  <p:cTn id="47" dur="450"/>
-                                  <p:tgtEl>
-                                    <p:spTgt spid="15"/>
-                                  </p:tgtEl>
-                                </p:cBhvr>
-                              </p:animEffect>
-                              <p:set>
-                                <p:cBhvr>
-                                  <p:cTn id="48" dur="1" fill="hold">
-                                    <p:stCondLst>
-                                      <p:cond delay="0"/>
-                                    </p:stCondLst>
-                                  </p:cTn>
-                                  <p:tgtEl>
-                                    <p:spTgt spid="15"/>
-                                  </p:tgtEl>
-                                  <p:attrNameLst>
-                                    <p:attrName>style.visibility</p:attrName>
-                                  </p:attrNameLst>
-                                </p:cBhvr>
-                                <p:to>
-                                  <p:strVal val="visible"/>
-                                </p:to>
-                              </p:set>
-                            </p:childTnLst>
-                          </p:cTn>
-                        </p:par>
-                      </p:childTnLst>
-                    </p:cTn>
-                  </p:par>
-                  <p:par>
-                    <p:cTn id="49" fill="hold" nodeType="clickEffect">
-                      <p:stCondLst>
-                        <p:cond delay="0"/>
-                      </p:stCondLst>
-                      <p:childTnLst>
-                        <p:par>
-                          <p:cTn id="50" fill="hold" nodeType="withEffect">
-                            <p:stCondLst>
-                              <p:cond delay="0"/>
-                            </p:stCondLst>
-                            <p:childTnLst>
-                              <p:animEffect transition="in" filter="fade">
-                                <p:cBhvr>
-                                  <p:cTn id="51" dur="450"/>
-                                  <p:tgtEl>
-                                    <p:spTgt spid="16"/>
-                                  </p:tgtEl>
-                                </p:cBhvr>
-                              </p:animEffect>
-                              <p:set>
-                                <p:cBhvr>
-                                  <p:cTn id="52" dur="1" fill="hold">
-                                    <p:stCondLst>
-                                      <p:cond delay="0"/>
-                                    </p:stCondLst>
-                                  </p:cTn>
-                                  <p:tgtEl>
-                                    <p:spTgt spid="16"/>
-                                  </p:tgtEl>
-                                  <p:attrNameLst>
-                                    <p:attrName>style.visibility</p:attrName>
-                                  </p:attrNameLst>
-                                </p:cBhvr>
-                                <p:to>
-                                  <p:strVal val="visible"/>
-                                </p:to>
-                              </p:set>
-                            </p:childTnLst>
-                          </p:cTn>
-                        </p:par>
-                        <p:par>
-                          <p:cTn id="53" fill="hold" nodeType="withEffect">
-                            <p:stCondLst>
-                              <p:cond delay="0"/>
-                            </p:stCondLst>
-                            <p:childTnLst>
-                              <p:animEffect transition="in" filter="fade">
-                                <p:cBhvr>
-                                  <p:cTn id="54" dur="450"/>
-                                  <p:tgtEl>
-                                    <p:spTgt spid="17"/>
-                                  </p:tgtEl>
-                                </p:cBhvr>
-                              </p:animEffect>
-                              <p:set>
-                                <p:cBhvr>
-                                  <p:cTn id="55" dur="1" fill="hold">
-                                    <p:stCondLst>
-                                      <p:cond delay="0"/>
-                                    </p:stCondLst>
-                                  </p:cTn>
-                                  <p:tgtEl>
-                                    <p:spTgt spid="17"/>
-                                  </p:tgtEl>
-                                  <p:attrNameLst>
-                                    <p:attrName>style.visibility</p:attrName>
-                                  </p:attrNameLst>
-                                </p:cBhvr>
-                                <p:to>
-                                  <p:strVal val="visible"/>
-                                </p:to>
-                              </p:set>
-                            </p:childTnLst>
-                          </p:cTn>
-                        </p:par>
-                        <p:par>
-                          <p:cTn id="56" fill="hold" nodeType="withEffect">
-                            <p:stCondLst>
-                              <p:cond delay="0"/>
-                            </p:stCondLst>
-                            <p:childTnLst>
-                              <p:animEffect transition="in" filter="fade">
-                                <p:cBhvr>
-                                  <p:cTn id="57" dur="450"/>
-                                  <p:tgtEl>
-                                    <p:spTgt spid="18"/>
-                                  </p:tgtEl>
-                                </p:cBhvr>
-                              </p:animEffect>
-                              <p:set>
-                                <p:cBhvr>
-                                  <p:cTn id="58" dur="1" fill="hold">
-                                    <p:stCondLst>
-                                      <p:cond delay="0"/>
-                                    </p:stCondLst>
-                                  </p:cTn>
-                                  <p:tgtEl>
-                                    <p:spTgt spid="18"/>
-                                  </p:tgtEl>
-                                  <p:attrNameLst>
-                                    <p:attrName>style.visibility</p:attrName>
-                                  </p:attrNameLst>
-                                </p:cBhvr>
-                                <p:to>
-                                  <p:strVal val="visible"/>
-                                </p:to>
-                              </p:set>
-                            </p:childTnLst>
-                          </p:cTn>
-                        </p:par>
-                        <p:par>
-                          <p:cTn id="59" fill="hold" nodeType="withEffect">
-                            <p:stCondLst>
-                              <p:cond delay="0"/>
-                            </p:stCondLst>
-                            <p:childTnLst>
-                              <p:animEffect transition="in" filter="fade">
-                                <p:cBhvr>
-                                  <p:cTn id="60" dur="450"/>
-                                  <p:tgtEl>
-                                    <p:spTgt spid="19"/>
-                                  </p:tgtEl>
-                                </p:cBhvr>
-                              </p:animEffect>
-                              <p:set>
-                                <p:cBhvr>
-                                  <p:cTn id="61" dur="1" fill="hold">
-                                    <p:stCondLst>
-                                      <p:cond delay="0"/>
-                                    </p:stCondLst>
-                                  </p:cTn>
-                                  <p:tgtEl>
-                                    <p:spTgt spid="19"/>
-                                  </p:tgtEl>
-                                  <p:attrNameLst>
-                                    <p:attrName>style.visibility</p:attrName>
-                                  </p:attrNameLst>
-                                </p:cBhvr>
-                                <p:to>
-                                  <p:strVal val="visible"/>
-                                </p:to>
-                              </p:set>
-                            </p:childTnLst>
-                          </p:cTn>
-                        </p:par>
-                      </p:childTnLst>
-                    </p:cTn>
-                  </p:par>
-                  <p:par>
-                    <p:cTn id="62" fill="hold" nodeType="clickEffect">
-                      <p:stCondLst>
-                        <p:cond delay="0"/>
-                      </p:stCondLst>
-                      <p:childTnLst>
-                        <p:par>
-                          <p:cTn id="63" fill="hold" nodeType="withEffect">
-                            <p:stCondLst>
-                              <p:cond delay="0"/>
-                            </p:stCondLst>
-                            <p:childTnLst>
-                              <p:animEffect transition="in" filter="fade">
-                                <p:cBhvr>
-                                  <p:cTn id="64" dur="450"/>
-                                  <p:tgtEl>
-                                    <p:spTgt spid="20"/>
-                                  </p:tgtEl>
-                                </p:cBhvr>
-                              </p:animEffect>
-                              <p:set>
-                                <p:cBhvr>
-                                  <p:cTn id="65" dur="1" fill="hold">
-                                    <p:stCondLst>
-                                      <p:cond delay="0"/>
-                                    </p:stCondLst>
-                                  </p:cTn>
-                                  <p:tgtEl>
-                                    <p:spTgt spid="20"/>
-                                  </p:tgtEl>
-                                  <p:attrNameLst>
-                                    <p:attrName>style.visibility</p:attrName>
-                                  </p:attrNameLst>
-                                </p:cBhvr>
-                                <p:to>
-                                  <p:strVal val="visible"/>
-                                </p:to>
-                              </p:set>
-                            </p:childTnLst>
-                          </p:cTn>
-                        </p:par>
-                        <p:par>
-                          <p:cTn id="66" fill="hold" nodeType="withEffect">
-                            <p:stCondLst>
-                              <p:cond delay="0"/>
-                            </p:stCondLst>
-                            <p:childTnLst>
-                              <p:animEffect transition="in" filter="fade">
-                                <p:cBhvr>
-                                  <p:cTn id="67" dur="450"/>
-                                  <p:tgtEl>
-                                    <p:spTgt spid="21"/>
-                                  </p:tgtEl>
-                                </p:cBhvr>
-                              </p:animEffect>
-                              <p:set>
-                                <p:cBhvr>
-                                  <p:cTn id="68" dur="1" fill="hold">
-                                    <p:stCondLst>
-                                      <p:cond delay="0"/>
-                                    </p:stCondLst>
-                                  </p:cTn>
-                                  <p:tgtEl>
-                                    <p:spTgt spid="21"/>
-                                  </p:tgtEl>
-                                  <p:attrNameLst>
-                                    <p:attrName>style.visibility</p:attrName>
-                                  </p:attrNameLst>
-                                </p:cBhvr>
-                                <p:to>
-                                  <p:strVal val="visible"/>
-                                </p:to>
-                              </p:set>
-                            </p:childTnLst>
-                          </p:cTn>
-                        </p:par>
-                        <p:par>
-                          <p:cTn id="69" fill="hold" nodeType="withEffect">
-                            <p:stCondLst>
-                              <p:cond delay="0"/>
-                            </p:stCondLst>
-                            <p:childTnLst>
-                              <p:animEffect transition="in" filter="fade">
-                                <p:cBhvr>
-                                  <p:cTn id="70" dur="450"/>
-                                  <p:tgtEl>
-                                    <p:spTgt spid="22"/>
-                                  </p:tgtEl>
-                                </p:cBhvr>
-                              </p:animEffect>
-                              <p:set>
-                                <p:cBhvr>
-                                  <p:cTn id="71" dur="1" fill="hold">
-                                    <p:stCondLst>
-                                      <p:cond delay="0"/>
-                                    </p:stCondLst>
-                                  </p:cTn>
-                                  <p:tgtEl>
-                                    <p:spTgt spid="22"/>
-                                  </p:tgtEl>
-                                  <p:attrNameLst>
-                                    <p:attrName>style.visibility</p:attrName>
-                                  </p:attrNameLst>
-                                </p:cBhvr>
-                                <p:to>
-                                  <p:strVal val="visible"/>
-                                </p:to>
-                              </p:set>
-                            </p:childTnLst>
-                          </p:cTn>
-                        </p:par>
-                        <p:par>
-                          <p:cTn id="72" fill="hold" nodeType="withEffect">
-                            <p:stCondLst>
-                              <p:cond delay="0"/>
-                            </p:stCondLst>
-                            <p:childTnLst>
-                              <p:animEffect transition="in" filter="fade">
-                                <p:cBhvr>
-                                  <p:cTn id="73" dur="450"/>
-                                  <p:tgtEl>
-                                    <p:spTgt spid="23"/>
-                                  </p:tgtEl>
-                                </p:cBhvr>
-                              </p:animEffect>
-                              <p:set>
-                                <p:cBhvr>
-                                  <p:cTn id="74" dur="1" fill="hold">
-                                    <p:stCondLst>
-                                      <p:cond delay="0"/>
-                                    </p:stCondLst>
-                                  </p:cTn>
-                                  <p:tgtEl>
-                                    <p:spTgt spid="23"/>
-                                  </p:tgtEl>
-                                  <p:attrNameLst>
-                                    <p:attrName>style.visibility</p:attrName>
-                                  </p:attrNameLst>
-                                </p:cBhvr>
-                                <p:to>
-                                  <p:strVal val="visible"/>
-                                </p:to>
-                              </p:set>
-                            </p:childTnLst>
-                          </p:cTn>
-                        </p:par>
-                      </p:childTnLst>
-                    </p:cTn>
-                  </p:par>
-                  <p:par>
-                    <p:cTn id="75" fill="hold" nodeType="clickEffect">
-                      <p:stCondLst>
-                        <p:cond delay="0"/>
-                      </p:stCondLst>
-                      <p:childTnLst>
-                        <p:par>
-                          <p:cTn id="76" fill="hold" nodeType="withEffect">
-                            <p:stCondLst>
-                              <p:cond delay="0"/>
-                            </p:stCondLst>
-                            <p:childTnLst>
-                              <p:animEffect transition="in" filter="fade">
-                                <p:cBhvr>
-                                  <p:cTn id="77" dur="450"/>
-                                  <p:tgtEl>
-                                    <p:spTgt spid="24"/>
-                                  </p:tgtEl>
-                                </p:cBhvr>
-                              </p:animEffect>
-                              <p:set>
-                                <p:cBhvr>
-                                  <p:cTn id="78" dur="1" fill="hold">
-                                    <p:stCondLst>
-                                      <p:cond delay="0"/>
-                                    </p:stCondLst>
-                                  </p:cTn>
-                                  <p:tgtEl>
-                                    <p:spTgt spid="24"/>
-                                  </p:tgtEl>
-                                  <p:attrNameLst>
-                                    <p:attrName>style.visibility</p:attrName>
-                                  </p:attrNameLst>
-                                </p:cBhvr>
-                                <p:to>
-                                  <p:strVal val="visible"/>
-                                </p:to>
-                              </p:set>
-                            </p:childTnLst>
-                          </p:cTn>
-                        </p:par>
-                        <p:par>
-                          <p:cTn id="79" fill="hold" nodeType="withEffect">
-                            <p:stCondLst>
-                              <p:cond delay="0"/>
-                            </p:stCondLst>
-                            <p:childTnLst>
-                              <p:animEffect transition="in" filter="fade">
-                                <p:cBhvr>
-                                  <p:cTn id="80" dur="450"/>
-                                  <p:tgtEl>
-                                    <p:spTgt spid="25"/>
-                                  </p:tgtEl>
-                                </p:cBhvr>
-                              </p:animEffect>
-                              <p:set>
-                                <p:cBhvr>
-                                  <p:cTn id="81" dur="1" fill="hold">
-                                    <p:stCondLst>
-                                      <p:cond delay="0"/>
-                                    </p:stCondLst>
-                                  </p:cTn>
-                                  <p:tgtEl>
-                                    <p:spTgt spid="25"/>
-                                  </p:tgtEl>
-                                  <p:attrNameLst>
-                                    <p:attrName>style.visibility</p:attrName>
-                                  </p:attrNameLst>
-                                </p:cBhvr>
-                                <p:to>
-                                  <p:strVal val="visible"/>
-                                </p:to>
-                              </p:set>
-                            </p:childTnLst>
-                          </p:cTn>
-                        </p:par>
-                        <p:par>
-                          <p:cTn id="82" fill="hold" nodeType="withEffect">
-                            <p:stCondLst>
-                              <p:cond delay="0"/>
-                            </p:stCondLst>
-                            <p:childTnLst>
-                              <p:animEffect transition="in" filter="fade">
-                                <p:cBhvr>
-                                  <p:cTn id="83" dur="450"/>
-                                  <p:tgtEl>
-                                    <p:spTgt spid="26"/>
-                                  </p:tgtEl>
-                                </p:cBhvr>
-                              </p:animEffect>
-                              <p:set>
-                                <p:cBhvr>
-                                  <p:cTn id="84" dur="1" fill="hold">
-                                    <p:stCondLst>
-                                      <p:cond delay="0"/>
-                                    </p:stCondLst>
-                                  </p:cTn>
-                                  <p:tgtEl>
-                                    <p:spTgt spid="26"/>
-                                  </p:tgtEl>
-                                  <p:attrNameLst>
-                                    <p:attrName>style.visibility</p:attrName>
-                                  </p:attrNameLst>
-                                </p:cBhvr>
-                                <p:to>
-                                  <p:strVal val="visible"/>
-                                </p:to>
-                              </p:set>
-                            </p:childTnLst>
-                          </p:cTn>
-                        </p:par>
-                        <p:par>
-                          <p:cTn id="85" fill="hold" nodeType="withEffect">
-                            <p:stCondLst>
-                              <p:cond delay="0"/>
-                            </p:stCondLst>
-                            <p:childTnLst>
-                              <p:animEffect transition="in" filter="fade">
-                                <p:cBhvr>
-                                  <p:cTn id="86" dur="450"/>
-                                  <p:tgtEl>
-                                    <p:spTgt spid="27"/>
-                                  </p:tgtEl>
-                                </p:cBhvr>
-                              </p:animEffect>
-                              <p:set>
-                                <p:cBhvr>
-                                  <p:cTn id="87" dur="1" fill="hold">
-                                    <p:stCondLst>
-                                      <p:cond delay="0"/>
-                                    </p:stCondLst>
-                                  </p:cTn>
-                                  <p:tgtEl>
-                                    <p:spTgt spid="27"/>
-                                  </p:tgtEl>
-                                  <p:attrNameLst>
-                                    <p:attrName>style.visibility</p:attrName>
-                                  </p:attrNameLst>
-                                </p:cBhvr>
-                                <p:to>
-                                  <p:strVal val="visible"/>
-                                </p:to>
-                              </p:set>
-                            </p:childTnLst>
-                          </p:cTn>
-                        </p:par>
-                      </p:childTnLst>
-                    </p:cTn>
-                  </p:par>
-                </p:childTnLst>
-              </p:cTn>
-              <p:prevCondLst>
-                <p:cond evt="onPrev" delay="0">
-                  <p:tgtEl>
-                    <p:sldTgt/>
-                  </p:tgtEl>
-                </p:cond>
-              </p:prevCondLst>
-              <p:nextCondLst>
-                <p:cond evt="onNext" delay="0">
-                  <p:tgtEl>
-                    <p:sldTgt/>
-                  </p:tgtEl>
-                </p:cond>
-              </p:nextCondLst>
-            </p:seq>
-          </p:childTnLst>
-        </p:cTn>
-      </p:par>
-    </p:tnLst>
-  </p:timing>
 </p:sld>
 </file>
 
@@ -17773,1000 +12810,6 @@
   <p:transition spd="med" advClick="1">
     <p:fade/>
   </p:transition>
-  <p:timing>
-    <p:tnLst>
-      <p:par>
-        <p:cTn id="2" dur="indefinite" restart="never" nodeType="tmRoot">
-          <p:childTnLst>
-            <p:seq concurrent="1" nextAc="seek">
-              <p:cTn id="3" dur="indefinite" nodeType="mainSeq">
-                <p:childTnLst>
-                  <p:par>
-                    <p:cTn id="4" fill="hold" nodeType="withEffect">
-                      <p:stCondLst>
-                        <p:cond delay="0"/>
-                      </p:stCondLst>
-                      <p:childTnLst>
-                        <p:par>
-                          <p:cTn id="5" fill="hold" nodeType="withEffect">
-                            <p:stCondLst>
-                              <p:cond delay="0"/>
-                            </p:stCondLst>
-                            <p:childTnLst>
-                              <p:animEffect transition="in" filter="fade">
-                                <p:cBhvr>
-                                  <p:cTn id="6" dur="450"/>
-                                  <p:tgtEl>
-                                    <p:spTgt spid="2"/>
-                                  </p:tgtEl>
-                                </p:cBhvr>
-                              </p:animEffect>
-                              <p:set>
-                                <p:cBhvr>
-                                  <p:cTn id="7" dur="1" fill="hold">
-                                    <p:stCondLst>
-                                      <p:cond delay="0"/>
-                                    </p:stCondLst>
-                                  </p:cTn>
-                                  <p:tgtEl>
-                                    <p:spTgt spid="2"/>
-                                  </p:tgtEl>
-                                  <p:attrNameLst>
-                                    <p:attrName>style.visibility</p:attrName>
-                                  </p:attrNameLst>
-                                </p:cBhvr>
-                                <p:to>
-                                  <p:strVal val="visible"/>
-                                </p:to>
-                              </p:set>
-                            </p:childTnLst>
-                          </p:cTn>
-                        </p:par>
-                        <p:par>
-                          <p:cTn id="8" fill="hold" nodeType="withEffect">
-                            <p:stCondLst>
-                              <p:cond delay="0"/>
-                            </p:stCondLst>
-                            <p:childTnLst>
-                              <p:animEffect transition="in" filter="fade">
-                                <p:cBhvr>
-                                  <p:cTn id="9" dur="450"/>
-                                  <p:tgtEl>
-                                    <p:spTgt spid="3"/>
-                                  </p:tgtEl>
-                                </p:cBhvr>
-                              </p:animEffect>
-                              <p:set>
-                                <p:cBhvr>
-                                  <p:cTn id="10" dur="1" fill="hold">
-                                    <p:stCondLst>
-                                      <p:cond delay="0"/>
-                                    </p:stCondLst>
-                                  </p:cTn>
-                                  <p:tgtEl>
-                                    <p:spTgt spid="3"/>
-                                  </p:tgtEl>
-                                  <p:attrNameLst>
-                                    <p:attrName>style.visibility</p:attrName>
-                                  </p:attrNameLst>
-                                </p:cBhvr>
-                                <p:to>
-                                  <p:strVal val="visible"/>
-                                </p:to>
-                              </p:set>
-                            </p:childTnLst>
-                          </p:cTn>
-                        </p:par>
-                        <p:par>
-                          <p:cTn id="11" fill="hold" nodeType="withEffect">
-                            <p:stCondLst>
-                              <p:cond delay="0"/>
-                            </p:stCondLst>
-                            <p:childTnLst>
-                              <p:animEffect transition="in" filter="fade">
-                                <p:cBhvr>
-                                  <p:cTn id="12" dur="450"/>
-                                  <p:tgtEl>
-                                    <p:spTgt spid="4"/>
-                                  </p:tgtEl>
-                                </p:cBhvr>
-                              </p:animEffect>
-                              <p:set>
-                                <p:cBhvr>
-                                  <p:cTn id="13" dur="1" fill="hold">
-                                    <p:stCondLst>
-                                      <p:cond delay="0"/>
-                                    </p:stCondLst>
-                                  </p:cTn>
-                                  <p:tgtEl>
-                                    <p:spTgt spid="4"/>
-                                  </p:tgtEl>
-                                  <p:attrNameLst>
-                                    <p:attrName>style.visibility</p:attrName>
-                                  </p:attrNameLst>
-                                </p:cBhvr>
-                                <p:to>
-                                  <p:strVal val="visible"/>
-                                </p:to>
-                              </p:set>
-                            </p:childTnLst>
-                          </p:cTn>
-                        </p:par>
-                        <p:par>
-                          <p:cTn id="14" fill="hold" nodeType="withEffect">
-                            <p:stCondLst>
-                              <p:cond delay="0"/>
-                            </p:stCondLst>
-                            <p:childTnLst>
-                              <p:animEffect transition="in" filter="fade">
-                                <p:cBhvr>
-                                  <p:cTn id="15" dur="450"/>
-                                  <p:tgtEl>
-                                    <p:spTgt spid="5"/>
-                                  </p:tgtEl>
-                                </p:cBhvr>
-                              </p:animEffect>
-                              <p:set>
-                                <p:cBhvr>
-                                  <p:cTn id="16" dur="1" fill="hold">
-                                    <p:stCondLst>
-                                      <p:cond delay="0"/>
-                                    </p:stCondLst>
-                                  </p:cTn>
-                                  <p:tgtEl>
-                                    <p:spTgt spid="5"/>
-                                  </p:tgtEl>
-                                  <p:attrNameLst>
-                                    <p:attrName>style.visibility</p:attrName>
-                                  </p:attrNameLst>
-                                </p:cBhvr>
-                                <p:to>
-                                  <p:strVal val="visible"/>
-                                </p:to>
-                              </p:set>
-                            </p:childTnLst>
-                          </p:cTn>
-                        </p:par>
-                        <p:par>
-                          <p:cTn id="17" fill="hold" nodeType="withEffect">
-                            <p:stCondLst>
-                              <p:cond delay="0"/>
-                            </p:stCondLst>
-                            <p:childTnLst>
-                              <p:animEffect transition="in" filter="fade">
-                                <p:cBhvr>
-                                  <p:cTn id="18" dur="450"/>
-                                  <p:tgtEl>
-                                    <p:spTgt spid="6"/>
-                                  </p:tgtEl>
-                                </p:cBhvr>
-                              </p:animEffect>
-                              <p:set>
-                                <p:cBhvr>
-                                  <p:cTn id="19" dur="1" fill="hold">
-                                    <p:stCondLst>
-                                      <p:cond delay="0"/>
-                                    </p:stCondLst>
-                                  </p:cTn>
-                                  <p:tgtEl>
-                                    <p:spTgt spid="6"/>
-                                  </p:tgtEl>
-                                  <p:attrNameLst>
-                                    <p:attrName>style.visibility</p:attrName>
-                                  </p:attrNameLst>
-                                </p:cBhvr>
-                                <p:to>
-                                  <p:strVal val="visible"/>
-                                </p:to>
-                              </p:set>
-                            </p:childTnLst>
-                          </p:cTn>
-                        </p:par>
-                        <p:par>
-                          <p:cTn id="20" fill="hold" nodeType="withEffect">
-                            <p:stCondLst>
-                              <p:cond delay="0"/>
-                            </p:stCondLst>
-                            <p:childTnLst>
-                              <p:animEffect transition="in" filter="fade">
-                                <p:cBhvr>
-                                  <p:cTn id="21" dur="450"/>
-                                  <p:tgtEl>
-                                    <p:spTgt spid="7"/>
-                                  </p:tgtEl>
-                                </p:cBhvr>
-                              </p:animEffect>
-                              <p:set>
-                                <p:cBhvr>
-                                  <p:cTn id="22" dur="1" fill="hold">
-                                    <p:stCondLst>
-                                      <p:cond delay="0"/>
-                                    </p:stCondLst>
-                                  </p:cTn>
-                                  <p:tgtEl>
-                                    <p:spTgt spid="7"/>
-                                  </p:tgtEl>
-                                  <p:attrNameLst>
-                                    <p:attrName>style.visibility</p:attrName>
-                                  </p:attrNameLst>
-                                </p:cBhvr>
-                                <p:to>
-                                  <p:strVal val="visible"/>
-                                </p:to>
-                              </p:set>
-                            </p:childTnLst>
-                          </p:cTn>
-                        </p:par>
-                      </p:childTnLst>
-                    </p:cTn>
-                  </p:par>
-                  <p:par>
-                    <p:cTn id="23" fill="hold" nodeType="clickEffect">
-                      <p:stCondLst>
-                        <p:cond delay="0"/>
-                      </p:stCondLst>
-                      <p:childTnLst>
-                        <p:par>
-                          <p:cTn id="24" fill="hold" nodeType="withEffect">
-                            <p:stCondLst>
-                              <p:cond delay="0"/>
-                            </p:stCondLst>
-                            <p:childTnLst>
-                              <p:animEffect transition="in" filter="fade">
-                                <p:cBhvr>
-                                  <p:cTn id="25" dur="450"/>
-                                  <p:tgtEl>
-                                    <p:spTgt spid="8"/>
-                                  </p:tgtEl>
-                                </p:cBhvr>
-                              </p:animEffect>
-                              <p:set>
-                                <p:cBhvr>
-                                  <p:cTn id="26" dur="1" fill="hold">
-                                    <p:stCondLst>
-                                      <p:cond delay="0"/>
-                                    </p:stCondLst>
-                                  </p:cTn>
-                                  <p:tgtEl>
-                                    <p:spTgt spid="8"/>
-                                  </p:tgtEl>
-                                  <p:attrNameLst>
-                                    <p:attrName>style.visibility</p:attrName>
-                                  </p:attrNameLst>
-                                </p:cBhvr>
-                                <p:to>
-                                  <p:strVal val="visible"/>
-                                </p:to>
-                              </p:set>
-                            </p:childTnLst>
-                          </p:cTn>
-                        </p:par>
-                        <p:par>
-                          <p:cTn id="27" fill="hold" nodeType="withEffect">
-                            <p:stCondLst>
-                              <p:cond delay="0"/>
-                            </p:stCondLst>
-                            <p:childTnLst>
-                              <p:animEffect transition="in" filter="fade">
-                                <p:cBhvr>
-                                  <p:cTn id="28" dur="450"/>
-                                  <p:tgtEl>
-                                    <p:spTgt spid="9"/>
-                                  </p:tgtEl>
-                                </p:cBhvr>
-                              </p:animEffect>
-                              <p:set>
-                                <p:cBhvr>
-                                  <p:cTn id="29" dur="1" fill="hold">
-                                    <p:stCondLst>
-                                      <p:cond delay="0"/>
-                                    </p:stCondLst>
-                                  </p:cTn>
-                                  <p:tgtEl>
-                                    <p:spTgt spid="9"/>
-                                  </p:tgtEl>
-                                  <p:attrNameLst>
-                                    <p:attrName>style.visibility</p:attrName>
-                                  </p:attrNameLst>
-                                </p:cBhvr>
-                                <p:to>
-                                  <p:strVal val="visible"/>
-                                </p:to>
-                              </p:set>
-                            </p:childTnLst>
-                          </p:cTn>
-                        </p:par>
-                        <p:par>
-                          <p:cTn id="30" fill="hold" nodeType="withEffect">
-                            <p:stCondLst>
-                              <p:cond delay="0"/>
-                            </p:stCondLst>
-                            <p:childTnLst>
-                              <p:animEffect transition="in" filter="fade">
-                                <p:cBhvr>
-                                  <p:cTn id="31" dur="450"/>
-                                  <p:tgtEl>
-                                    <p:spTgt spid="10"/>
-                                  </p:tgtEl>
-                                </p:cBhvr>
-                              </p:animEffect>
-                              <p:set>
-                                <p:cBhvr>
-                                  <p:cTn id="32" dur="1" fill="hold">
-                                    <p:stCondLst>
-                                      <p:cond delay="0"/>
-                                    </p:stCondLst>
-                                  </p:cTn>
-                                  <p:tgtEl>
-                                    <p:spTgt spid="10"/>
-                                  </p:tgtEl>
-                                  <p:attrNameLst>
-                                    <p:attrName>style.visibility</p:attrName>
-                                  </p:attrNameLst>
-                                </p:cBhvr>
-                                <p:to>
-                                  <p:strVal val="visible"/>
-                                </p:to>
-                              </p:set>
-                            </p:childTnLst>
-                          </p:cTn>
-                        </p:par>
-                        <p:par>
-                          <p:cTn id="33" fill="hold" nodeType="withEffect">
-                            <p:stCondLst>
-                              <p:cond delay="0"/>
-                            </p:stCondLst>
-                            <p:childTnLst>
-                              <p:animEffect transition="in" filter="fade">
-                                <p:cBhvr>
-                                  <p:cTn id="34" dur="450"/>
-                                  <p:tgtEl>
-                                    <p:spTgt spid="11"/>
-                                  </p:tgtEl>
-                                </p:cBhvr>
-                              </p:animEffect>
-                              <p:set>
-                                <p:cBhvr>
-                                  <p:cTn id="35" dur="1" fill="hold">
-                                    <p:stCondLst>
-                                      <p:cond delay="0"/>
-                                    </p:stCondLst>
-                                  </p:cTn>
-                                  <p:tgtEl>
-                                    <p:spTgt spid="11"/>
-                                  </p:tgtEl>
-                                  <p:attrNameLst>
-                                    <p:attrName>style.visibility</p:attrName>
-                                  </p:attrNameLst>
-                                </p:cBhvr>
-                                <p:to>
-                                  <p:strVal val="visible"/>
-                                </p:to>
-                              </p:set>
-                            </p:childTnLst>
-                          </p:cTn>
-                        </p:par>
-                      </p:childTnLst>
-                    </p:cTn>
-                  </p:par>
-                  <p:par>
-                    <p:cTn id="36" fill="hold" nodeType="clickEffect">
-                      <p:stCondLst>
-                        <p:cond delay="0"/>
-                      </p:stCondLst>
-                      <p:childTnLst>
-                        <p:par>
-                          <p:cTn id="37" fill="hold" nodeType="withEffect">
-                            <p:stCondLst>
-                              <p:cond delay="0"/>
-                            </p:stCondLst>
-                            <p:childTnLst>
-                              <p:animEffect transition="in" filter="fade">
-                                <p:cBhvr>
-                                  <p:cTn id="38" dur="450"/>
-                                  <p:tgtEl>
-                                    <p:spTgt spid="12"/>
-                                  </p:tgtEl>
-                                </p:cBhvr>
-                              </p:animEffect>
-                              <p:set>
-                                <p:cBhvr>
-                                  <p:cTn id="39" dur="1" fill="hold">
-                                    <p:stCondLst>
-                                      <p:cond delay="0"/>
-                                    </p:stCondLst>
-                                  </p:cTn>
-                                  <p:tgtEl>
-                                    <p:spTgt spid="12"/>
-                                  </p:tgtEl>
-                                  <p:attrNameLst>
-                                    <p:attrName>style.visibility</p:attrName>
-                                  </p:attrNameLst>
-                                </p:cBhvr>
-                                <p:to>
-                                  <p:strVal val="visible"/>
-                                </p:to>
-                              </p:set>
-                            </p:childTnLst>
-                          </p:cTn>
-                        </p:par>
-                        <p:par>
-                          <p:cTn id="40" fill="hold" nodeType="withEffect">
-                            <p:stCondLst>
-                              <p:cond delay="0"/>
-                            </p:stCondLst>
-                            <p:childTnLst>
-                              <p:animEffect transition="in" filter="fade">
-                                <p:cBhvr>
-                                  <p:cTn id="41" dur="450"/>
-                                  <p:tgtEl>
-                                    <p:spTgt spid="13"/>
-                                  </p:tgtEl>
-                                </p:cBhvr>
-                              </p:animEffect>
-                              <p:set>
-                                <p:cBhvr>
-                                  <p:cTn id="42" dur="1" fill="hold">
-                                    <p:stCondLst>
-                                      <p:cond delay="0"/>
-                                    </p:stCondLst>
-                                  </p:cTn>
-                                  <p:tgtEl>
-                                    <p:spTgt spid="13"/>
-                                  </p:tgtEl>
-                                  <p:attrNameLst>
-                                    <p:attrName>style.visibility</p:attrName>
-                                  </p:attrNameLst>
-                                </p:cBhvr>
-                                <p:to>
-                                  <p:strVal val="visible"/>
-                                </p:to>
-                              </p:set>
-                            </p:childTnLst>
-                          </p:cTn>
-                        </p:par>
-                        <p:par>
-                          <p:cTn id="43" fill="hold" nodeType="withEffect">
-                            <p:stCondLst>
-                              <p:cond delay="0"/>
-                            </p:stCondLst>
-                            <p:childTnLst>
-                              <p:animEffect transition="in" filter="fade">
-                                <p:cBhvr>
-                                  <p:cTn id="44" dur="450"/>
-                                  <p:tgtEl>
-                                    <p:spTgt spid="14"/>
-                                  </p:tgtEl>
-                                </p:cBhvr>
-                              </p:animEffect>
-                              <p:set>
-                                <p:cBhvr>
-                                  <p:cTn id="45" dur="1" fill="hold">
-                                    <p:stCondLst>
-                                      <p:cond delay="0"/>
-                                    </p:stCondLst>
-                                  </p:cTn>
-                                  <p:tgtEl>
-                                    <p:spTgt spid="14"/>
-                                  </p:tgtEl>
-                                  <p:attrNameLst>
-                                    <p:attrName>style.visibility</p:attrName>
-                                  </p:attrNameLst>
-                                </p:cBhvr>
-                                <p:to>
-                                  <p:strVal val="visible"/>
-                                </p:to>
-                              </p:set>
-                            </p:childTnLst>
-                          </p:cTn>
-                        </p:par>
-                        <p:par>
-                          <p:cTn id="46" fill="hold" nodeType="withEffect">
-                            <p:stCondLst>
-                              <p:cond delay="0"/>
-                            </p:stCondLst>
-                            <p:childTnLst>
-                              <p:animEffect transition="in" filter="fade">
-                                <p:cBhvr>
-                                  <p:cTn id="47" dur="450"/>
-                                  <p:tgtEl>
-                                    <p:spTgt spid="15"/>
-                                  </p:tgtEl>
-                                </p:cBhvr>
-                              </p:animEffect>
-                              <p:set>
-                                <p:cBhvr>
-                                  <p:cTn id="48" dur="1" fill="hold">
-                                    <p:stCondLst>
-                                      <p:cond delay="0"/>
-                                    </p:stCondLst>
-                                  </p:cTn>
-                                  <p:tgtEl>
-                                    <p:spTgt spid="15"/>
-                                  </p:tgtEl>
-                                  <p:attrNameLst>
-                                    <p:attrName>style.visibility</p:attrName>
-                                  </p:attrNameLst>
-                                </p:cBhvr>
-                                <p:to>
-                                  <p:strVal val="visible"/>
-                                </p:to>
-                              </p:set>
-                            </p:childTnLst>
-                          </p:cTn>
-                        </p:par>
-                      </p:childTnLst>
-                    </p:cTn>
-                  </p:par>
-                  <p:par>
-                    <p:cTn id="49" fill="hold" nodeType="clickEffect">
-                      <p:stCondLst>
-                        <p:cond delay="0"/>
-                      </p:stCondLst>
-                      <p:childTnLst>
-                        <p:par>
-                          <p:cTn id="50" fill="hold" nodeType="withEffect">
-                            <p:stCondLst>
-                              <p:cond delay="0"/>
-                            </p:stCondLst>
-                            <p:childTnLst>
-                              <p:animEffect transition="in" filter="fade">
-                                <p:cBhvr>
-                                  <p:cTn id="51" dur="450"/>
-                                  <p:tgtEl>
-                                    <p:spTgt spid="16"/>
-                                  </p:tgtEl>
-                                </p:cBhvr>
-                              </p:animEffect>
-                              <p:set>
-                                <p:cBhvr>
-                                  <p:cTn id="52" dur="1" fill="hold">
-                                    <p:stCondLst>
-                                      <p:cond delay="0"/>
-                                    </p:stCondLst>
-                                  </p:cTn>
-                                  <p:tgtEl>
-                                    <p:spTgt spid="16"/>
-                                  </p:tgtEl>
-                                  <p:attrNameLst>
-                                    <p:attrName>style.visibility</p:attrName>
-                                  </p:attrNameLst>
-                                </p:cBhvr>
-                                <p:to>
-                                  <p:strVal val="visible"/>
-                                </p:to>
-                              </p:set>
-                            </p:childTnLst>
-                          </p:cTn>
-                        </p:par>
-                        <p:par>
-                          <p:cTn id="53" fill="hold" nodeType="withEffect">
-                            <p:stCondLst>
-                              <p:cond delay="0"/>
-                            </p:stCondLst>
-                            <p:childTnLst>
-                              <p:animEffect transition="in" filter="fade">
-                                <p:cBhvr>
-                                  <p:cTn id="54" dur="450"/>
-                                  <p:tgtEl>
-                                    <p:spTgt spid="17"/>
-                                  </p:tgtEl>
-                                </p:cBhvr>
-                              </p:animEffect>
-                              <p:set>
-                                <p:cBhvr>
-                                  <p:cTn id="55" dur="1" fill="hold">
-                                    <p:stCondLst>
-                                      <p:cond delay="0"/>
-                                    </p:stCondLst>
-                                  </p:cTn>
-                                  <p:tgtEl>
-                                    <p:spTgt spid="17"/>
-                                  </p:tgtEl>
-                                  <p:attrNameLst>
-                                    <p:attrName>style.visibility</p:attrName>
-                                  </p:attrNameLst>
-                                </p:cBhvr>
-                                <p:to>
-                                  <p:strVal val="visible"/>
-                                </p:to>
-                              </p:set>
-                            </p:childTnLst>
-                          </p:cTn>
-                        </p:par>
-                        <p:par>
-                          <p:cTn id="56" fill="hold" nodeType="withEffect">
-                            <p:stCondLst>
-                              <p:cond delay="0"/>
-                            </p:stCondLst>
-                            <p:childTnLst>
-                              <p:animEffect transition="in" filter="fade">
-                                <p:cBhvr>
-                                  <p:cTn id="57" dur="450"/>
-                                  <p:tgtEl>
-                                    <p:spTgt spid="18"/>
-                                  </p:tgtEl>
-                                </p:cBhvr>
-                              </p:animEffect>
-                              <p:set>
-                                <p:cBhvr>
-                                  <p:cTn id="58" dur="1" fill="hold">
-                                    <p:stCondLst>
-                                      <p:cond delay="0"/>
-                                    </p:stCondLst>
-                                  </p:cTn>
-                                  <p:tgtEl>
-                                    <p:spTgt spid="18"/>
-                                  </p:tgtEl>
-                                  <p:attrNameLst>
-                                    <p:attrName>style.visibility</p:attrName>
-                                  </p:attrNameLst>
-                                </p:cBhvr>
-                                <p:to>
-                                  <p:strVal val="visible"/>
-                                </p:to>
-                              </p:set>
-                            </p:childTnLst>
-                          </p:cTn>
-                        </p:par>
-                        <p:par>
-                          <p:cTn id="59" fill="hold" nodeType="withEffect">
-                            <p:stCondLst>
-                              <p:cond delay="0"/>
-                            </p:stCondLst>
-                            <p:childTnLst>
-                              <p:animEffect transition="in" filter="fade">
-                                <p:cBhvr>
-                                  <p:cTn id="60" dur="450"/>
-                                  <p:tgtEl>
-                                    <p:spTgt spid="19"/>
-                                  </p:tgtEl>
-                                </p:cBhvr>
-                              </p:animEffect>
-                              <p:set>
-                                <p:cBhvr>
-                                  <p:cTn id="61" dur="1" fill="hold">
-                                    <p:stCondLst>
-                                      <p:cond delay="0"/>
-                                    </p:stCondLst>
-                                  </p:cTn>
-                                  <p:tgtEl>
-                                    <p:spTgt spid="19"/>
-                                  </p:tgtEl>
-                                  <p:attrNameLst>
-                                    <p:attrName>style.visibility</p:attrName>
-                                  </p:attrNameLst>
-                                </p:cBhvr>
-                                <p:to>
-                                  <p:strVal val="visible"/>
-                                </p:to>
-                              </p:set>
-                            </p:childTnLst>
-                          </p:cTn>
-                        </p:par>
-                      </p:childTnLst>
-                    </p:cTn>
-                  </p:par>
-                  <p:par>
-                    <p:cTn id="62" fill="hold" nodeType="clickEffect">
-                      <p:stCondLst>
-                        <p:cond delay="0"/>
-                      </p:stCondLst>
-                      <p:childTnLst>
-                        <p:par>
-                          <p:cTn id="63" fill="hold" nodeType="withEffect">
-                            <p:stCondLst>
-                              <p:cond delay="0"/>
-                            </p:stCondLst>
-                            <p:childTnLst>
-                              <p:animEffect transition="in" filter="fade">
-                                <p:cBhvr>
-                                  <p:cTn id="64" dur="450"/>
-                                  <p:tgtEl>
-                                    <p:spTgt spid="20"/>
-                                  </p:tgtEl>
-                                </p:cBhvr>
-                              </p:animEffect>
-                              <p:set>
-                                <p:cBhvr>
-                                  <p:cTn id="65" dur="1" fill="hold">
-                                    <p:stCondLst>
-                                      <p:cond delay="0"/>
-                                    </p:stCondLst>
-                                  </p:cTn>
-                                  <p:tgtEl>
-                                    <p:spTgt spid="20"/>
-                                  </p:tgtEl>
-                                  <p:attrNameLst>
-                                    <p:attrName>style.visibility</p:attrName>
-                                  </p:attrNameLst>
-                                </p:cBhvr>
-                                <p:to>
-                                  <p:strVal val="visible"/>
-                                </p:to>
-                              </p:set>
-                            </p:childTnLst>
-                          </p:cTn>
-                        </p:par>
-                        <p:par>
-                          <p:cTn id="66" fill="hold" nodeType="withEffect">
-                            <p:stCondLst>
-                              <p:cond delay="0"/>
-                            </p:stCondLst>
-                            <p:childTnLst>
-                              <p:animEffect transition="in" filter="fade">
-                                <p:cBhvr>
-                                  <p:cTn id="67" dur="450"/>
-                                  <p:tgtEl>
-                                    <p:spTgt spid="21"/>
-                                  </p:tgtEl>
-                                </p:cBhvr>
-                              </p:animEffect>
-                              <p:set>
-                                <p:cBhvr>
-                                  <p:cTn id="68" dur="1" fill="hold">
-                                    <p:stCondLst>
-                                      <p:cond delay="0"/>
-                                    </p:stCondLst>
-                                  </p:cTn>
-                                  <p:tgtEl>
-                                    <p:spTgt spid="21"/>
-                                  </p:tgtEl>
-                                  <p:attrNameLst>
-                                    <p:attrName>style.visibility</p:attrName>
-                                  </p:attrNameLst>
-                                </p:cBhvr>
-                                <p:to>
-                                  <p:strVal val="visible"/>
-                                </p:to>
-                              </p:set>
-                            </p:childTnLst>
-                          </p:cTn>
-                        </p:par>
-                        <p:par>
-                          <p:cTn id="69" fill="hold" nodeType="withEffect">
-                            <p:stCondLst>
-                              <p:cond delay="0"/>
-                            </p:stCondLst>
-                            <p:childTnLst>
-                              <p:animEffect transition="in" filter="fade">
-                                <p:cBhvr>
-                                  <p:cTn id="70" dur="450"/>
-                                  <p:tgtEl>
-                                    <p:spTgt spid="22"/>
-                                  </p:tgtEl>
-                                </p:cBhvr>
-                              </p:animEffect>
-                              <p:set>
-                                <p:cBhvr>
-                                  <p:cTn id="71" dur="1" fill="hold">
-                                    <p:stCondLst>
-                                      <p:cond delay="0"/>
-                                    </p:stCondLst>
-                                  </p:cTn>
-                                  <p:tgtEl>
-                                    <p:spTgt spid="22"/>
-                                  </p:tgtEl>
-                                  <p:attrNameLst>
-                                    <p:attrName>style.visibility</p:attrName>
-                                  </p:attrNameLst>
-                                </p:cBhvr>
-                                <p:to>
-                                  <p:strVal val="visible"/>
-                                </p:to>
-                              </p:set>
-                            </p:childTnLst>
-                          </p:cTn>
-                        </p:par>
-                        <p:par>
-                          <p:cTn id="72" fill="hold" nodeType="withEffect">
-                            <p:stCondLst>
-                              <p:cond delay="0"/>
-                            </p:stCondLst>
-                            <p:childTnLst>
-                              <p:animEffect transition="in" filter="fade">
-                                <p:cBhvr>
-                                  <p:cTn id="73" dur="450"/>
-                                  <p:tgtEl>
-                                    <p:spTgt spid="23"/>
-                                  </p:tgtEl>
-                                </p:cBhvr>
-                              </p:animEffect>
-                              <p:set>
-                                <p:cBhvr>
-                                  <p:cTn id="74" dur="1" fill="hold">
-                                    <p:stCondLst>
-                                      <p:cond delay="0"/>
-                                    </p:stCondLst>
-                                  </p:cTn>
-                                  <p:tgtEl>
-                                    <p:spTgt spid="23"/>
-                                  </p:tgtEl>
-                                  <p:attrNameLst>
-                                    <p:attrName>style.visibility</p:attrName>
-                                  </p:attrNameLst>
-                                </p:cBhvr>
-                                <p:to>
-                                  <p:strVal val="visible"/>
-                                </p:to>
-                              </p:set>
-                            </p:childTnLst>
-                          </p:cTn>
-                        </p:par>
-                      </p:childTnLst>
-                    </p:cTn>
-                  </p:par>
-                  <p:par>
-                    <p:cTn id="75" fill="hold" nodeType="clickEffect">
-                      <p:stCondLst>
-                        <p:cond delay="0"/>
-                      </p:stCondLst>
-                      <p:childTnLst>
-                        <p:par>
-                          <p:cTn id="76" fill="hold" nodeType="withEffect">
-                            <p:stCondLst>
-                              <p:cond delay="0"/>
-                            </p:stCondLst>
-                            <p:childTnLst>
-                              <p:animEffect transition="in" filter="fade">
-                                <p:cBhvr>
-                                  <p:cTn id="77" dur="450"/>
-                                  <p:tgtEl>
-                                    <p:spTgt spid="24"/>
-                                  </p:tgtEl>
-                                </p:cBhvr>
-                              </p:animEffect>
-                              <p:set>
-                                <p:cBhvr>
-                                  <p:cTn id="78" dur="1" fill="hold">
-                                    <p:stCondLst>
-                                      <p:cond delay="0"/>
-                                    </p:stCondLst>
-                                  </p:cTn>
-                                  <p:tgtEl>
-                                    <p:spTgt spid="24"/>
-                                  </p:tgtEl>
-                                  <p:attrNameLst>
-                                    <p:attrName>style.visibility</p:attrName>
-                                  </p:attrNameLst>
-                                </p:cBhvr>
-                                <p:to>
-                                  <p:strVal val="visible"/>
-                                </p:to>
-                              </p:set>
-                            </p:childTnLst>
-                          </p:cTn>
-                        </p:par>
-                        <p:par>
-                          <p:cTn id="79" fill="hold" nodeType="withEffect">
-                            <p:stCondLst>
-                              <p:cond delay="0"/>
-                            </p:stCondLst>
-                            <p:childTnLst>
-                              <p:animEffect transition="in" filter="fade">
-                                <p:cBhvr>
-                                  <p:cTn id="80" dur="450"/>
-                                  <p:tgtEl>
-                                    <p:spTgt spid="25"/>
-                                  </p:tgtEl>
-                                </p:cBhvr>
-                              </p:animEffect>
-                              <p:set>
-                                <p:cBhvr>
-                                  <p:cTn id="81" dur="1" fill="hold">
-                                    <p:stCondLst>
-                                      <p:cond delay="0"/>
-                                    </p:stCondLst>
-                                  </p:cTn>
-                                  <p:tgtEl>
-                                    <p:spTgt spid="25"/>
-                                  </p:tgtEl>
-                                  <p:attrNameLst>
-                                    <p:attrName>style.visibility</p:attrName>
-                                  </p:attrNameLst>
-                                </p:cBhvr>
-                                <p:to>
-                                  <p:strVal val="visible"/>
-                                </p:to>
-                              </p:set>
-                            </p:childTnLst>
-                          </p:cTn>
-                        </p:par>
-                        <p:par>
-                          <p:cTn id="82" fill="hold" nodeType="withEffect">
-                            <p:stCondLst>
-                              <p:cond delay="0"/>
-                            </p:stCondLst>
-                            <p:childTnLst>
-                              <p:animEffect transition="in" filter="fade">
-                                <p:cBhvr>
-                                  <p:cTn id="83" dur="450"/>
-                                  <p:tgtEl>
-                                    <p:spTgt spid="26"/>
-                                  </p:tgtEl>
-                                </p:cBhvr>
-                              </p:animEffect>
-                              <p:set>
-                                <p:cBhvr>
-                                  <p:cTn id="84" dur="1" fill="hold">
-                                    <p:stCondLst>
-                                      <p:cond delay="0"/>
-                                    </p:stCondLst>
-                                  </p:cTn>
-                                  <p:tgtEl>
-                                    <p:spTgt spid="26"/>
-                                  </p:tgtEl>
-                                  <p:attrNameLst>
-                                    <p:attrName>style.visibility</p:attrName>
-                                  </p:attrNameLst>
-                                </p:cBhvr>
-                                <p:to>
-                                  <p:strVal val="visible"/>
-                                </p:to>
-                              </p:set>
-                            </p:childTnLst>
-                          </p:cTn>
-                        </p:par>
-                        <p:par>
-                          <p:cTn id="85" fill="hold" nodeType="withEffect">
-                            <p:stCondLst>
-                              <p:cond delay="0"/>
-                            </p:stCondLst>
-                            <p:childTnLst>
-                              <p:animEffect transition="in" filter="fade">
-                                <p:cBhvr>
-                                  <p:cTn id="86" dur="450"/>
-                                  <p:tgtEl>
-                                    <p:spTgt spid="27"/>
-                                  </p:tgtEl>
-                                </p:cBhvr>
-                              </p:animEffect>
-                              <p:set>
-                                <p:cBhvr>
-                                  <p:cTn id="87" dur="1" fill="hold">
-                                    <p:stCondLst>
-                                      <p:cond delay="0"/>
-                                    </p:stCondLst>
-                                  </p:cTn>
-                                  <p:tgtEl>
-                                    <p:spTgt spid="27"/>
-                                  </p:tgtEl>
-                                  <p:attrNameLst>
-                                    <p:attrName>style.visibility</p:attrName>
-                                  </p:attrNameLst>
-                                </p:cBhvr>
-                                <p:to>
-                                  <p:strVal val="visible"/>
-                                </p:to>
-                              </p:set>
-                            </p:childTnLst>
-                          </p:cTn>
-                        </p:par>
-                      </p:childTnLst>
-                    </p:cTn>
-                  </p:par>
-                </p:childTnLst>
-              </p:cTn>
-              <p:prevCondLst>
-                <p:cond evt="onPrev" delay="0">
-                  <p:tgtEl>
-                    <p:sldTgt/>
-                  </p:tgtEl>
-                </p:cond>
-              </p:prevCondLst>
-              <p:nextCondLst>
-                <p:cond evt="onNext" delay="0">
-                  <p:tgtEl>
-                    <p:sldTgt/>
-                  </p:tgtEl>
-                </p:cond>
-              </p:nextCondLst>
-            </p:seq>
-          </p:childTnLst>
-        </p:cTn>
-      </p:par>
-    </p:tnLst>
-  </p:timing>
 </p:sld>
 </file>
 
@@ -19465,632 +13508,6 @@
   <p:transition spd="med" advClick="1">
     <p:fade/>
   </p:transition>
-  <p:timing>
-    <p:tnLst>
-      <p:par>
-        <p:cTn id="2" dur="indefinite" restart="never" nodeType="tmRoot">
-          <p:childTnLst>
-            <p:seq concurrent="1" nextAc="seek">
-              <p:cTn id="3" dur="indefinite" nodeType="mainSeq">
-                <p:childTnLst>
-                  <p:par>
-                    <p:cTn id="4" fill="hold" nodeType="withEffect">
-                      <p:stCondLst>
-                        <p:cond delay="0"/>
-                      </p:stCondLst>
-                      <p:childTnLst>
-                        <p:par>
-                          <p:cTn id="5" fill="hold" nodeType="withEffect">
-                            <p:stCondLst>
-                              <p:cond delay="0"/>
-                            </p:stCondLst>
-                            <p:childTnLst>
-                              <p:animEffect transition="in" filter="fade">
-                                <p:cBhvr>
-                                  <p:cTn id="6" dur="450"/>
-                                  <p:tgtEl>
-                                    <p:spTgt spid="2"/>
-                                  </p:tgtEl>
-                                </p:cBhvr>
-                              </p:animEffect>
-                              <p:set>
-                                <p:cBhvr>
-                                  <p:cTn id="7" dur="1" fill="hold">
-                                    <p:stCondLst>
-                                      <p:cond delay="0"/>
-                                    </p:stCondLst>
-                                  </p:cTn>
-                                  <p:tgtEl>
-                                    <p:spTgt spid="2"/>
-                                  </p:tgtEl>
-                                  <p:attrNameLst>
-                                    <p:attrName>style.visibility</p:attrName>
-                                  </p:attrNameLst>
-                                </p:cBhvr>
-                                <p:to>
-                                  <p:strVal val="visible"/>
-                                </p:to>
-                              </p:set>
-                            </p:childTnLst>
-                          </p:cTn>
-                        </p:par>
-                        <p:par>
-                          <p:cTn id="8" fill="hold" nodeType="withEffect">
-                            <p:stCondLst>
-                              <p:cond delay="0"/>
-                            </p:stCondLst>
-                            <p:childTnLst>
-                              <p:animEffect transition="in" filter="fade">
-                                <p:cBhvr>
-                                  <p:cTn id="9" dur="450"/>
-                                  <p:tgtEl>
-                                    <p:spTgt spid="3"/>
-                                  </p:tgtEl>
-                                </p:cBhvr>
-                              </p:animEffect>
-                              <p:set>
-                                <p:cBhvr>
-                                  <p:cTn id="10" dur="1" fill="hold">
-                                    <p:stCondLst>
-                                      <p:cond delay="0"/>
-                                    </p:stCondLst>
-                                  </p:cTn>
-                                  <p:tgtEl>
-                                    <p:spTgt spid="3"/>
-                                  </p:tgtEl>
-                                  <p:attrNameLst>
-                                    <p:attrName>style.visibility</p:attrName>
-                                  </p:attrNameLst>
-                                </p:cBhvr>
-                                <p:to>
-                                  <p:strVal val="visible"/>
-                                </p:to>
-                              </p:set>
-                            </p:childTnLst>
-                          </p:cTn>
-                        </p:par>
-                        <p:par>
-                          <p:cTn id="11" fill="hold" nodeType="withEffect">
-                            <p:stCondLst>
-                              <p:cond delay="0"/>
-                            </p:stCondLst>
-                            <p:childTnLst>
-                              <p:animEffect transition="in" filter="fade">
-                                <p:cBhvr>
-                                  <p:cTn id="12" dur="450"/>
-                                  <p:tgtEl>
-                                    <p:spTgt spid="4"/>
-                                  </p:tgtEl>
-                                </p:cBhvr>
-                              </p:animEffect>
-                              <p:set>
-                                <p:cBhvr>
-                                  <p:cTn id="13" dur="1" fill="hold">
-                                    <p:stCondLst>
-                                      <p:cond delay="0"/>
-                                    </p:stCondLst>
-                                  </p:cTn>
-                                  <p:tgtEl>
-                                    <p:spTgt spid="4"/>
-                                  </p:tgtEl>
-                                  <p:attrNameLst>
-                                    <p:attrName>style.visibility</p:attrName>
-                                  </p:attrNameLst>
-                                </p:cBhvr>
-                                <p:to>
-                                  <p:strVal val="visible"/>
-                                </p:to>
-                              </p:set>
-                            </p:childTnLst>
-                          </p:cTn>
-                        </p:par>
-                        <p:par>
-                          <p:cTn id="14" fill="hold" nodeType="withEffect">
-                            <p:stCondLst>
-                              <p:cond delay="0"/>
-                            </p:stCondLst>
-                            <p:childTnLst>
-                              <p:animEffect transition="in" filter="fade">
-                                <p:cBhvr>
-                                  <p:cTn id="15" dur="450"/>
-                                  <p:tgtEl>
-                                    <p:spTgt spid="5"/>
-                                  </p:tgtEl>
-                                </p:cBhvr>
-                              </p:animEffect>
-                              <p:set>
-                                <p:cBhvr>
-                                  <p:cTn id="16" dur="1" fill="hold">
-                                    <p:stCondLst>
-                                      <p:cond delay="0"/>
-                                    </p:stCondLst>
-                                  </p:cTn>
-                                  <p:tgtEl>
-                                    <p:spTgt spid="5"/>
-                                  </p:tgtEl>
-                                  <p:attrNameLst>
-                                    <p:attrName>style.visibility</p:attrName>
-                                  </p:attrNameLst>
-                                </p:cBhvr>
-                                <p:to>
-                                  <p:strVal val="visible"/>
-                                </p:to>
-                              </p:set>
-                            </p:childTnLst>
-                          </p:cTn>
-                        </p:par>
-                        <p:par>
-                          <p:cTn id="17" fill="hold" nodeType="withEffect">
-                            <p:stCondLst>
-                              <p:cond delay="0"/>
-                            </p:stCondLst>
-                            <p:childTnLst>
-                              <p:animEffect transition="in" filter="fade">
-                                <p:cBhvr>
-                                  <p:cTn id="18" dur="450"/>
-                                  <p:tgtEl>
-                                    <p:spTgt spid="6"/>
-                                  </p:tgtEl>
-                                </p:cBhvr>
-                              </p:animEffect>
-                              <p:set>
-                                <p:cBhvr>
-                                  <p:cTn id="19" dur="1" fill="hold">
-                                    <p:stCondLst>
-                                      <p:cond delay="0"/>
-                                    </p:stCondLst>
-                                  </p:cTn>
-                                  <p:tgtEl>
-                                    <p:spTgt spid="6"/>
-                                  </p:tgtEl>
-                                  <p:attrNameLst>
-                                    <p:attrName>style.visibility</p:attrName>
-                                  </p:attrNameLst>
-                                </p:cBhvr>
-                                <p:to>
-                                  <p:strVal val="visible"/>
-                                </p:to>
-                              </p:set>
-                            </p:childTnLst>
-                          </p:cTn>
-                        </p:par>
-                      </p:childTnLst>
-                    </p:cTn>
-                  </p:par>
-                  <p:par>
-                    <p:cTn id="20" fill="hold" nodeType="clickEffect">
-                      <p:stCondLst>
-                        <p:cond delay="0"/>
-                      </p:stCondLst>
-                      <p:childTnLst>
-                        <p:par>
-                          <p:cTn id="21" fill="hold" nodeType="withEffect">
-                            <p:stCondLst>
-                              <p:cond delay="0"/>
-                            </p:stCondLst>
-                            <p:childTnLst>
-                              <p:animEffect transition="in" filter="fade">
-                                <p:cBhvr>
-                                  <p:cTn id="22" dur="450"/>
-                                  <p:tgtEl>
-                                    <p:spTgt spid="7"/>
-                                  </p:tgtEl>
-                                </p:cBhvr>
-                              </p:animEffect>
-                              <p:set>
-                                <p:cBhvr>
-                                  <p:cTn id="23" dur="1" fill="hold">
-                                    <p:stCondLst>
-                                      <p:cond delay="0"/>
-                                    </p:stCondLst>
-                                  </p:cTn>
-                                  <p:tgtEl>
-                                    <p:spTgt spid="7"/>
-                                  </p:tgtEl>
-                                  <p:attrNameLst>
-                                    <p:attrName>style.visibility</p:attrName>
-                                  </p:attrNameLst>
-                                </p:cBhvr>
-                                <p:to>
-                                  <p:strVal val="visible"/>
-                                </p:to>
-                              </p:set>
-                            </p:childTnLst>
-                          </p:cTn>
-                        </p:par>
-                        <p:par>
-                          <p:cTn id="24" fill="hold" nodeType="withEffect">
-                            <p:stCondLst>
-                              <p:cond delay="0"/>
-                            </p:stCondLst>
-                            <p:childTnLst>
-                              <p:animEffect transition="in" filter="fade">
-                                <p:cBhvr>
-                                  <p:cTn id="25" dur="450"/>
-                                  <p:tgtEl>
-                                    <p:spTgt spid="8"/>
-                                  </p:tgtEl>
-                                </p:cBhvr>
-                              </p:animEffect>
-                              <p:set>
-                                <p:cBhvr>
-                                  <p:cTn id="26" dur="1" fill="hold">
-                                    <p:stCondLst>
-                                      <p:cond delay="0"/>
-                                    </p:stCondLst>
-                                  </p:cTn>
-                                  <p:tgtEl>
-                                    <p:spTgt spid="8"/>
-                                  </p:tgtEl>
-                                  <p:attrNameLst>
-                                    <p:attrName>style.visibility</p:attrName>
-                                  </p:attrNameLst>
-                                </p:cBhvr>
-                                <p:to>
-                                  <p:strVal val="visible"/>
-                                </p:to>
-                              </p:set>
-                            </p:childTnLst>
-                          </p:cTn>
-                        </p:par>
-                      </p:childTnLst>
-                    </p:cTn>
-                  </p:par>
-                  <p:par>
-                    <p:cTn id="27" fill="hold" nodeType="clickEffect">
-                      <p:stCondLst>
-                        <p:cond delay="0"/>
-                      </p:stCondLst>
-                      <p:childTnLst>
-                        <p:par>
-                          <p:cTn id="28" fill="hold" nodeType="withEffect">
-                            <p:stCondLst>
-                              <p:cond delay="0"/>
-                            </p:stCondLst>
-                            <p:childTnLst>
-                              <p:animEffect transition="in" filter="fade">
-                                <p:cBhvr>
-                                  <p:cTn id="29" dur="450"/>
-                                  <p:tgtEl>
-                                    <p:spTgt spid="9"/>
-                                  </p:tgtEl>
-                                </p:cBhvr>
-                              </p:animEffect>
-                              <p:set>
-                                <p:cBhvr>
-                                  <p:cTn id="30" dur="1" fill="hold">
-                                    <p:stCondLst>
-                                      <p:cond delay="0"/>
-                                    </p:stCondLst>
-                                  </p:cTn>
-                                  <p:tgtEl>
-                                    <p:spTgt spid="9"/>
-                                  </p:tgtEl>
-                                  <p:attrNameLst>
-                                    <p:attrName>style.visibility</p:attrName>
-                                  </p:attrNameLst>
-                                </p:cBhvr>
-                                <p:to>
-                                  <p:strVal val="visible"/>
-                                </p:to>
-                              </p:set>
-                            </p:childTnLst>
-                          </p:cTn>
-                        </p:par>
-                        <p:par>
-                          <p:cTn id="31" fill="hold" nodeType="withEffect">
-                            <p:stCondLst>
-                              <p:cond delay="0"/>
-                            </p:stCondLst>
-                            <p:childTnLst>
-                              <p:animEffect transition="in" filter="fade">
-                                <p:cBhvr>
-                                  <p:cTn id="32" dur="450"/>
-                                  <p:tgtEl>
-                                    <p:spTgt spid="10"/>
-                                  </p:tgtEl>
-                                </p:cBhvr>
-                              </p:animEffect>
-                              <p:set>
-                                <p:cBhvr>
-                                  <p:cTn id="33" dur="1" fill="hold">
-                                    <p:stCondLst>
-                                      <p:cond delay="0"/>
-                                    </p:stCondLst>
-                                  </p:cTn>
-                                  <p:tgtEl>
-                                    <p:spTgt spid="10"/>
-                                  </p:tgtEl>
-                                  <p:attrNameLst>
-                                    <p:attrName>style.visibility</p:attrName>
-                                  </p:attrNameLst>
-                                </p:cBhvr>
-                                <p:to>
-                                  <p:strVal val="visible"/>
-                                </p:to>
-                              </p:set>
-                            </p:childTnLst>
-                          </p:cTn>
-                        </p:par>
-                        <p:par>
-                          <p:cTn id="34" fill="hold" nodeType="withEffect">
-                            <p:stCondLst>
-                              <p:cond delay="0"/>
-                            </p:stCondLst>
-                            <p:childTnLst>
-                              <p:animEffect transition="in" filter="fade">
-                                <p:cBhvr>
-                                  <p:cTn id="35" dur="450"/>
-                                  <p:tgtEl>
-                                    <p:spTgt spid="11"/>
-                                  </p:tgtEl>
-                                </p:cBhvr>
-                              </p:animEffect>
-                              <p:set>
-                                <p:cBhvr>
-                                  <p:cTn id="36" dur="1" fill="hold">
-                                    <p:stCondLst>
-                                      <p:cond delay="0"/>
-                                    </p:stCondLst>
-                                  </p:cTn>
-                                  <p:tgtEl>
-                                    <p:spTgt spid="11"/>
-                                  </p:tgtEl>
-                                  <p:attrNameLst>
-                                    <p:attrName>style.visibility</p:attrName>
-                                  </p:attrNameLst>
-                                </p:cBhvr>
-                                <p:to>
-                                  <p:strVal val="visible"/>
-                                </p:to>
-                              </p:set>
-                            </p:childTnLst>
-                          </p:cTn>
-                        </p:par>
-                        <p:par>
-                          <p:cTn id="37" fill="hold" nodeType="withEffect">
-                            <p:stCondLst>
-                              <p:cond delay="0"/>
-                            </p:stCondLst>
-                            <p:childTnLst>
-                              <p:animEffect transition="in" filter="fade">
-                                <p:cBhvr>
-                                  <p:cTn id="38" dur="450"/>
-                                  <p:tgtEl>
-                                    <p:spTgt spid="12"/>
-                                  </p:tgtEl>
-                                </p:cBhvr>
-                              </p:animEffect>
-                              <p:set>
-                                <p:cBhvr>
-                                  <p:cTn id="39" dur="1" fill="hold">
-                                    <p:stCondLst>
-                                      <p:cond delay="0"/>
-                                    </p:stCondLst>
-                                  </p:cTn>
-                                  <p:tgtEl>
-                                    <p:spTgt spid="12"/>
-                                  </p:tgtEl>
-                                  <p:attrNameLst>
-                                    <p:attrName>style.visibility</p:attrName>
-                                  </p:attrNameLst>
-                                </p:cBhvr>
-                                <p:to>
-                                  <p:strVal val="visible"/>
-                                </p:to>
-                              </p:set>
-                            </p:childTnLst>
-                          </p:cTn>
-                        </p:par>
-                        <p:par>
-                          <p:cTn id="40" fill="hold" nodeType="withEffect">
-                            <p:stCondLst>
-                              <p:cond delay="0"/>
-                            </p:stCondLst>
-                            <p:childTnLst>
-                              <p:animEffect transition="in" filter="fade">
-                                <p:cBhvr>
-                                  <p:cTn id="41" dur="450"/>
-                                  <p:tgtEl>
-                                    <p:spTgt spid="13"/>
-                                  </p:tgtEl>
-                                </p:cBhvr>
-                              </p:animEffect>
-                              <p:set>
-                                <p:cBhvr>
-                                  <p:cTn id="42" dur="1" fill="hold">
-                                    <p:stCondLst>
-                                      <p:cond delay="0"/>
-                                    </p:stCondLst>
-                                  </p:cTn>
-                                  <p:tgtEl>
-                                    <p:spTgt spid="13"/>
-                                  </p:tgtEl>
-                                  <p:attrNameLst>
-                                    <p:attrName>style.visibility</p:attrName>
-                                  </p:attrNameLst>
-                                </p:cBhvr>
-                                <p:to>
-                                  <p:strVal val="visible"/>
-                                </p:to>
-                              </p:set>
-                            </p:childTnLst>
-                          </p:cTn>
-                        </p:par>
-                        <p:par>
-                          <p:cTn id="43" fill="hold" nodeType="withEffect">
-                            <p:stCondLst>
-                              <p:cond delay="0"/>
-                            </p:stCondLst>
-                            <p:childTnLst>
-                              <p:animEffect transition="in" filter="fade">
-                                <p:cBhvr>
-                                  <p:cTn id="44" dur="450"/>
-                                  <p:tgtEl>
-                                    <p:spTgt spid="14"/>
-                                  </p:tgtEl>
-                                </p:cBhvr>
-                              </p:animEffect>
-                              <p:set>
-                                <p:cBhvr>
-                                  <p:cTn id="45" dur="1" fill="hold">
-                                    <p:stCondLst>
-                                      <p:cond delay="0"/>
-                                    </p:stCondLst>
-                                  </p:cTn>
-                                  <p:tgtEl>
-                                    <p:spTgt spid="14"/>
-                                  </p:tgtEl>
-                                  <p:attrNameLst>
-                                    <p:attrName>style.visibility</p:attrName>
-                                  </p:attrNameLst>
-                                </p:cBhvr>
-                                <p:to>
-                                  <p:strVal val="visible"/>
-                                </p:to>
-                              </p:set>
-                            </p:childTnLst>
-                          </p:cTn>
-                        </p:par>
-                        <p:par>
-                          <p:cTn id="46" fill="hold" nodeType="withEffect">
-                            <p:stCondLst>
-                              <p:cond delay="0"/>
-                            </p:stCondLst>
-                            <p:childTnLst>
-                              <p:animEffect transition="in" filter="fade">
-                                <p:cBhvr>
-                                  <p:cTn id="47" dur="450"/>
-                                  <p:tgtEl>
-                                    <p:spTgt spid="15"/>
-                                  </p:tgtEl>
-                                </p:cBhvr>
-                              </p:animEffect>
-                              <p:set>
-                                <p:cBhvr>
-                                  <p:cTn id="48" dur="1" fill="hold">
-                                    <p:stCondLst>
-                                      <p:cond delay="0"/>
-                                    </p:stCondLst>
-                                  </p:cTn>
-                                  <p:tgtEl>
-                                    <p:spTgt spid="15"/>
-                                  </p:tgtEl>
-                                  <p:attrNameLst>
-                                    <p:attrName>style.visibility</p:attrName>
-                                  </p:attrNameLst>
-                                </p:cBhvr>
-                                <p:to>
-                                  <p:strVal val="visible"/>
-                                </p:to>
-                              </p:set>
-                            </p:childTnLst>
-                          </p:cTn>
-                        </p:par>
-                        <p:par>
-                          <p:cTn id="49" fill="hold" nodeType="withEffect">
-                            <p:stCondLst>
-                              <p:cond delay="0"/>
-                            </p:stCondLst>
-                            <p:childTnLst>
-                              <p:animEffect transition="in" filter="fade">
-                                <p:cBhvr>
-                                  <p:cTn id="50" dur="450"/>
-                                  <p:tgtEl>
-                                    <p:spTgt spid="16"/>
-                                  </p:tgtEl>
-                                </p:cBhvr>
-                              </p:animEffect>
-                              <p:set>
-                                <p:cBhvr>
-                                  <p:cTn id="51" dur="1" fill="hold">
-                                    <p:stCondLst>
-                                      <p:cond delay="0"/>
-                                    </p:stCondLst>
-                                  </p:cTn>
-                                  <p:tgtEl>
-                                    <p:spTgt spid="16"/>
-                                  </p:tgtEl>
-                                  <p:attrNameLst>
-                                    <p:attrName>style.visibility</p:attrName>
-                                  </p:attrNameLst>
-                                </p:cBhvr>
-                                <p:to>
-                                  <p:strVal val="visible"/>
-                                </p:to>
-                              </p:set>
-                            </p:childTnLst>
-                          </p:cTn>
-                        </p:par>
-                      </p:childTnLst>
-                    </p:cTn>
-                  </p:par>
-                  <p:par>
-                    <p:cTn id="52" fill="hold" nodeType="clickEffect">
-                      <p:stCondLst>
-                        <p:cond delay="0"/>
-                      </p:stCondLst>
-                      <p:childTnLst>
-                        <p:par>
-                          <p:cTn id="53" fill="hold" nodeType="withEffect">
-                            <p:stCondLst>
-                              <p:cond delay="0"/>
-                            </p:stCondLst>
-                            <p:childTnLst>
-                              <p:animEffect transition="in" filter="fade">
-                                <p:cBhvr>
-                                  <p:cTn id="54" dur="450"/>
-                                  <p:tgtEl>
-                                    <p:spTgt spid="17"/>
-                                  </p:tgtEl>
-                                </p:cBhvr>
-                              </p:animEffect>
-                              <p:set>
-                                <p:cBhvr>
-                                  <p:cTn id="55" dur="1" fill="hold">
-                                    <p:stCondLst>
-                                      <p:cond delay="0"/>
-                                    </p:stCondLst>
-                                  </p:cTn>
-                                  <p:tgtEl>
-                                    <p:spTgt spid="17"/>
-                                  </p:tgtEl>
-                                  <p:attrNameLst>
-                                    <p:attrName>style.visibility</p:attrName>
-                                  </p:attrNameLst>
-                                </p:cBhvr>
-                                <p:to>
-                                  <p:strVal val="visible"/>
-                                </p:to>
-                              </p:set>
-                            </p:childTnLst>
-                          </p:cTn>
-                        </p:par>
-                      </p:childTnLst>
-                    </p:cTn>
-                  </p:par>
-                </p:childTnLst>
-              </p:cTn>
-              <p:prevCondLst>
-                <p:cond evt="onPrev" delay="0">
-                  <p:tgtEl>
-                    <p:sldTgt/>
-                  </p:tgtEl>
-                </p:cond>
-              </p:prevCondLst>
-              <p:nextCondLst>
-                <p:cond evt="onNext" delay="0">
-                  <p:tgtEl>
-                    <p:sldTgt/>
-                  </p:tgtEl>
-                </p:cond>
-              </p:nextCondLst>
-            </p:seq>
-          </p:childTnLst>
-        </p:cTn>
-      </p:par>
-    </p:tnLst>
-  </p:timing>
 </p:sld>
 </file>
 
@@ -21203,1017 +14620,6 @@
   <p:transition spd="med" advClick="1">
     <p:fade/>
   </p:transition>
-  <p:timing>
-    <p:tnLst>
-      <p:par>
-        <p:cTn id="2" dur="indefinite" restart="never" nodeType="tmRoot">
-          <p:childTnLst>
-            <p:seq concurrent="1" nextAc="seek">
-              <p:cTn id="3" dur="indefinite" nodeType="mainSeq">
-                <p:childTnLst>
-                  <p:par>
-                    <p:cTn id="4" fill="hold" nodeType="withEffect">
-                      <p:stCondLst>
-                        <p:cond delay="0"/>
-                      </p:stCondLst>
-                      <p:childTnLst>
-                        <p:par>
-                          <p:cTn id="5" fill="hold" nodeType="withEffect">
-                            <p:stCondLst>
-                              <p:cond delay="0"/>
-                            </p:stCondLst>
-                            <p:childTnLst>
-                              <p:animEffect transition="in" filter="fade">
-                                <p:cBhvr>
-                                  <p:cTn id="6" dur="450"/>
-                                  <p:tgtEl>
-                                    <p:spTgt spid="2"/>
-                                  </p:tgtEl>
-                                </p:cBhvr>
-                              </p:animEffect>
-                              <p:set>
-                                <p:cBhvr>
-                                  <p:cTn id="7" dur="1" fill="hold">
-                                    <p:stCondLst>
-                                      <p:cond delay="0"/>
-                                    </p:stCondLst>
-                                  </p:cTn>
-                                  <p:tgtEl>
-                                    <p:spTgt spid="2"/>
-                                  </p:tgtEl>
-                                  <p:attrNameLst>
-                                    <p:attrName>style.visibility</p:attrName>
-                                  </p:attrNameLst>
-                                </p:cBhvr>
-                                <p:to>
-                                  <p:strVal val="visible"/>
-                                </p:to>
-                              </p:set>
-                            </p:childTnLst>
-                          </p:cTn>
-                        </p:par>
-                        <p:par>
-                          <p:cTn id="8" fill="hold" nodeType="withEffect">
-                            <p:stCondLst>
-                              <p:cond delay="0"/>
-                            </p:stCondLst>
-                            <p:childTnLst>
-                              <p:animEffect transition="in" filter="fade">
-                                <p:cBhvr>
-                                  <p:cTn id="9" dur="450"/>
-                                  <p:tgtEl>
-                                    <p:spTgt spid="3"/>
-                                  </p:tgtEl>
-                                </p:cBhvr>
-                              </p:animEffect>
-                              <p:set>
-                                <p:cBhvr>
-                                  <p:cTn id="10" dur="1" fill="hold">
-                                    <p:stCondLst>
-                                      <p:cond delay="0"/>
-                                    </p:stCondLst>
-                                  </p:cTn>
-                                  <p:tgtEl>
-                                    <p:spTgt spid="3"/>
-                                  </p:tgtEl>
-                                  <p:attrNameLst>
-                                    <p:attrName>style.visibility</p:attrName>
-                                  </p:attrNameLst>
-                                </p:cBhvr>
-                                <p:to>
-                                  <p:strVal val="visible"/>
-                                </p:to>
-                              </p:set>
-                            </p:childTnLst>
-                          </p:cTn>
-                        </p:par>
-                        <p:par>
-                          <p:cTn id="11" fill="hold" nodeType="withEffect">
-                            <p:stCondLst>
-                              <p:cond delay="0"/>
-                            </p:stCondLst>
-                            <p:childTnLst>
-                              <p:animEffect transition="in" filter="fade">
-                                <p:cBhvr>
-                                  <p:cTn id="12" dur="450"/>
-                                  <p:tgtEl>
-                                    <p:spTgt spid="4"/>
-                                  </p:tgtEl>
-                                </p:cBhvr>
-                              </p:animEffect>
-                              <p:set>
-                                <p:cBhvr>
-                                  <p:cTn id="13" dur="1" fill="hold">
-                                    <p:stCondLst>
-                                      <p:cond delay="0"/>
-                                    </p:stCondLst>
-                                  </p:cTn>
-                                  <p:tgtEl>
-                                    <p:spTgt spid="4"/>
-                                  </p:tgtEl>
-                                  <p:attrNameLst>
-                                    <p:attrName>style.visibility</p:attrName>
-                                  </p:attrNameLst>
-                                </p:cBhvr>
-                                <p:to>
-                                  <p:strVal val="visible"/>
-                                </p:to>
-                              </p:set>
-                            </p:childTnLst>
-                          </p:cTn>
-                        </p:par>
-                        <p:par>
-                          <p:cTn id="14" fill="hold" nodeType="withEffect">
-                            <p:stCondLst>
-                              <p:cond delay="0"/>
-                            </p:stCondLst>
-                            <p:childTnLst>
-                              <p:animEffect transition="in" filter="fade">
-                                <p:cBhvr>
-                                  <p:cTn id="15" dur="450"/>
-                                  <p:tgtEl>
-                                    <p:spTgt spid="5"/>
-                                  </p:tgtEl>
-                                </p:cBhvr>
-                              </p:animEffect>
-                              <p:set>
-                                <p:cBhvr>
-                                  <p:cTn id="16" dur="1" fill="hold">
-                                    <p:stCondLst>
-                                      <p:cond delay="0"/>
-                                    </p:stCondLst>
-                                  </p:cTn>
-                                  <p:tgtEl>
-                                    <p:spTgt spid="5"/>
-                                  </p:tgtEl>
-                                  <p:attrNameLst>
-                                    <p:attrName>style.visibility</p:attrName>
-                                  </p:attrNameLst>
-                                </p:cBhvr>
-                                <p:to>
-                                  <p:strVal val="visible"/>
-                                </p:to>
-                              </p:set>
-                            </p:childTnLst>
-                          </p:cTn>
-                        </p:par>
-                        <p:par>
-                          <p:cTn id="17" fill="hold" nodeType="withEffect">
-                            <p:stCondLst>
-                              <p:cond delay="0"/>
-                            </p:stCondLst>
-                            <p:childTnLst>
-                              <p:animEffect transition="in" filter="fade">
-                                <p:cBhvr>
-                                  <p:cTn id="18" dur="450"/>
-                                  <p:tgtEl>
-                                    <p:spTgt spid="6"/>
-                                  </p:tgtEl>
-                                </p:cBhvr>
-                              </p:animEffect>
-                              <p:set>
-                                <p:cBhvr>
-                                  <p:cTn id="19" dur="1" fill="hold">
-                                    <p:stCondLst>
-                                      <p:cond delay="0"/>
-                                    </p:stCondLst>
-                                  </p:cTn>
-                                  <p:tgtEl>
-                                    <p:spTgt spid="6"/>
-                                  </p:tgtEl>
-                                  <p:attrNameLst>
-                                    <p:attrName>style.visibility</p:attrName>
-                                  </p:attrNameLst>
-                                </p:cBhvr>
-                                <p:to>
-                                  <p:strVal val="visible"/>
-                                </p:to>
-                              </p:set>
-                            </p:childTnLst>
-                          </p:cTn>
-                        </p:par>
-                      </p:childTnLst>
-                    </p:cTn>
-                  </p:par>
-                  <p:par>
-                    <p:cTn id="20" fill="hold" nodeType="clickEffect">
-                      <p:stCondLst>
-                        <p:cond delay="0"/>
-                      </p:stCondLst>
-                      <p:childTnLst>
-                        <p:par>
-                          <p:cTn id="21" fill="hold" nodeType="withEffect">
-                            <p:stCondLst>
-                              <p:cond delay="0"/>
-                            </p:stCondLst>
-                            <p:childTnLst>
-                              <p:animEffect transition="in" filter="fade">
-                                <p:cBhvr>
-                                  <p:cTn id="22" dur="450"/>
-                                  <p:tgtEl>
-                                    <p:spTgt spid="7"/>
-                                  </p:tgtEl>
-                                </p:cBhvr>
-                              </p:animEffect>
-                              <p:set>
-                                <p:cBhvr>
-                                  <p:cTn id="23" dur="1" fill="hold">
-                                    <p:stCondLst>
-                                      <p:cond delay="0"/>
-                                    </p:stCondLst>
-                                  </p:cTn>
-                                  <p:tgtEl>
-                                    <p:spTgt spid="7"/>
-                                  </p:tgtEl>
-                                  <p:attrNameLst>
-                                    <p:attrName>style.visibility</p:attrName>
-                                  </p:attrNameLst>
-                                </p:cBhvr>
-                                <p:to>
-                                  <p:strVal val="visible"/>
-                                </p:to>
-                              </p:set>
-                            </p:childTnLst>
-                          </p:cTn>
-                        </p:par>
-                        <p:par>
-                          <p:cTn id="24" fill="hold" nodeType="withEffect">
-                            <p:stCondLst>
-                              <p:cond delay="0"/>
-                            </p:stCondLst>
-                            <p:childTnLst>
-                              <p:animEffect transition="in" filter="fade">
-                                <p:cBhvr>
-                                  <p:cTn id="25" dur="450"/>
-                                  <p:tgtEl>
-                                    <p:spTgt spid="8"/>
-                                  </p:tgtEl>
-                                </p:cBhvr>
-                              </p:animEffect>
-                              <p:set>
-                                <p:cBhvr>
-                                  <p:cTn id="26" dur="1" fill="hold">
-                                    <p:stCondLst>
-                                      <p:cond delay="0"/>
-                                    </p:stCondLst>
-                                  </p:cTn>
-                                  <p:tgtEl>
-                                    <p:spTgt spid="8"/>
-                                  </p:tgtEl>
-                                  <p:attrNameLst>
-                                    <p:attrName>style.visibility</p:attrName>
-                                  </p:attrNameLst>
-                                </p:cBhvr>
-                                <p:to>
-                                  <p:strVal val="visible"/>
-                                </p:to>
-                              </p:set>
-                            </p:childTnLst>
-                          </p:cTn>
-                        </p:par>
-                        <p:par>
-                          <p:cTn id="27" fill="hold" nodeType="withEffect">
-                            <p:stCondLst>
-                              <p:cond delay="0"/>
-                            </p:stCondLst>
-                            <p:childTnLst>
-                              <p:animEffect transition="in" filter="fade">
-                                <p:cBhvr>
-                                  <p:cTn id="28" dur="450"/>
-                                  <p:tgtEl>
-                                    <p:spTgt spid="9"/>
-                                  </p:tgtEl>
-                                </p:cBhvr>
-                              </p:animEffect>
-                              <p:set>
-                                <p:cBhvr>
-                                  <p:cTn id="29" dur="1" fill="hold">
-                                    <p:stCondLst>
-                                      <p:cond delay="0"/>
-                                    </p:stCondLst>
-                                  </p:cTn>
-                                  <p:tgtEl>
-                                    <p:spTgt spid="9"/>
-                                  </p:tgtEl>
-                                  <p:attrNameLst>
-                                    <p:attrName>style.visibility</p:attrName>
-                                  </p:attrNameLst>
-                                </p:cBhvr>
-                                <p:to>
-                                  <p:strVal val="visible"/>
-                                </p:to>
-                              </p:set>
-                            </p:childTnLst>
-                          </p:cTn>
-                        </p:par>
-                        <p:par>
-                          <p:cTn id="30" fill="hold" nodeType="withEffect">
-                            <p:stCondLst>
-                              <p:cond delay="0"/>
-                            </p:stCondLst>
-                            <p:childTnLst>
-                              <p:animEffect transition="in" filter="fade">
-                                <p:cBhvr>
-                                  <p:cTn id="31" dur="450"/>
-                                  <p:tgtEl>
-                                    <p:spTgt spid="10"/>
-                                  </p:tgtEl>
-                                </p:cBhvr>
-                              </p:animEffect>
-                              <p:set>
-                                <p:cBhvr>
-                                  <p:cTn id="32" dur="1" fill="hold">
-                                    <p:stCondLst>
-                                      <p:cond delay="0"/>
-                                    </p:stCondLst>
-                                  </p:cTn>
-                                  <p:tgtEl>
-                                    <p:spTgt spid="10"/>
-                                  </p:tgtEl>
-                                  <p:attrNameLst>
-                                    <p:attrName>style.visibility</p:attrName>
-                                  </p:attrNameLst>
-                                </p:cBhvr>
-                                <p:to>
-                                  <p:strVal val="visible"/>
-                                </p:to>
-                              </p:set>
-                            </p:childTnLst>
-                          </p:cTn>
-                        </p:par>
-                        <p:par>
-                          <p:cTn id="33" fill="hold" nodeType="withEffect">
-                            <p:stCondLst>
-                              <p:cond delay="0"/>
-                            </p:stCondLst>
-                            <p:childTnLst>
-                              <p:animEffect transition="in" filter="fade">
-                                <p:cBhvr>
-                                  <p:cTn id="34" dur="450"/>
-                                  <p:tgtEl>
-                                    <p:spTgt spid="11"/>
-                                  </p:tgtEl>
-                                </p:cBhvr>
-                              </p:animEffect>
-                              <p:set>
-                                <p:cBhvr>
-                                  <p:cTn id="35" dur="1" fill="hold">
-                                    <p:stCondLst>
-                                      <p:cond delay="0"/>
-                                    </p:stCondLst>
-                                  </p:cTn>
-                                  <p:tgtEl>
-                                    <p:spTgt spid="11"/>
-                                  </p:tgtEl>
-                                  <p:attrNameLst>
-                                    <p:attrName>style.visibility</p:attrName>
-                                  </p:attrNameLst>
-                                </p:cBhvr>
-                                <p:to>
-                                  <p:strVal val="visible"/>
-                                </p:to>
-                              </p:set>
-                            </p:childTnLst>
-                          </p:cTn>
-                        </p:par>
-                        <p:par>
-                          <p:cTn id="36" fill="hold" nodeType="withEffect">
-                            <p:stCondLst>
-                              <p:cond delay="0"/>
-                            </p:stCondLst>
-                            <p:childTnLst>
-                              <p:animEffect transition="in" filter="fade">
-                                <p:cBhvr>
-                                  <p:cTn id="37" dur="450"/>
-                                  <p:tgtEl>
-                                    <p:spTgt spid="12"/>
-                                  </p:tgtEl>
-                                </p:cBhvr>
-                              </p:animEffect>
-                              <p:set>
-                                <p:cBhvr>
-                                  <p:cTn id="38" dur="1" fill="hold">
-                                    <p:stCondLst>
-                                      <p:cond delay="0"/>
-                                    </p:stCondLst>
-                                  </p:cTn>
-                                  <p:tgtEl>
-                                    <p:spTgt spid="12"/>
-                                  </p:tgtEl>
-                                  <p:attrNameLst>
-                                    <p:attrName>style.visibility</p:attrName>
-                                  </p:attrNameLst>
-                                </p:cBhvr>
-                                <p:to>
-                                  <p:strVal val="visible"/>
-                                </p:to>
-                              </p:set>
-                            </p:childTnLst>
-                          </p:cTn>
-                        </p:par>
-                      </p:childTnLst>
-                    </p:cTn>
-                  </p:par>
-                  <p:par>
-                    <p:cTn id="39" fill="hold" nodeType="clickEffect">
-                      <p:stCondLst>
-                        <p:cond delay="0"/>
-                      </p:stCondLst>
-                      <p:childTnLst>
-                        <p:par>
-                          <p:cTn id="40" fill="hold" nodeType="withEffect">
-                            <p:stCondLst>
-                              <p:cond delay="0"/>
-                            </p:stCondLst>
-                            <p:childTnLst>
-                              <p:animEffect transition="in" filter="fade">
-                                <p:cBhvr>
-                                  <p:cTn id="41" dur="450"/>
-                                  <p:tgtEl>
-                                    <p:spTgt spid="13"/>
-                                  </p:tgtEl>
-                                </p:cBhvr>
-                              </p:animEffect>
-                              <p:set>
-                                <p:cBhvr>
-                                  <p:cTn id="42" dur="1" fill="hold">
-                                    <p:stCondLst>
-                                      <p:cond delay="0"/>
-                                    </p:stCondLst>
-                                  </p:cTn>
-                                  <p:tgtEl>
-                                    <p:spTgt spid="13"/>
-                                  </p:tgtEl>
-                                  <p:attrNameLst>
-                                    <p:attrName>style.visibility</p:attrName>
-                                  </p:attrNameLst>
-                                </p:cBhvr>
-                                <p:to>
-                                  <p:strVal val="visible"/>
-                                </p:to>
-                              </p:set>
-                            </p:childTnLst>
-                          </p:cTn>
-                        </p:par>
-                        <p:par>
-                          <p:cTn id="43" fill="hold" nodeType="withEffect">
-                            <p:stCondLst>
-                              <p:cond delay="0"/>
-                            </p:stCondLst>
-                            <p:childTnLst>
-                              <p:animEffect transition="in" filter="fade">
-                                <p:cBhvr>
-                                  <p:cTn id="44" dur="450"/>
-                                  <p:tgtEl>
-                                    <p:spTgt spid="14"/>
-                                  </p:tgtEl>
-                                </p:cBhvr>
-                              </p:animEffect>
-                              <p:set>
-                                <p:cBhvr>
-                                  <p:cTn id="45" dur="1" fill="hold">
-                                    <p:stCondLst>
-                                      <p:cond delay="0"/>
-                                    </p:stCondLst>
-                                  </p:cTn>
-                                  <p:tgtEl>
-                                    <p:spTgt spid="14"/>
-                                  </p:tgtEl>
-                                  <p:attrNameLst>
-                                    <p:attrName>style.visibility</p:attrName>
-                                  </p:attrNameLst>
-                                </p:cBhvr>
-                                <p:to>
-                                  <p:strVal val="visible"/>
-                                </p:to>
-                              </p:set>
-                            </p:childTnLst>
-                          </p:cTn>
-                        </p:par>
-                        <p:par>
-                          <p:cTn id="46" fill="hold" nodeType="withEffect">
-                            <p:stCondLst>
-                              <p:cond delay="0"/>
-                            </p:stCondLst>
-                            <p:childTnLst>
-                              <p:animEffect transition="in" filter="fade">
-                                <p:cBhvr>
-                                  <p:cTn id="47" dur="450"/>
-                                  <p:tgtEl>
-                                    <p:spTgt spid="15"/>
-                                  </p:tgtEl>
-                                </p:cBhvr>
-                              </p:animEffect>
-                              <p:set>
-                                <p:cBhvr>
-                                  <p:cTn id="48" dur="1" fill="hold">
-                                    <p:stCondLst>
-                                      <p:cond delay="0"/>
-                                    </p:stCondLst>
-                                  </p:cTn>
-                                  <p:tgtEl>
-                                    <p:spTgt spid="15"/>
-                                  </p:tgtEl>
-                                  <p:attrNameLst>
-                                    <p:attrName>style.visibility</p:attrName>
-                                  </p:attrNameLst>
-                                </p:cBhvr>
-                                <p:to>
-                                  <p:strVal val="visible"/>
-                                </p:to>
-                              </p:set>
-                            </p:childTnLst>
-                          </p:cTn>
-                        </p:par>
-                        <p:par>
-                          <p:cTn id="49" fill="hold" nodeType="withEffect">
-                            <p:stCondLst>
-                              <p:cond delay="0"/>
-                            </p:stCondLst>
-                            <p:childTnLst>
-                              <p:animEffect transition="in" filter="fade">
-                                <p:cBhvr>
-                                  <p:cTn id="50" dur="450"/>
-                                  <p:tgtEl>
-                                    <p:spTgt spid="16"/>
-                                  </p:tgtEl>
-                                </p:cBhvr>
-                              </p:animEffect>
-                              <p:set>
-                                <p:cBhvr>
-                                  <p:cTn id="51" dur="1" fill="hold">
-                                    <p:stCondLst>
-                                      <p:cond delay="0"/>
-                                    </p:stCondLst>
-                                  </p:cTn>
-                                  <p:tgtEl>
-                                    <p:spTgt spid="16"/>
-                                  </p:tgtEl>
-                                  <p:attrNameLst>
-                                    <p:attrName>style.visibility</p:attrName>
-                                  </p:attrNameLst>
-                                </p:cBhvr>
-                                <p:to>
-                                  <p:strVal val="visible"/>
-                                </p:to>
-                              </p:set>
-                            </p:childTnLst>
-                          </p:cTn>
-                        </p:par>
-                        <p:par>
-                          <p:cTn id="52" fill="hold" nodeType="withEffect">
-                            <p:stCondLst>
-                              <p:cond delay="0"/>
-                            </p:stCondLst>
-                            <p:childTnLst>
-                              <p:animEffect transition="in" filter="fade">
-                                <p:cBhvr>
-                                  <p:cTn id="53" dur="450"/>
-                                  <p:tgtEl>
-                                    <p:spTgt spid="17"/>
-                                  </p:tgtEl>
-                                </p:cBhvr>
-                              </p:animEffect>
-                              <p:set>
-                                <p:cBhvr>
-                                  <p:cTn id="54" dur="1" fill="hold">
-                                    <p:stCondLst>
-                                      <p:cond delay="0"/>
-                                    </p:stCondLst>
-                                  </p:cTn>
-                                  <p:tgtEl>
-                                    <p:spTgt spid="17"/>
-                                  </p:tgtEl>
-                                  <p:attrNameLst>
-                                    <p:attrName>style.visibility</p:attrName>
-                                  </p:attrNameLst>
-                                </p:cBhvr>
-                                <p:to>
-                                  <p:strVal val="visible"/>
-                                </p:to>
-                              </p:set>
-                            </p:childTnLst>
-                          </p:cTn>
-                        </p:par>
-                        <p:par>
-                          <p:cTn id="55" fill="hold" nodeType="withEffect">
-                            <p:stCondLst>
-                              <p:cond delay="0"/>
-                            </p:stCondLst>
-                            <p:childTnLst>
-                              <p:animEffect transition="in" filter="fade">
-                                <p:cBhvr>
-                                  <p:cTn id="56" dur="450"/>
-                                  <p:tgtEl>
-                                    <p:spTgt spid="18"/>
-                                  </p:tgtEl>
-                                </p:cBhvr>
-                              </p:animEffect>
-                              <p:set>
-                                <p:cBhvr>
-                                  <p:cTn id="57" dur="1" fill="hold">
-                                    <p:stCondLst>
-                                      <p:cond delay="0"/>
-                                    </p:stCondLst>
-                                  </p:cTn>
-                                  <p:tgtEl>
-                                    <p:spTgt spid="18"/>
-                                  </p:tgtEl>
-                                  <p:attrNameLst>
-                                    <p:attrName>style.visibility</p:attrName>
-                                  </p:attrNameLst>
-                                </p:cBhvr>
-                                <p:to>
-                                  <p:strVal val="visible"/>
-                                </p:to>
-                              </p:set>
-                            </p:childTnLst>
-                          </p:cTn>
-                        </p:par>
-                      </p:childTnLst>
-                    </p:cTn>
-                  </p:par>
-                  <p:par>
-                    <p:cTn id="58" fill="hold" nodeType="clickEffect">
-                      <p:stCondLst>
-                        <p:cond delay="0"/>
-                      </p:stCondLst>
-                      <p:childTnLst>
-                        <p:par>
-                          <p:cTn id="59" fill="hold" nodeType="withEffect">
-                            <p:stCondLst>
-                              <p:cond delay="0"/>
-                            </p:stCondLst>
-                            <p:childTnLst>
-                              <p:animEffect transition="in" filter="fade">
-                                <p:cBhvr>
-                                  <p:cTn id="60" dur="450"/>
-                                  <p:tgtEl>
-                                    <p:spTgt spid="19"/>
-                                  </p:tgtEl>
-                                </p:cBhvr>
-                              </p:animEffect>
-                              <p:set>
-                                <p:cBhvr>
-                                  <p:cTn id="61" dur="1" fill="hold">
-                                    <p:stCondLst>
-                                      <p:cond delay="0"/>
-                                    </p:stCondLst>
-                                  </p:cTn>
-                                  <p:tgtEl>
-                                    <p:spTgt spid="19"/>
-                                  </p:tgtEl>
-                                  <p:attrNameLst>
-                                    <p:attrName>style.visibility</p:attrName>
-                                  </p:attrNameLst>
-                                </p:cBhvr>
-                                <p:to>
-                                  <p:strVal val="visible"/>
-                                </p:to>
-                              </p:set>
-                            </p:childTnLst>
-                          </p:cTn>
-                        </p:par>
-                        <p:par>
-                          <p:cTn id="62" fill="hold" nodeType="withEffect">
-                            <p:stCondLst>
-                              <p:cond delay="0"/>
-                            </p:stCondLst>
-                            <p:childTnLst>
-                              <p:animEffect transition="in" filter="fade">
-                                <p:cBhvr>
-                                  <p:cTn id="63" dur="450"/>
-                                  <p:tgtEl>
-                                    <p:spTgt spid="20"/>
-                                  </p:tgtEl>
-                                </p:cBhvr>
-                              </p:animEffect>
-                              <p:set>
-                                <p:cBhvr>
-                                  <p:cTn id="64" dur="1" fill="hold">
-                                    <p:stCondLst>
-                                      <p:cond delay="0"/>
-                                    </p:stCondLst>
-                                  </p:cTn>
-                                  <p:tgtEl>
-                                    <p:spTgt spid="20"/>
-                                  </p:tgtEl>
-                                  <p:attrNameLst>
-                                    <p:attrName>style.visibility</p:attrName>
-                                  </p:attrNameLst>
-                                </p:cBhvr>
-                                <p:to>
-                                  <p:strVal val="visible"/>
-                                </p:to>
-                              </p:set>
-                            </p:childTnLst>
-                          </p:cTn>
-                        </p:par>
-                        <p:par>
-                          <p:cTn id="65" fill="hold" nodeType="withEffect">
-                            <p:stCondLst>
-                              <p:cond delay="0"/>
-                            </p:stCondLst>
-                            <p:childTnLst>
-                              <p:animEffect transition="in" filter="fade">
-                                <p:cBhvr>
-                                  <p:cTn id="66" dur="450"/>
-                                  <p:tgtEl>
-                                    <p:spTgt spid="21"/>
-                                  </p:tgtEl>
-                                </p:cBhvr>
-                              </p:animEffect>
-                              <p:set>
-                                <p:cBhvr>
-                                  <p:cTn id="67" dur="1" fill="hold">
-                                    <p:stCondLst>
-                                      <p:cond delay="0"/>
-                                    </p:stCondLst>
-                                  </p:cTn>
-                                  <p:tgtEl>
-                                    <p:spTgt spid="21"/>
-                                  </p:tgtEl>
-                                  <p:attrNameLst>
-                                    <p:attrName>style.visibility</p:attrName>
-                                  </p:attrNameLst>
-                                </p:cBhvr>
-                                <p:to>
-                                  <p:strVal val="visible"/>
-                                </p:to>
-                              </p:set>
-                            </p:childTnLst>
-                          </p:cTn>
-                        </p:par>
-                        <p:par>
-                          <p:cTn id="68" fill="hold" nodeType="withEffect">
-                            <p:stCondLst>
-                              <p:cond delay="0"/>
-                            </p:stCondLst>
-                            <p:childTnLst>
-                              <p:animEffect transition="in" filter="fade">
-                                <p:cBhvr>
-                                  <p:cTn id="69" dur="450"/>
-                                  <p:tgtEl>
-                                    <p:spTgt spid="22"/>
-                                  </p:tgtEl>
-                                </p:cBhvr>
-                              </p:animEffect>
-                              <p:set>
-                                <p:cBhvr>
-                                  <p:cTn id="70" dur="1" fill="hold">
-                                    <p:stCondLst>
-                                      <p:cond delay="0"/>
-                                    </p:stCondLst>
-                                  </p:cTn>
-                                  <p:tgtEl>
-                                    <p:spTgt spid="22"/>
-                                  </p:tgtEl>
-                                  <p:attrNameLst>
-                                    <p:attrName>style.visibility</p:attrName>
-                                  </p:attrNameLst>
-                                </p:cBhvr>
-                                <p:to>
-                                  <p:strVal val="visible"/>
-                                </p:to>
-                              </p:set>
-                            </p:childTnLst>
-                          </p:cTn>
-                        </p:par>
-                        <p:par>
-                          <p:cTn id="71" fill="hold" nodeType="withEffect">
-                            <p:stCondLst>
-                              <p:cond delay="0"/>
-                            </p:stCondLst>
-                            <p:childTnLst>
-                              <p:animEffect transition="in" filter="fade">
-                                <p:cBhvr>
-                                  <p:cTn id="72" dur="450"/>
-                                  <p:tgtEl>
-                                    <p:spTgt spid="23"/>
-                                  </p:tgtEl>
-                                </p:cBhvr>
-                              </p:animEffect>
-                              <p:set>
-                                <p:cBhvr>
-                                  <p:cTn id="73" dur="1" fill="hold">
-                                    <p:stCondLst>
-                                      <p:cond delay="0"/>
-                                    </p:stCondLst>
-                                  </p:cTn>
-                                  <p:tgtEl>
-                                    <p:spTgt spid="23"/>
-                                  </p:tgtEl>
-                                  <p:attrNameLst>
-                                    <p:attrName>style.visibility</p:attrName>
-                                  </p:attrNameLst>
-                                </p:cBhvr>
-                                <p:to>
-                                  <p:strVal val="visible"/>
-                                </p:to>
-                              </p:set>
-                            </p:childTnLst>
-                          </p:cTn>
-                        </p:par>
-                        <p:par>
-                          <p:cTn id="74" fill="hold" nodeType="withEffect">
-                            <p:stCondLst>
-                              <p:cond delay="0"/>
-                            </p:stCondLst>
-                            <p:childTnLst>
-                              <p:animEffect transition="in" filter="fade">
-                                <p:cBhvr>
-                                  <p:cTn id="75" dur="450"/>
-                                  <p:tgtEl>
-                                    <p:spTgt spid="24"/>
-                                  </p:tgtEl>
-                                </p:cBhvr>
-                              </p:animEffect>
-                              <p:set>
-                                <p:cBhvr>
-                                  <p:cTn id="76" dur="1" fill="hold">
-                                    <p:stCondLst>
-                                      <p:cond delay="0"/>
-                                    </p:stCondLst>
-                                  </p:cTn>
-                                  <p:tgtEl>
-                                    <p:spTgt spid="24"/>
-                                  </p:tgtEl>
-                                  <p:attrNameLst>
-                                    <p:attrName>style.visibility</p:attrName>
-                                  </p:attrNameLst>
-                                </p:cBhvr>
-                                <p:to>
-                                  <p:strVal val="visible"/>
-                                </p:to>
-                              </p:set>
-                            </p:childTnLst>
-                          </p:cTn>
-                        </p:par>
-                        <p:par>
-                          <p:cTn id="77" fill="hold" nodeType="withEffect">
-                            <p:stCondLst>
-                              <p:cond delay="0"/>
-                            </p:stCondLst>
-                            <p:childTnLst>
-                              <p:animEffect transition="in" filter="fade">
-                                <p:cBhvr>
-                                  <p:cTn id="78" dur="450"/>
-                                  <p:tgtEl>
-                                    <p:spTgt spid="25"/>
-                                  </p:tgtEl>
-                                </p:cBhvr>
-                              </p:animEffect>
-                              <p:set>
-                                <p:cBhvr>
-                                  <p:cTn id="79" dur="1" fill="hold">
-                                    <p:stCondLst>
-                                      <p:cond delay="0"/>
-                                    </p:stCondLst>
-                                  </p:cTn>
-                                  <p:tgtEl>
-                                    <p:spTgt spid="25"/>
-                                  </p:tgtEl>
-                                  <p:attrNameLst>
-                                    <p:attrName>style.visibility</p:attrName>
-                                  </p:attrNameLst>
-                                </p:cBhvr>
-                                <p:to>
-                                  <p:strVal val="visible"/>
-                                </p:to>
-                              </p:set>
-                            </p:childTnLst>
-                          </p:cTn>
-                        </p:par>
-                        <p:par>
-                          <p:cTn id="80" fill="hold" nodeType="withEffect">
-                            <p:stCondLst>
-                              <p:cond delay="0"/>
-                            </p:stCondLst>
-                            <p:childTnLst>
-                              <p:animEffect transition="in" filter="fade">
-                                <p:cBhvr>
-                                  <p:cTn id="81" dur="450"/>
-                                  <p:tgtEl>
-                                    <p:spTgt spid="26"/>
-                                  </p:tgtEl>
-                                </p:cBhvr>
-                              </p:animEffect>
-                              <p:set>
-                                <p:cBhvr>
-                                  <p:cTn id="82" dur="1" fill="hold">
-                                    <p:stCondLst>
-                                      <p:cond delay="0"/>
-                                    </p:stCondLst>
-                                  </p:cTn>
-                                  <p:tgtEl>
-                                    <p:spTgt spid="26"/>
-                                  </p:tgtEl>
-                                  <p:attrNameLst>
-                                    <p:attrName>style.visibility</p:attrName>
-                                  </p:attrNameLst>
-                                </p:cBhvr>
-                                <p:to>
-                                  <p:strVal val="visible"/>
-                                </p:to>
-                              </p:set>
-                            </p:childTnLst>
-                          </p:cTn>
-                        </p:par>
-                        <p:par>
-                          <p:cTn id="83" fill="hold" nodeType="withEffect">
-                            <p:stCondLst>
-                              <p:cond delay="0"/>
-                            </p:stCondLst>
-                            <p:childTnLst>
-                              <p:animEffect transition="in" filter="fade">
-                                <p:cBhvr>
-                                  <p:cTn id="84" dur="450"/>
-                                  <p:tgtEl>
-                                    <p:spTgt spid="27"/>
-                                  </p:tgtEl>
-                                </p:cBhvr>
-                              </p:animEffect>
-                              <p:set>
-                                <p:cBhvr>
-                                  <p:cTn id="85" dur="1" fill="hold">
-                                    <p:stCondLst>
-                                      <p:cond delay="0"/>
-                                    </p:stCondLst>
-                                  </p:cTn>
-                                  <p:tgtEl>
-                                    <p:spTgt spid="27"/>
-                                  </p:tgtEl>
-                                  <p:attrNameLst>
-                                    <p:attrName>style.visibility</p:attrName>
-                                  </p:attrNameLst>
-                                </p:cBhvr>
-                                <p:to>
-                                  <p:strVal val="visible"/>
-                                </p:to>
-                              </p:set>
-                            </p:childTnLst>
-                          </p:cTn>
-                        </p:par>
-                        <p:par>
-                          <p:cTn id="86" fill="hold" nodeType="withEffect">
-                            <p:stCondLst>
-                              <p:cond delay="0"/>
-                            </p:stCondLst>
-                            <p:childTnLst>
-                              <p:animEffect transition="in" filter="fade">
-                                <p:cBhvr>
-                                  <p:cTn id="87" dur="450"/>
-                                  <p:tgtEl>
-                                    <p:spTgt spid="28"/>
-                                  </p:tgtEl>
-                                </p:cBhvr>
-                              </p:animEffect>
-                              <p:set>
-                                <p:cBhvr>
-                                  <p:cTn id="88" dur="1" fill="hold">
-                                    <p:stCondLst>
-                                      <p:cond delay="0"/>
-                                    </p:stCondLst>
-                                  </p:cTn>
-                                  <p:tgtEl>
-                                    <p:spTgt spid="28"/>
-                                  </p:tgtEl>
-                                  <p:attrNameLst>
-                                    <p:attrName>style.visibility</p:attrName>
-                                  </p:attrNameLst>
-                                </p:cBhvr>
-                                <p:to>
-                                  <p:strVal val="visible"/>
-                                </p:to>
-                              </p:set>
-                            </p:childTnLst>
-                          </p:cTn>
-                        </p:par>
-                      </p:childTnLst>
-                    </p:cTn>
-                  </p:par>
-                </p:childTnLst>
-              </p:cTn>
-              <p:prevCondLst>
-                <p:cond evt="onPrev" delay="0">
-                  <p:tgtEl>
-                    <p:sldTgt/>
-                  </p:tgtEl>
-                </p:cond>
-              </p:prevCondLst>
-              <p:nextCondLst>
-                <p:cond evt="onNext" delay="0">
-                  <p:tgtEl>
-                    <p:sldTgt/>
-                  </p:tgtEl>
-                </p:cond>
-              </p:nextCondLst>
-            </p:seq>
-          </p:childTnLst>
-        </p:cTn>
-      </p:par>
-    </p:tnLst>
-  </p:timing>
 </p:sld>
 </file>
 
@@ -22830,448 +15236,6 @@
   <p:transition spd="med" advClick="1">
     <p:fade/>
   </p:transition>
-  <p:timing>
-    <p:tnLst>
-      <p:par>
-        <p:cTn id="2" dur="indefinite" restart="never" nodeType="tmRoot">
-          <p:childTnLst>
-            <p:seq concurrent="1" nextAc="seek">
-              <p:cTn id="3" dur="indefinite" nodeType="mainSeq">
-                <p:childTnLst>
-                  <p:par>
-                    <p:cTn id="4" fill="hold" nodeType="withEffect">
-                      <p:stCondLst>
-                        <p:cond delay="0"/>
-                      </p:stCondLst>
-                      <p:childTnLst>
-                        <p:par>
-                          <p:cTn id="5" fill="hold" nodeType="withEffect">
-                            <p:stCondLst>
-                              <p:cond delay="0"/>
-                            </p:stCondLst>
-                            <p:childTnLst>
-                              <p:animEffect transition="in" filter="fade">
-                                <p:cBhvr>
-                                  <p:cTn id="6" dur="450"/>
-                                  <p:tgtEl>
-                                    <p:spTgt spid="2"/>
-                                  </p:tgtEl>
-                                </p:cBhvr>
-                              </p:animEffect>
-                              <p:set>
-                                <p:cBhvr>
-                                  <p:cTn id="7" dur="1" fill="hold">
-                                    <p:stCondLst>
-                                      <p:cond delay="0"/>
-                                    </p:stCondLst>
-                                  </p:cTn>
-                                  <p:tgtEl>
-                                    <p:spTgt spid="2"/>
-                                  </p:tgtEl>
-                                  <p:attrNameLst>
-                                    <p:attrName>style.visibility</p:attrName>
-                                  </p:attrNameLst>
-                                </p:cBhvr>
-                                <p:to>
-                                  <p:strVal val="visible"/>
-                                </p:to>
-                              </p:set>
-                            </p:childTnLst>
-                          </p:cTn>
-                        </p:par>
-                        <p:par>
-                          <p:cTn id="8" fill="hold" nodeType="withEffect">
-                            <p:stCondLst>
-                              <p:cond delay="0"/>
-                            </p:stCondLst>
-                            <p:childTnLst>
-                              <p:animEffect transition="in" filter="fade">
-                                <p:cBhvr>
-                                  <p:cTn id="9" dur="450"/>
-                                  <p:tgtEl>
-                                    <p:spTgt spid="3"/>
-                                  </p:tgtEl>
-                                </p:cBhvr>
-                              </p:animEffect>
-                              <p:set>
-                                <p:cBhvr>
-                                  <p:cTn id="10" dur="1" fill="hold">
-                                    <p:stCondLst>
-                                      <p:cond delay="0"/>
-                                    </p:stCondLst>
-                                  </p:cTn>
-                                  <p:tgtEl>
-                                    <p:spTgt spid="3"/>
-                                  </p:tgtEl>
-                                  <p:attrNameLst>
-                                    <p:attrName>style.visibility</p:attrName>
-                                  </p:attrNameLst>
-                                </p:cBhvr>
-                                <p:to>
-                                  <p:strVal val="visible"/>
-                                </p:to>
-                              </p:set>
-                            </p:childTnLst>
-                          </p:cTn>
-                        </p:par>
-                        <p:par>
-                          <p:cTn id="11" fill="hold" nodeType="withEffect">
-                            <p:stCondLst>
-                              <p:cond delay="0"/>
-                            </p:stCondLst>
-                            <p:childTnLst>
-                              <p:animEffect transition="in" filter="fade">
-                                <p:cBhvr>
-                                  <p:cTn id="12" dur="450"/>
-                                  <p:tgtEl>
-                                    <p:spTgt spid="4"/>
-                                  </p:tgtEl>
-                                </p:cBhvr>
-                              </p:animEffect>
-                              <p:set>
-                                <p:cBhvr>
-                                  <p:cTn id="13" dur="1" fill="hold">
-                                    <p:stCondLst>
-                                      <p:cond delay="0"/>
-                                    </p:stCondLst>
-                                  </p:cTn>
-                                  <p:tgtEl>
-                                    <p:spTgt spid="4"/>
-                                  </p:tgtEl>
-                                  <p:attrNameLst>
-                                    <p:attrName>style.visibility</p:attrName>
-                                  </p:attrNameLst>
-                                </p:cBhvr>
-                                <p:to>
-                                  <p:strVal val="visible"/>
-                                </p:to>
-                              </p:set>
-                            </p:childTnLst>
-                          </p:cTn>
-                        </p:par>
-                        <p:par>
-                          <p:cTn id="14" fill="hold" nodeType="withEffect">
-                            <p:stCondLst>
-                              <p:cond delay="0"/>
-                            </p:stCondLst>
-                            <p:childTnLst>
-                              <p:animEffect transition="in" filter="fade">
-                                <p:cBhvr>
-                                  <p:cTn id="15" dur="450"/>
-                                  <p:tgtEl>
-                                    <p:spTgt spid="5"/>
-                                  </p:tgtEl>
-                                </p:cBhvr>
-                              </p:animEffect>
-                              <p:set>
-                                <p:cBhvr>
-                                  <p:cTn id="16" dur="1" fill="hold">
-                                    <p:stCondLst>
-                                      <p:cond delay="0"/>
-                                    </p:stCondLst>
-                                  </p:cTn>
-                                  <p:tgtEl>
-                                    <p:spTgt spid="5"/>
-                                  </p:tgtEl>
-                                  <p:attrNameLst>
-                                    <p:attrName>style.visibility</p:attrName>
-                                  </p:attrNameLst>
-                                </p:cBhvr>
-                                <p:to>
-                                  <p:strVal val="visible"/>
-                                </p:to>
-                              </p:set>
-                            </p:childTnLst>
-                          </p:cTn>
-                        </p:par>
-                        <p:par>
-                          <p:cTn id="17" fill="hold" nodeType="withEffect">
-                            <p:stCondLst>
-                              <p:cond delay="0"/>
-                            </p:stCondLst>
-                            <p:childTnLst>
-                              <p:animEffect transition="in" filter="fade">
-                                <p:cBhvr>
-                                  <p:cTn id="18" dur="450"/>
-                                  <p:tgtEl>
-                                    <p:spTgt spid="6"/>
-                                  </p:tgtEl>
-                                </p:cBhvr>
-                              </p:animEffect>
-                              <p:set>
-                                <p:cBhvr>
-                                  <p:cTn id="19" dur="1" fill="hold">
-                                    <p:stCondLst>
-                                      <p:cond delay="0"/>
-                                    </p:stCondLst>
-                                  </p:cTn>
-                                  <p:tgtEl>
-                                    <p:spTgt spid="6"/>
-                                  </p:tgtEl>
-                                  <p:attrNameLst>
-                                    <p:attrName>style.visibility</p:attrName>
-                                  </p:attrNameLst>
-                                </p:cBhvr>
-                                <p:to>
-                                  <p:strVal val="visible"/>
-                                </p:to>
-                              </p:set>
-                            </p:childTnLst>
-                          </p:cTn>
-                        </p:par>
-                        <p:par>
-                          <p:cTn id="20" fill="hold" nodeType="withEffect">
-                            <p:stCondLst>
-                              <p:cond delay="0"/>
-                            </p:stCondLst>
-                            <p:childTnLst>
-                              <p:animEffect transition="in" filter="fade">
-                                <p:cBhvr>
-                                  <p:cTn id="21" dur="450"/>
-                                  <p:tgtEl>
-                                    <p:spTgt spid="7"/>
-                                  </p:tgtEl>
-                                </p:cBhvr>
-                              </p:animEffect>
-                              <p:set>
-                                <p:cBhvr>
-                                  <p:cTn id="22" dur="1" fill="hold">
-                                    <p:stCondLst>
-                                      <p:cond delay="0"/>
-                                    </p:stCondLst>
-                                  </p:cTn>
-                                  <p:tgtEl>
-                                    <p:spTgt spid="7"/>
-                                  </p:tgtEl>
-                                  <p:attrNameLst>
-                                    <p:attrName>style.visibility</p:attrName>
-                                  </p:attrNameLst>
-                                </p:cBhvr>
-                                <p:to>
-                                  <p:strVal val="visible"/>
-                                </p:to>
-                              </p:set>
-                            </p:childTnLst>
-                          </p:cTn>
-                        </p:par>
-                      </p:childTnLst>
-                    </p:cTn>
-                  </p:par>
-                  <p:par>
-                    <p:cTn id="23" fill="hold" nodeType="clickEffect">
-                      <p:stCondLst>
-                        <p:cond delay="0"/>
-                      </p:stCondLst>
-                      <p:childTnLst>
-                        <p:par>
-                          <p:cTn id="24" fill="hold" nodeType="withEffect">
-                            <p:stCondLst>
-                              <p:cond delay="0"/>
-                            </p:stCondLst>
-                            <p:childTnLst>
-                              <p:animEffect transition="in" filter="fade">
-                                <p:cBhvr>
-                                  <p:cTn id="25" dur="450"/>
-                                  <p:tgtEl>
-                                    <p:spTgt spid="8"/>
-                                  </p:tgtEl>
-                                </p:cBhvr>
-                              </p:animEffect>
-                              <p:set>
-                                <p:cBhvr>
-                                  <p:cTn id="26" dur="1" fill="hold">
-                                    <p:stCondLst>
-                                      <p:cond delay="0"/>
-                                    </p:stCondLst>
-                                  </p:cTn>
-                                  <p:tgtEl>
-                                    <p:spTgt spid="8"/>
-                                  </p:tgtEl>
-                                  <p:attrNameLst>
-                                    <p:attrName>style.visibility</p:attrName>
-                                  </p:attrNameLst>
-                                </p:cBhvr>
-                                <p:to>
-                                  <p:strVal val="visible"/>
-                                </p:to>
-                              </p:set>
-                            </p:childTnLst>
-                          </p:cTn>
-                        </p:par>
-                        <p:par>
-                          <p:cTn id="27" fill="hold" nodeType="withEffect">
-                            <p:stCondLst>
-                              <p:cond delay="0"/>
-                            </p:stCondLst>
-                            <p:childTnLst>
-                              <p:animEffect transition="in" filter="fade">
-                                <p:cBhvr>
-                                  <p:cTn id="28" dur="450"/>
-                                  <p:tgtEl>
-                                    <p:spTgt spid="10"/>
-                                  </p:tgtEl>
-                                </p:cBhvr>
-                              </p:animEffect>
-                              <p:set>
-                                <p:cBhvr>
-                                  <p:cTn id="29" dur="1" fill="hold">
-                                    <p:stCondLst>
-                                      <p:cond delay="0"/>
-                                    </p:stCondLst>
-                                  </p:cTn>
-                                  <p:tgtEl>
-                                    <p:spTgt spid="10"/>
-                                  </p:tgtEl>
-                                  <p:attrNameLst>
-                                    <p:attrName>style.visibility</p:attrName>
-                                  </p:attrNameLst>
-                                </p:cBhvr>
-                                <p:to>
-                                  <p:strVal val="visible"/>
-                                </p:to>
-                              </p:set>
-                            </p:childTnLst>
-                          </p:cTn>
-                        </p:par>
-                      </p:childTnLst>
-                    </p:cTn>
-                  </p:par>
-                  <p:par>
-                    <p:cTn id="30" fill="hold" nodeType="clickEffect">
-                      <p:stCondLst>
-                        <p:cond delay="0"/>
-                      </p:stCondLst>
-                      <p:childTnLst>
-                        <p:par>
-                          <p:cTn id="31" fill="hold" nodeType="withEffect">
-                            <p:stCondLst>
-                              <p:cond delay="0"/>
-                            </p:stCondLst>
-                            <p:childTnLst>
-                              <p:animEffect transition="in" filter="fade">
-                                <p:cBhvr>
-                                  <p:cTn id="32" dur="450"/>
-                                  <p:tgtEl>
-                                    <p:spTgt spid="9"/>
-                                  </p:tgtEl>
-                                </p:cBhvr>
-                              </p:animEffect>
-                              <p:set>
-                                <p:cBhvr>
-                                  <p:cTn id="33" dur="1" fill="hold">
-                                    <p:stCondLst>
-                                      <p:cond delay="0"/>
-                                    </p:stCondLst>
-                                  </p:cTn>
-                                  <p:tgtEl>
-                                    <p:spTgt spid="9"/>
-                                  </p:tgtEl>
-                                  <p:attrNameLst>
-                                    <p:attrName>style.visibility</p:attrName>
-                                  </p:attrNameLst>
-                                </p:cBhvr>
-                                <p:to>
-                                  <p:strVal val="visible"/>
-                                </p:to>
-                              </p:set>
-                            </p:childTnLst>
-                          </p:cTn>
-                        </p:par>
-                        <p:par>
-                          <p:cTn id="34" fill="hold" nodeType="withEffect">
-                            <p:stCondLst>
-                              <p:cond delay="0"/>
-                            </p:stCondLst>
-                            <p:childTnLst>
-                              <p:animEffect transition="in" filter="fade">
-                                <p:cBhvr>
-                                  <p:cTn id="35" dur="450"/>
-                                  <p:tgtEl>
-                                    <p:spTgt spid="11"/>
-                                  </p:tgtEl>
-                                </p:cBhvr>
-                              </p:animEffect>
-                              <p:set>
-                                <p:cBhvr>
-                                  <p:cTn id="36" dur="1" fill="hold">
-                                    <p:stCondLst>
-                                      <p:cond delay="0"/>
-                                    </p:stCondLst>
-                                  </p:cTn>
-                                  <p:tgtEl>
-                                    <p:spTgt spid="11"/>
-                                  </p:tgtEl>
-                                  <p:attrNameLst>
-                                    <p:attrName>style.visibility</p:attrName>
-                                  </p:attrNameLst>
-                                </p:cBhvr>
-                                <p:to>
-                                  <p:strVal val="visible"/>
-                                </p:to>
-                              </p:set>
-                            </p:childTnLst>
-                          </p:cTn>
-                        </p:par>
-                        <p:par>
-                          <p:cTn id="37" fill="hold" nodeType="withEffect">
-                            <p:stCondLst>
-                              <p:cond delay="0"/>
-                            </p:stCondLst>
-                            <p:childTnLst>
-                              <p:animEffect transition="in" filter="fade">
-                                <p:cBhvr>
-                                  <p:cTn id="38" dur="450"/>
-                                  <p:tgtEl>
-                                    <p:spTgt spid="12"/>
-                                  </p:tgtEl>
-                                </p:cBhvr>
-                              </p:animEffect>
-                              <p:set>
-                                <p:cBhvr>
-                                  <p:cTn id="39" dur="1" fill="hold">
-                                    <p:stCondLst>
-                                      <p:cond delay="0"/>
-                                    </p:stCondLst>
-                                  </p:cTn>
-                                  <p:tgtEl>
-                                    <p:spTgt spid="12"/>
-                                  </p:tgtEl>
-                                  <p:attrNameLst>
-                                    <p:attrName>style.visibility</p:attrName>
-                                  </p:attrNameLst>
-                                </p:cBhvr>
-                                <p:to>
-                                  <p:strVal val="visible"/>
-                                </p:to>
-                              </p:set>
-                            </p:childTnLst>
-                          </p:cTn>
-                        </p:par>
-                      </p:childTnLst>
-                    </p:cTn>
-                  </p:par>
-                </p:childTnLst>
-              </p:cTn>
-              <p:prevCondLst>
-                <p:cond evt="onPrev" delay="0">
-                  <p:tgtEl>
-                    <p:sldTgt/>
-                  </p:tgtEl>
-                </p:cond>
-              </p:prevCondLst>
-              <p:nextCondLst>
-                <p:cond evt="onNext" delay="0">
-                  <p:tgtEl>
-                    <p:sldTgt/>
-                  </p:tgtEl>
-                </p:cond>
-              </p:nextCondLst>
-            </p:seq>
-          </p:childTnLst>
-        </p:cTn>
-      </p:par>
-    </p:tnLst>
-  </p:timing>
 </p:sld>
 </file>
 
@@ -23888,448 +15852,6 @@
   <p:transition spd="med" advClick="1">
     <p:fade/>
   </p:transition>
-  <p:timing>
-    <p:tnLst>
-      <p:par>
-        <p:cTn id="2" dur="indefinite" restart="never" nodeType="tmRoot">
-          <p:childTnLst>
-            <p:seq concurrent="1" nextAc="seek">
-              <p:cTn id="3" dur="indefinite" nodeType="mainSeq">
-                <p:childTnLst>
-                  <p:par>
-                    <p:cTn id="4" fill="hold" nodeType="withEffect">
-                      <p:stCondLst>
-                        <p:cond delay="0"/>
-                      </p:stCondLst>
-                      <p:childTnLst>
-                        <p:par>
-                          <p:cTn id="5" fill="hold" nodeType="withEffect">
-                            <p:stCondLst>
-                              <p:cond delay="0"/>
-                            </p:stCondLst>
-                            <p:childTnLst>
-                              <p:animEffect transition="in" filter="fade">
-                                <p:cBhvr>
-                                  <p:cTn id="6" dur="450"/>
-                                  <p:tgtEl>
-                                    <p:spTgt spid="2"/>
-                                  </p:tgtEl>
-                                </p:cBhvr>
-                              </p:animEffect>
-                              <p:set>
-                                <p:cBhvr>
-                                  <p:cTn id="7" dur="1" fill="hold">
-                                    <p:stCondLst>
-                                      <p:cond delay="0"/>
-                                    </p:stCondLst>
-                                  </p:cTn>
-                                  <p:tgtEl>
-                                    <p:spTgt spid="2"/>
-                                  </p:tgtEl>
-                                  <p:attrNameLst>
-                                    <p:attrName>style.visibility</p:attrName>
-                                  </p:attrNameLst>
-                                </p:cBhvr>
-                                <p:to>
-                                  <p:strVal val="visible"/>
-                                </p:to>
-                              </p:set>
-                            </p:childTnLst>
-                          </p:cTn>
-                        </p:par>
-                        <p:par>
-                          <p:cTn id="8" fill="hold" nodeType="withEffect">
-                            <p:stCondLst>
-                              <p:cond delay="0"/>
-                            </p:stCondLst>
-                            <p:childTnLst>
-                              <p:animEffect transition="in" filter="fade">
-                                <p:cBhvr>
-                                  <p:cTn id="9" dur="450"/>
-                                  <p:tgtEl>
-                                    <p:spTgt spid="3"/>
-                                  </p:tgtEl>
-                                </p:cBhvr>
-                              </p:animEffect>
-                              <p:set>
-                                <p:cBhvr>
-                                  <p:cTn id="10" dur="1" fill="hold">
-                                    <p:stCondLst>
-                                      <p:cond delay="0"/>
-                                    </p:stCondLst>
-                                  </p:cTn>
-                                  <p:tgtEl>
-                                    <p:spTgt spid="3"/>
-                                  </p:tgtEl>
-                                  <p:attrNameLst>
-                                    <p:attrName>style.visibility</p:attrName>
-                                  </p:attrNameLst>
-                                </p:cBhvr>
-                                <p:to>
-                                  <p:strVal val="visible"/>
-                                </p:to>
-                              </p:set>
-                            </p:childTnLst>
-                          </p:cTn>
-                        </p:par>
-                        <p:par>
-                          <p:cTn id="11" fill="hold" nodeType="withEffect">
-                            <p:stCondLst>
-                              <p:cond delay="0"/>
-                            </p:stCondLst>
-                            <p:childTnLst>
-                              <p:animEffect transition="in" filter="fade">
-                                <p:cBhvr>
-                                  <p:cTn id="12" dur="450"/>
-                                  <p:tgtEl>
-                                    <p:spTgt spid="4"/>
-                                  </p:tgtEl>
-                                </p:cBhvr>
-                              </p:animEffect>
-                              <p:set>
-                                <p:cBhvr>
-                                  <p:cTn id="13" dur="1" fill="hold">
-                                    <p:stCondLst>
-                                      <p:cond delay="0"/>
-                                    </p:stCondLst>
-                                  </p:cTn>
-                                  <p:tgtEl>
-                                    <p:spTgt spid="4"/>
-                                  </p:tgtEl>
-                                  <p:attrNameLst>
-                                    <p:attrName>style.visibility</p:attrName>
-                                  </p:attrNameLst>
-                                </p:cBhvr>
-                                <p:to>
-                                  <p:strVal val="visible"/>
-                                </p:to>
-                              </p:set>
-                            </p:childTnLst>
-                          </p:cTn>
-                        </p:par>
-                        <p:par>
-                          <p:cTn id="14" fill="hold" nodeType="withEffect">
-                            <p:stCondLst>
-                              <p:cond delay="0"/>
-                            </p:stCondLst>
-                            <p:childTnLst>
-                              <p:animEffect transition="in" filter="fade">
-                                <p:cBhvr>
-                                  <p:cTn id="15" dur="450"/>
-                                  <p:tgtEl>
-                                    <p:spTgt spid="5"/>
-                                  </p:tgtEl>
-                                </p:cBhvr>
-                              </p:animEffect>
-                              <p:set>
-                                <p:cBhvr>
-                                  <p:cTn id="16" dur="1" fill="hold">
-                                    <p:stCondLst>
-                                      <p:cond delay="0"/>
-                                    </p:stCondLst>
-                                  </p:cTn>
-                                  <p:tgtEl>
-                                    <p:spTgt spid="5"/>
-                                  </p:tgtEl>
-                                  <p:attrNameLst>
-                                    <p:attrName>style.visibility</p:attrName>
-                                  </p:attrNameLst>
-                                </p:cBhvr>
-                                <p:to>
-                                  <p:strVal val="visible"/>
-                                </p:to>
-                              </p:set>
-                            </p:childTnLst>
-                          </p:cTn>
-                        </p:par>
-                        <p:par>
-                          <p:cTn id="17" fill="hold" nodeType="withEffect">
-                            <p:stCondLst>
-                              <p:cond delay="0"/>
-                            </p:stCondLst>
-                            <p:childTnLst>
-                              <p:animEffect transition="in" filter="fade">
-                                <p:cBhvr>
-                                  <p:cTn id="18" dur="450"/>
-                                  <p:tgtEl>
-                                    <p:spTgt spid="6"/>
-                                  </p:tgtEl>
-                                </p:cBhvr>
-                              </p:animEffect>
-                              <p:set>
-                                <p:cBhvr>
-                                  <p:cTn id="19" dur="1" fill="hold">
-                                    <p:stCondLst>
-                                      <p:cond delay="0"/>
-                                    </p:stCondLst>
-                                  </p:cTn>
-                                  <p:tgtEl>
-                                    <p:spTgt spid="6"/>
-                                  </p:tgtEl>
-                                  <p:attrNameLst>
-                                    <p:attrName>style.visibility</p:attrName>
-                                  </p:attrNameLst>
-                                </p:cBhvr>
-                                <p:to>
-                                  <p:strVal val="visible"/>
-                                </p:to>
-                              </p:set>
-                            </p:childTnLst>
-                          </p:cTn>
-                        </p:par>
-                        <p:par>
-                          <p:cTn id="20" fill="hold" nodeType="withEffect">
-                            <p:stCondLst>
-                              <p:cond delay="0"/>
-                            </p:stCondLst>
-                            <p:childTnLst>
-                              <p:animEffect transition="in" filter="fade">
-                                <p:cBhvr>
-                                  <p:cTn id="21" dur="450"/>
-                                  <p:tgtEl>
-                                    <p:spTgt spid="7"/>
-                                  </p:tgtEl>
-                                </p:cBhvr>
-                              </p:animEffect>
-                              <p:set>
-                                <p:cBhvr>
-                                  <p:cTn id="22" dur="1" fill="hold">
-                                    <p:stCondLst>
-                                      <p:cond delay="0"/>
-                                    </p:stCondLst>
-                                  </p:cTn>
-                                  <p:tgtEl>
-                                    <p:spTgt spid="7"/>
-                                  </p:tgtEl>
-                                  <p:attrNameLst>
-                                    <p:attrName>style.visibility</p:attrName>
-                                  </p:attrNameLst>
-                                </p:cBhvr>
-                                <p:to>
-                                  <p:strVal val="visible"/>
-                                </p:to>
-                              </p:set>
-                            </p:childTnLst>
-                          </p:cTn>
-                        </p:par>
-                      </p:childTnLst>
-                    </p:cTn>
-                  </p:par>
-                  <p:par>
-                    <p:cTn id="23" fill="hold" nodeType="clickEffect">
-                      <p:stCondLst>
-                        <p:cond delay="0"/>
-                      </p:stCondLst>
-                      <p:childTnLst>
-                        <p:par>
-                          <p:cTn id="24" fill="hold" nodeType="withEffect">
-                            <p:stCondLst>
-                              <p:cond delay="0"/>
-                            </p:stCondLst>
-                            <p:childTnLst>
-                              <p:animEffect transition="in" filter="fade">
-                                <p:cBhvr>
-                                  <p:cTn id="25" dur="450"/>
-                                  <p:tgtEl>
-                                    <p:spTgt spid="8"/>
-                                  </p:tgtEl>
-                                </p:cBhvr>
-                              </p:animEffect>
-                              <p:set>
-                                <p:cBhvr>
-                                  <p:cTn id="26" dur="1" fill="hold">
-                                    <p:stCondLst>
-                                      <p:cond delay="0"/>
-                                    </p:stCondLst>
-                                  </p:cTn>
-                                  <p:tgtEl>
-                                    <p:spTgt spid="8"/>
-                                  </p:tgtEl>
-                                  <p:attrNameLst>
-                                    <p:attrName>style.visibility</p:attrName>
-                                  </p:attrNameLst>
-                                </p:cBhvr>
-                                <p:to>
-                                  <p:strVal val="visible"/>
-                                </p:to>
-                              </p:set>
-                            </p:childTnLst>
-                          </p:cTn>
-                        </p:par>
-                        <p:par>
-                          <p:cTn id="27" fill="hold" nodeType="withEffect">
-                            <p:stCondLst>
-                              <p:cond delay="0"/>
-                            </p:stCondLst>
-                            <p:childTnLst>
-                              <p:animEffect transition="in" filter="fade">
-                                <p:cBhvr>
-                                  <p:cTn id="28" dur="450"/>
-                                  <p:tgtEl>
-                                    <p:spTgt spid="10"/>
-                                  </p:tgtEl>
-                                </p:cBhvr>
-                              </p:animEffect>
-                              <p:set>
-                                <p:cBhvr>
-                                  <p:cTn id="29" dur="1" fill="hold">
-                                    <p:stCondLst>
-                                      <p:cond delay="0"/>
-                                    </p:stCondLst>
-                                  </p:cTn>
-                                  <p:tgtEl>
-                                    <p:spTgt spid="10"/>
-                                  </p:tgtEl>
-                                  <p:attrNameLst>
-                                    <p:attrName>style.visibility</p:attrName>
-                                  </p:attrNameLst>
-                                </p:cBhvr>
-                                <p:to>
-                                  <p:strVal val="visible"/>
-                                </p:to>
-                              </p:set>
-                            </p:childTnLst>
-                          </p:cTn>
-                        </p:par>
-                      </p:childTnLst>
-                    </p:cTn>
-                  </p:par>
-                  <p:par>
-                    <p:cTn id="30" fill="hold" nodeType="clickEffect">
-                      <p:stCondLst>
-                        <p:cond delay="0"/>
-                      </p:stCondLst>
-                      <p:childTnLst>
-                        <p:par>
-                          <p:cTn id="31" fill="hold" nodeType="withEffect">
-                            <p:stCondLst>
-                              <p:cond delay="0"/>
-                            </p:stCondLst>
-                            <p:childTnLst>
-                              <p:animEffect transition="in" filter="fade">
-                                <p:cBhvr>
-                                  <p:cTn id="32" dur="450"/>
-                                  <p:tgtEl>
-                                    <p:spTgt spid="9"/>
-                                  </p:tgtEl>
-                                </p:cBhvr>
-                              </p:animEffect>
-                              <p:set>
-                                <p:cBhvr>
-                                  <p:cTn id="33" dur="1" fill="hold">
-                                    <p:stCondLst>
-                                      <p:cond delay="0"/>
-                                    </p:stCondLst>
-                                  </p:cTn>
-                                  <p:tgtEl>
-                                    <p:spTgt spid="9"/>
-                                  </p:tgtEl>
-                                  <p:attrNameLst>
-                                    <p:attrName>style.visibility</p:attrName>
-                                  </p:attrNameLst>
-                                </p:cBhvr>
-                                <p:to>
-                                  <p:strVal val="visible"/>
-                                </p:to>
-                              </p:set>
-                            </p:childTnLst>
-                          </p:cTn>
-                        </p:par>
-                        <p:par>
-                          <p:cTn id="34" fill="hold" nodeType="withEffect">
-                            <p:stCondLst>
-                              <p:cond delay="0"/>
-                            </p:stCondLst>
-                            <p:childTnLst>
-                              <p:animEffect transition="in" filter="fade">
-                                <p:cBhvr>
-                                  <p:cTn id="35" dur="450"/>
-                                  <p:tgtEl>
-                                    <p:spTgt spid="11"/>
-                                  </p:tgtEl>
-                                </p:cBhvr>
-                              </p:animEffect>
-                              <p:set>
-                                <p:cBhvr>
-                                  <p:cTn id="36" dur="1" fill="hold">
-                                    <p:stCondLst>
-                                      <p:cond delay="0"/>
-                                    </p:stCondLst>
-                                  </p:cTn>
-                                  <p:tgtEl>
-                                    <p:spTgt spid="11"/>
-                                  </p:tgtEl>
-                                  <p:attrNameLst>
-                                    <p:attrName>style.visibility</p:attrName>
-                                  </p:attrNameLst>
-                                </p:cBhvr>
-                                <p:to>
-                                  <p:strVal val="visible"/>
-                                </p:to>
-                              </p:set>
-                            </p:childTnLst>
-                          </p:cTn>
-                        </p:par>
-                        <p:par>
-                          <p:cTn id="37" fill="hold" nodeType="withEffect">
-                            <p:stCondLst>
-                              <p:cond delay="0"/>
-                            </p:stCondLst>
-                            <p:childTnLst>
-                              <p:animEffect transition="in" filter="fade">
-                                <p:cBhvr>
-                                  <p:cTn id="38" dur="450"/>
-                                  <p:tgtEl>
-                                    <p:spTgt spid="12"/>
-                                  </p:tgtEl>
-                                </p:cBhvr>
-                              </p:animEffect>
-                              <p:set>
-                                <p:cBhvr>
-                                  <p:cTn id="39" dur="1" fill="hold">
-                                    <p:stCondLst>
-                                      <p:cond delay="0"/>
-                                    </p:stCondLst>
-                                  </p:cTn>
-                                  <p:tgtEl>
-                                    <p:spTgt spid="12"/>
-                                  </p:tgtEl>
-                                  <p:attrNameLst>
-                                    <p:attrName>style.visibility</p:attrName>
-                                  </p:attrNameLst>
-                                </p:cBhvr>
-                                <p:to>
-                                  <p:strVal val="visible"/>
-                                </p:to>
-                              </p:set>
-                            </p:childTnLst>
-                          </p:cTn>
-                        </p:par>
-                      </p:childTnLst>
-                    </p:cTn>
-                  </p:par>
-                </p:childTnLst>
-              </p:cTn>
-              <p:prevCondLst>
-                <p:cond evt="onPrev" delay="0">
-                  <p:tgtEl>
-                    <p:sldTgt/>
-                  </p:tgtEl>
-                </p:cond>
-              </p:prevCondLst>
-              <p:nextCondLst>
-                <p:cond evt="onNext" delay="0">
-                  <p:tgtEl>
-                    <p:sldTgt/>
-                  </p:tgtEl>
-                </p:cond>
-              </p:nextCondLst>
-            </p:seq>
-          </p:childTnLst>
-        </p:cTn>
-      </p:par>
-    </p:tnLst>
-  </p:timing>
 </p:sld>
 </file>
 
@@ -24946,448 +16468,6 @@
   <p:transition spd="med" advClick="1">
     <p:fade/>
   </p:transition>
-  <p:timing>
-    <p:tnLst>
-      <p:par>
-        <p:cTn id="2" dur="indefinite" restart="never" nodeType="tmRoot">
-          <p:childTnLst>
-            <p:seq concurrent="1" nextAc="seek">
-              <p:cTn id="3" dur="indefinite" nodeType="mainSeq">
-                <p:childTnLst>
-                  <p:par>
-                    <p:cTn id="4" fill="hold" nodeType="withEffect">
-                      <p:stCondLst>
-                        <p:cond delay="0"/>
-                      </p:stCondLst>
-                      <p:childTnLst>
-                        <p:par>
-                          <p:cTn id="5" fill="hold" nodeType="withEffect">
-                            <p:stCondLst>
-                              <p:cond delay="0"/>
-                            </p:stCondLst>
-                            <p:childTnLst>
-                              <p:animEffect transition="in" filter="fade">
-                                <p:cBhvr>
-                                  <p:cTn id="6" dur="450"/>
-                                  <p:tgtEl>
-                                    <p:spTgt spid="2"/>
-                                  </p:tgtEl>
-                                </p:cBhvr>
-                              </p:animEffect>
-                              <p:set>
-                                <p:cBhvr>
-                                  <p:cTn id="7" dur="1" fill="hold">
-                                    <p:stCondLst>
-                                      <p:cond delay="0"/>
-                                    </p:stCondLst>
-                                  </p:cTn>
-                                  <p:tgtEl>
-                                    <p:spTgt spid="2"/>
-                                  </p:tgtEl>
-                                  <p:attrNameLst>
-                                    <p:attrName>style.visibility</p:attrName>
-                                  </p:attrNameLst>
-                                </p:cBhvr>
-                                <p:to>
-                                  <p:strVal val="visible"/>
-                                </p:to>
-                              </p:set>
-                            </p:childTnLst>
-                          </p:cTn>
-                        </p:par>
-                        <p:par>
-                          <p:cTn id="8" fill="hold" nodeType="withEffect">
-                            <p:stCondLst>
-                              <p:cond delay="0"/>
-                            </p:stCondLst>
-                            <p:childTnLst>
-                              <p:animEffect transition="in" filter="fade">
-                                <p:cBhvr>
-                                  <p:cTn id="9" dur="450"/>
-                                  <p:tgtEl>
-                                    <p:spTgt spid="3"/>
-                                  </p:tgtEl>
-                                </p:cBhvr>
-                              </p:animEffect>
-                              <p:set>
-                                <p:cBhvr>
-                                  <p:cTn id="10" dur="1" fill="hold">
-                                    <p:stCondLst>
-                                      <p:cond delay="0"/>
-                                    </p:stCondLst>
-                                  </p:cTn>
-                                  <p:tgtEl>
-                                    <p:spTgt spid="3"/>
-                                  </p:tgtEl>
-                                  <p:attrNameLst>
-                                    <p:attrName>style.visibility</p:attrName>
-                                  </p:attrNameLst>
-                                </p:cBhvr>
-                                <p:to>
-                                  <p:strVal val="visible"/>
-                                </p:to>
-                              </p:set>
-                            </p:childTnLst>
-                          </p:cTn>
-                        </p:par>
-                        <p:par>
-                          <p:cTn id="11" fill="hold" nodeType="withEffect">
-                            <p:stCondLst>
-                              <p:cond delay="0"/>
-                            </p:stCondLst>
-                            <p:childTnLst>
-                              <p:animEffect transition="in" filter="fade">
-                                <p:cBhvr>
-                                  <p:cTn id="12" dur="450"/>
-                                  <p:tgtEl>
-                                    <p:spTgt spid="4"/>
-                                  </p:tgtEl>
-                                </p:cBhvr>
-                              </p:animEffect>
-                              <p:set>
-                                <p:cBhvr>
-                                  <p:cTn id="13" dur="1" fill="hold">
-                                    <p:stCondLst>
-                                      <p:cond delay="0"/>
-                                    </p:stCondLst>
-                                  </p:cTn>
-                                  <p:tgtEl>
-                                    <p:spTgt spid="4"/>
-                                  </p:tgtEl>
-                                  <p:attrNameLst>
-                                    <p:attrName>style.visibility</p:attrName>
-                                  </p:attrNameLst>
-                                </p:cBhvr>
-                                <p:to>
-                                  <p:strVal val="visible"/>
-                                </p:to>
-                              </p:set>
-                            </p:childTnLst>
-                          </p:cTn>
-                        </p:par>
-                        <p:par>
-                          <p:cTn id="14" fill="hold" nodeType="withEffect">
-                            <p:stCondLst>
-                              <p:cond delay="0"/>
-                            </p:stCondLst>
-                            <p:childTnLst>
-                              <p:animEffect transition="in" filter="fade">
-                                <p:cBhvr>
-                                  <p:cTn id="15" dur="450"/>
-                                  <p:tgtEl>
-                                    <p:spTgt spid="5"/>
-                                  </p:tgtEl>
-                                </p:cBhvr>
-                              </p:animEffect>
-                              <p:set>
-                                <p:cBhvr>
-                                  <p:cTn id="16" dur="1" fill="hold">
-                                    <p:stCondLst>
-                                      <p:cond delay="0"/>
-                                    </p:stCondLst>
-                                  </p:cTn>
-                                  <p:tgtEl>
-                                    <p:spTgt spid="5"/>
-                                  </p:tgtEl>
-                                  <p:attrNameLst>
-                                    <p:attrName>style.visibility</p:attrName>
-                                  </p:attrNameLst>
-                                </p:cBhvr>
-                                <p:to>
-                                  <p:strVal val="visible"/>
-                                </p:to>
-                              </p:set>
-                            </p:childTnLst>
-                          </p:cTn>
-                        </p:par>
-                        <p:par>
-                          <p:cTn id="17" fill="hold" nodeType="withEffect">
-                            <p:stCondLst>
-                              <p:cond delay="0"/>
-                            </p:stCondLst>
-                            <p:childTnLst>
-                              <p:animEffect transition="in" filter="fade">
-                                <p:cBhvr>
-                                  <p:cTn id="18" dur="450"/>
-                                  <p:tgtEl>
-                                    <p:spTgt spid="6"/>
-                                  </p:tgtEl>
-                                </p:cBhvr>
-                              </p:animEffect>
-                              <p:set>
-                                <p:cBhvr>
-                                  <p:cTn id="19" dur="1" fill="hold">
-                                    <p:stCondLst>
-                                      <p:cond delay="0"/>
-                                    </p:stCondLst>
-                                  </p:cTn>
-                                  <p:tgtEl>
-                                    <p:spTgt spid="6"/>
-                                  </p:tgtEl>
-                                  <p:attrNameLst>
-                                    <p:attrName>style.visibility</p:attrName>
-                                  </p:attrNameLst>
-                                </p:cBhvr>
-                                <p:to>
-                                  <p:strVal val="visible"/>
-                                </p:to>
-                              </p:set>
-                            </p:childTnLst>
-                          </p:cTn>
-                        </p:par>
-                        <p:par>
-                          <p:cTn id="20" fill="hold" nodeType="withEffect">
-                            <p:stCondLst>
-                              <p:cond delay="0"/>
-                            </p:stCondLst>
-                            <p:childTnLst>
-                              <p:animEffect transition="in" filter="fade">
-                                <p:cBhvr>
-                                  <p:cTn id="21" dur="450"/>
-                                  <p:tgtEl>
-                                    <p:spTgt spid="7"/>
-                                  </p:tgtEl>
-                                </p:cBhvr>
-                              </p:animEffect>
-                              <p:set>
-                                <p:cBhvr>
-                                  <p:cTn id="22" dur="1" fill="hold">
-                                    <p:stCondLst>
-                                      <p:cond delay="0"/>
-                                    </p:stCondLst>
-                                  </p:cTn>
-                                  <p:tgtEl>
-                                    <p:spTgt spid="7"/>
-                                  </p:tgtEl>
-                                  <p:attrNameLst>
-                                    <p:attrName>style.visibility</p:attrName>
-                                  </p:attrNameLst>
-                                </p:cBhvr>
-                                <p:to>
-                                  <p:strVal val="visible"/>
-                                </p:to>
-                              </p:set>
-                            </p:childTnLst>
-                          </p:cTn>
-                        </p:par>
-                      </p:childTnLst>
-                    </p:cTn>
-                  </p:par>
-                  <p:par>
-                    <p:cTn id="23" fill="hold" nodeType="clickEffect">
-                      <p:stCondLst>
-                        <p:cond delay="0"/>
-                      </p:stCondLst>
-                      <p:childTnLst>
-                        <p:par>
-                          <p:cTn id="24" fill="hold" nodeType="withEffect">
-                            <p:stCondLst>
-                              <p:cond delay="0"/>
-                            </p:stCondLst>
-                            <p:childTnLst>
-                              <p:animEffect transition="in" filter="fade">
-                                <p:cBhvr>
-                                  <p:cTn id="25" dur="450"/>
-                                  <p:tgtEl>
-                                    <p:spTgt spid="8"/>
-                                  </p:tgtEl>
-                                </p:cBhvr>
-                              </p:animEffect>
-                              <p:set>
-                                <p:cBhvr>
-                                  <p:cTn id="26" dur="1" fill="hold">
-                                    <p:stCondLst>
-                                      <p:cond delay="0"/>
-                                    </p:stCondLst>
-                                  </p:cTn>
-                                  <p:tgtEl>
-                                    <p:spTgt spid="8"/>
-                                  </p:tgtEl>
-                                  <p:attrNameLst>
-                                    <p:attrName>style.visibility</p:attrName>
-                                  </p:attrNameLst>
-                                </p:cBhvr>
-                                <p:to>
-                                  <p:strVal val="visible"/>
-                                </p:to>
-                              </p:set>
-                            </p:childTnLst>
-                          </p:cTn>
-                        </p:par>
-                        <p:par>
-                          <p:cTn id="27" fill="hold" nodeType="withEffect">
-                            <p:stCondLst>
-                              <p:cond delay="0"/>
-                            </p:stCondLst>
-                            <p:childTnLst>
-                              <p:animEffect transition="in" filter="fade">
-                                <p:cBhvr>
-                                  <p:cTn id="28" dur="450"/>
-                                  <p:tgtEl>
-                                    <p:spTgt spid="10"/>
-                                  </p:tgtEl>
-                                </p:cBhvr>
-                              </p:animEffect>
-                              <p:set>
-                                <p:cBhvr>
-                                  <p:cTn id="29" dur="1" fill="hold">
-                                    <p:stCondLst>
-                                      <p:cond delay="0"/>
-                                    </p:stCondLst>
-                                  </p:cTn>
-                                  <p:tgtEl>
-                                    <p:spTgt spid="10"/>
-                                  </p:tgtEl>
-                                  <p:attrNameLst>
-                                    <p:attrName>style.visibility</p:attrName>
-                                  </p:attrNameLst>
-                                </p:cBhvr>
-                                <p:to>
-                                  <p:strVal val="visible"/>
-                                </p:to>
-                              </p:set>
-                            </p:childTnLst>
-                          </p:cTn>
-                        </p:par>
-                      </p:childTnLst>
-                    </p:cTn>
-                  </p:par>
-                  <p:par>
-                    <p:cTn id="30" fill="hold" nodeType="clickEffect">
-                      <p:stCondLst>
-                        <p:cond delay="0"/>
-                      </p:stCondLst>
-                      <p:childTnLst>
-                        <p:par>
-                          <p:cTn id="31" fill="hold" nodeType="withEffect">
-                            <p:stCondLst>
-                              <p:cond delay="0"/>
-                            </p:stCondLst>
-                            <p:childTnLst>
-                              <p:animEffect transition="in" filter="fade">
-                                <p:cBhvr>
-                                  <p:cTn id="32" dur="450"/>
-                                  <p:tgtEl>
-                                    <p:spTgt spid="9"/>
-                                  </p:tgtEl>
-                                </p:cBhvr>
-                              </p:animEffect>
-                              <p:set>
-                                <p:cBhvr>
-                                  <p:cTn id="33" dur="1" fill="hold">
-                                    <p:stCondLst>
-                                      <p:cond delay="0"/>
-                                    </p:stCondLst>
-                                  </p:cTn>
-                                  <p:tgtEl>
-                                    <p:spTgt spid="9"/>
-                                  </p:tgtEl>
-                                  <p:attrNameLst>
-                                    <p:attrName>style.visibility</p:attrName>
-                                  </p:attrNameLst>
-                                </p:cBhvr>
-                                <p:to>
-                                  <p:strVal val="visible"/>
-                                </p:to>
-                              </p:set>
-                            </p:childTnLst>
-                          </p:cTn>
-                        </p:par>
-                        <p:par>
-                          <p:cTn id="34" fill="hold" nodeType="withEffect">
-                            <p:stCondLst>
-                              <p:cond delay="0"/>
-                            </p:stCondLst>
-                            <p:childTnLst>
-                              <p:animEffect transition="in" filter="fade">
-                                <p:cBhvr>
-                                  <p:cTn id="35" dur="450"/>
-                                  <p:tgtEl>
-                                    <p:spTgt spid="11"/>
-                                  </p:tgtEl>
-                                </p:cBhvr>
-                              </p:animEffect>
-                              <p:set>
-                                <p:cBhvr>
-                                  <p:cTn id="36" dur="1" fill="hold">
-                                    <p:stCondLst>
-                                      <p:cond delay="0"/>
-                                    </p:stCondLst>
-                                  </p:cTn>
-                                  <p:tgtEl>
-                                    <p:spTgt spid="11"/>
-                                  </p:tgtEl>
-                                  <p:attrNameLst>
-                                    <p:attrName>style.visibility</p:attrName>
-                                  </p:attrNameLst>
-                                </p:cBhvr>
-                                <p:to>
-                                  <p:strVal val="visible"/>
-                                </p:to>
-                              </p:set>
-                            </p:childTnLst>
-                          </p:cTn>
-                        </p:par>
-                        <p:par>
-                          <p:cTn id="37" fill="hold" nodeType="withEffect">
-                            <p:stCondLst>
-                              <p:cond delay="0"/>
-                            </p:stCondLst>
-                            <p:childTnLst>
-                              <p:animEffect transition="in" filter="fade">
-                                <p:cBhvr>
-                                  <p:cTn id="38" dur="450"/>
-                                  <p:tgtEl>
-                                    <p:spTgt spid="12"/>
-                                  </p:tgtEl>
-                                </p:cBhvr>
-                              </p:animEffect>
-                              <p:set>
-                                <p:cBhvr>
-                                  <p:cTn id="39" dur="1" fill="hold">
-                                    <p:stCondLst>
-                                      <p:cond delay="0"/>
-                                    </p:stCondLst>
-                                  </p:cTn>
-                                  <p:tgtEl>
-                                    <p:spTgt spid="12"/>
-                                  </p:tgtEl>
-                                  <p:attrNameLst>
-                                    <p:attrName>style.visibility</p:attrName>
-                                  </p:attrNameLst>
-                                </p:cBhvr>
-                                <p:to>
-                                  <p:strVal val="visible"/>
-                                </p:to>
-                              </p:set>
-                            </p:childTnLst>
-                          </p:cTn>
-                        </p:par>
-                      </p:childTnLst>
-                    </p:cTn>
-                  </p:par>
-                </p:childTnLst>
-              </p:cTn>
-              <p:prevCondLst>
-                <p:cond evt="onPrev" delay="0">
-                  <p:tgtEl>
-                    <p:sldTgt/>
-                  </p:tgtEl>
-                </p:cond>
-              </p:prevCondLst>
-              <p:nextCondLst>
-                <p:cond evt="onNext" delay="0">
-                  <p:tgtEl>
-                    <p:sldTgt/>
-                  </p:tgtEl>
-                </p:cond>
-              </p:nextCondLst>
-            </p:seq>
-          </p:childTnLst>
-        </p:cTn>
-      </p:par>
-    </p:tnLst>
-  </p:timing>
 </p:sld>
 </file>
 
@@ -26004,448 +17084,6 @@
   <p:transition spd="med" advClick="1">
     <p:fade/>
   </p:transition>
-  <p:timing>
-    <p:tnLst>
-      <p:par>
-        <p:cTn id="2" dur="indefinite" restart="never" nodeType="tmRoot">
-          <p:childTnLst>
-            <p:seq concurrent="1" nextAc="seek">
-              <p:cTn id="3" dur="indefinite" nodeType="mainSeq">
-                <p:childTnLst>
-                  <p:par>
-                    <p:cTn id="4" fill="hold" nodeType="withEffect">
-                      <p:stCondLst>
-                        <p:cond delay="0"/>
-                      </p:stCondLst>
-                      <p:childTnLst>
-                        <p:par>
-                          <p:cTn id="5" fill="hold" nodeType="withEffect">
-                            <p:stCondLst>
-                              <p:cond delay="0"/>
-                            </p:stCondLst>
-                            <p:childTnLst>
-                              <p:animEffect transition="in" filter="fade">
-                                <p:cBhvr>
-                                  <p:cTn id="6" dur="450"/>
-                                  <p:tgtEl>
-                                    <p:spTgt spid="2"/>
-                                  </p:tgtEl>
-                                </p:cBhvr>
-                              </p:animEffect>
-                              <p:set>
-                                <p:cBhvr>
-                                  <p:cTn id="7" dur="1" fill="hold">
-                                    <p:stCondLst>
-                                      <p:cond delay="0"/>
-                                    </p:stCondLst>
-                                  </p:cTn>
-                                  <p:tgtEl>
-                                    <p:spTgt spid="2"/>
-                                  </p:tgtEl>
-                                  <p:attrNameLst>
-                                    <p:attrName>style.visibility</p:attrName>
-                                  </p:attrNameLst>
-                                </p:cBhvr>
-                                <p:to>
-                                  <p:strVal val="visible"/>
-                                </p:to>
-                              </p:set>
-                            </p:childTnLst>
-                          </p:cTn>
-                        </p:par>
-                        <p:par>
-                          <p:cTn id="8" fill="hold" nodeType="withEffect">
-                            <p:stCondLst>
-                              <p:cond delay="0"/>
-                            </p:stCondLst>
-                            <p:childTnLst>
-                              <p:animEffect transition="in" filter="fade">
-                                <p:cBhvr>
-                                  <p:cTn id="9" dur="450"/>
-                                  <p:tgtEl>
-                                    <p:spTgt spid="3"/>
-                                  </p:tgtEl>
-                                </p:cBhvr>
-                              </p:animEffect>
-                              <p:set>
-                                <p:cBhvr>
-                                  <p:cTn id="10" dur="1" fill="hold">
-                                    <p:stCondLst>
-                                      <p:cond delay="0"/>
-                                    </p:stCondLst>
-                                  </p:cTn>
-                                  <p:tgtEl>
-                                    <p:spTgt spid="3"/>
-                                  </p:tgtEl>
-                                  <p:attrNameLst>
-                                    <p:attrName>style.visibility</p:attrName>
-                                  </p:attrNameLst>
-                                </p:cBhvr>
-                                <p:to>
-                                  <p:strVal val="visible"/>
-                                </p:to>
-                              </p:set>
-                            </p:childTnLst>
-                          </p:cTn>
-                        </p:par>
-                        <p:par>
-                          <p:cTn id="11" fill="hold" nodeType="withEffect">
-                            <p:stCondLst>
-                              <p:cond delay="0"/>
-                            </p:stCondLst>
-                            <p:childTnLst>
-                              <p:animEffect transition="in" filter="fade">
-                                <p:cBhvr>
-                                  <p:cTn id="12" dur="450"/>
-                                  <p:tgtEl>
-                                    <p:spTgt spid="4"/>
-                                  </p:tgtEl>
-                                </p:cBhvr>
-                              </p:animEffect>
-                              <p:set>
-                                <p:cBhvr>
-                                  <p:cTn id="13" dur="1" fill="hold">
-                                    <p:stCondLst>
-                                      <p:cond delay="0"/>
-                                    </p:stCondLst>
-                                  </p:cTn>
-                                  <p:tgtEl>
-                                    <p:spTgt spid="4"/>
-                                  </p:tgtEl>
-                                  <p:attrNameLst>
-                                    <p:attrName>style.visibility</p:attrName>
-                                  </p:attrNameLst>
-                                </p:cBhvr>
-                                <p:to>
-                                  <p:strVal val="visible"/>
-                                </p:to>
-                              </p:set>
-                            </p:childTnLst>
-                          </p:cTn>
-                        </p:par>
-                        <p:par>
-                          <p:cTn id="14" fill="hold" nodeType="withEffect">
-                            <p:stCondLst>
-                              <p:cond delay="0"/>
-                            </p:stCondLst>
-                            <p:childTnLst>
-                              <p:animEffect transition="in" filter="fade">
-                                <p:cBhvr>
-                                  <p:cTn id="15" dur="450"/>
-                                  <p:tgtEl>
-                                    <p:spTgt spid="5"/>
-                                  </p:tgtEl>
-                                </p:cBhvr>
-                              </p:animEffect>
-                              <p:set>
-                                <p:cBhvr>
-                                  <p:cTn id="16" dur="1" fill="hold">
-                                    <p:stCondLst>
-                                      <p:cond delay="0"/>
-                                    </p:stCondLst>
-                                  </p:cTn>
-                                  <p:tgtEl>
-                                    <p:spTgt spid="5"/>
-                                  </p:tgtEl>
-                                  <p:attrNameLst>
-                                    <p:attrName>style.visibility</p:attrName>
-                                  </p:attrNameLst>
-                                </p:cBhvr>
-                                <p:to>
-                                  <p:strVal val="visible"/>
-                                </p:to>
-                              </p:set>
-                            </p:childTnLst>
-                          </p:cTn>
-                        </p:par>
-                        <p:par>
-                          <p:cTn id="17" fill="hold" nodeType="withEffect">
-                            <p:stCondLst>
-                              <p:cond delay="0"/>
-                            </p:stCondLst>
-                            <p:childTnLst>
-                              <p:animEffect transition="in" filter="fade">
-                                <p:cBhvr>
-                                  <p:cTn id="18" dur="450"/>
-                                  <p:tgtEl>
-                                    <p:spTgt spid="6"/>
-                                  </p:tgtEl>
-                                </p:cBhvr>
-                              </p:animEffect>
-                              <p:set>
-                                <p:cBhvr>
-                                  <p:cTn id="19" dur="1" fill="hold">
-                                    <p:stCondLst>
-                                      <p:cond delay="0"/>
-                                    </p:stCondLst>
-                                  </p:cTn>
-                                  <p:tgtEl>
-                                    <p:spTgt spid="6"/>
-                                  </p:tgtEl>
-                                  <p:attrNameLst>
-                                    <p:attrName>style.visibility</p:attrName>
-                                  </p:attrNameLst>
-                                </p:cBhvr>
-                                <p:to>
-                                  <p:strVal val="visible"/>
-                                </p:to>
-                              </p:set>
-                            </p:childTnLst>
-                          </p:cTn>
-                        </p:par>
-                        <p:par>
-                          <p:cTn id="20" fill="hold" nodeType="withEffect">
-                            <p:stCondLst>
-                              <p:cond delay="0"/>
-                            </p:stCondLst>
-                            <p:childTnLst>
-                              <p:animEffect transition="in" filter="fade">
-                                <p:cBhvr>
-                                  <p:cTn id="21" dur="450"/>
-                                  <p:tgtEl>
-                                    <p:spTgt spid="7"/>
-                                  </p:tgtEl>
-                                </p:cBhvr>
-                              </p:animEffect>
-                              <p:set>
-                                <p:cBhvr>
-                                  <p:cTn id="22" dur="1" fill="hold">
-                                    <p:stCondLst>
-                                      <p:cond delay="0"/>
-                                    </p:stCondLst>
-                                  </p:cTn>
-                                  <p:tgtEl>
-                                    <p:spTgt spid="7"/>
-                                  </p:tgtEl>
-                                  <p:attrNameLst>
-                                    <p:attrName>style.visibility</p:attrName>
-                                  </p:attrNameLst>
-                                </p:cBhvr>
-                                <p:to>
-                                  <p:strVal val="visible"/>
-                                </p:to>
-                              </p:set>
-                            </p:childTnLst>
-                          </p:cTn>
-                        </p:par>
-                      </p:childTnLst>
-                    </p:cTn>
-                  </p:par>
-                  <p:par>
-                    <p:cTn id="23" fill="hold" nodeType="clickEffect">
-                      <p:stCondLst>
-                        <p:cond delay="0"/>
-                      </p:stCondLst>
-                      <p:childTnLst>
-                        <p:par>
-                          <p:cTn id="24" fill="hold" nodeType="withEffect">
-                            <p:stCondLst>
-                              <p:cond delay="0"/>
-                            </p:stCondLst>
-                            <p:childTnLst>
-                              <p:animEffect transition="in" filter="fade">
-                                <p:cBhvr>
-                                  <p:cTn id="25" dur="450"/>
-                                  <p:tgtEl>
-                                    <p:spTgt spid="8"/>
-                                  </p:tgtEl>
-                                </p:cBhvr>
-                              </p:animEffect>
-                              <p:set>
-                                <p:cBhvr>
-                                  <p:cTn id="26" dur="1" fill="hold">
-                                    <p:stCondLst>
-                                      <p:cond delay="0"/>
-                                    </p:stCondLst>
-                                  </p:cTn>
-                                  <p:tgtEl>
-                                    <p:spTgt spid="8"/>
-                                  </p:tgtEl>
-                                  <p:attrNameLst>
-                                    <p:attrName>style.visibility</p:attrName>
-                                  </p:attrNameLst>
-                                </p:cBhvr>
-                                <p:to>
-                                  <p:strVal val="visible"/>
-                                </p:to>
-                              </p:set>
-                            </p:childTnLst>
-                          </p:cTn>
-                        </p:par>
-                        <p:par>
-                          <p:cTn id="27" fill="hold" nodeType="withEffect">
-                            <p:stCondLst>
-                              <p:cond delay="0"/>
-                            </p:stCondLst>
-                            <p:childTnLst>
-                              <p:animEffect transition="in" filter="fade">
-                                <p:cBhvr>
-                                  <p:cTn id="28" dur="450"/>
-                                  <p:tgtEl>
-                                    <p:spTgt spid="10"/>
-                                  </p:tgtEl>
-                                </p:cBhvr>
-                              </p:animEffect>
-                              <p:set>
-                                <p:cBhvr>
-                                  <p:cTn id="29" dur="1" fill="hold">
-                                    <p:stCondLst>
-                                      <p:cond delay="0"/>
-                                    </p:stCondLst>
-                                  </p:cTn>
-                                  <p:tgtEl>
-                                    <p:spTgt spid="10"/>
-                                  </p:tgtEl>
-                                  <p:attrNameLst>
-                                    <p:attrName>style.visibility</p:attrName>
-                                  </p:attrNameLst>
-                                </p:cBhvr>
-                                <p:to>
-                                  <p:strVal val="visible"/>
-                                </p:to>
-                              </p:set>
-                            </p:childTnLst>
-                          </p:cTn>
-                        </p:par>
-                      </p:childTnLst>
-                    </p:cTn>
-                  </p:par>
-                  <p:par>
-                    <p:cTn id="30" fill="hold" nodeType="clickEffect">
-                      <p:stCondLst>
-                        <p:cond delay="0"/>
-                      </p:stCondLst>
-                      <p:childTnLst>
-                        <p:par>
-                          <p:cTn id="31" fill="hold" nodeType="withEffect">
-                            <p:stCondLst>
-                              <p:cond delay="0"/>
-                            </p:stCondLst>
-                            <p:childTnLst>
-                              <p:animEffect transition="in" filter="fade">
-                                <p:cBhvr>
-                                  <p:cTn id="32" dur="450"/>
-                                  <p:tgtEl>
-                                    <p:spTgt spid="9"/>
-                                  </p:tgtEl>
-                                </p:cBhvr>
-                              </p:animEffect>
-                              <p:set>
-                                <p:cBhvr>
-                                  <p:cTn id="33" dur="1" fill="hold">
-                                    <p:stCondLst>
-                                      <p:cond delay="0"/>
-                                    </p:stCondLst>
-                                  </p:cTn>
-                                  <p:tgtEl>
-                                    <p:spTgt spid="9"/>
-                                  </p:tgtEl>
-                                  <p:attrNameLst>
-                                    <p:attrName>style.visibility</p:attrName>
-                                  </p:attrNameLst>
-                                </p:cBhvr>
-                                <p:to>
-                                  <p:strVal val="visible"/>
-                                </p:to>
-                              </p:set>
-                            </p:childTnLst>
-                          </p:cTn>
-                        </p:par>
-                        <p:par>
-                          <p:cTn id="34" fill="hold" nodeType="withEffect">
-                            <p:stCondLst>
-                              <p:cond delay="0"/>
-                            </p:stCondLst>
-                            <p:childTnLst>
-                              <p:animEffect transition="in" filter="fade">
-                                <p:cBhvr>
-                                  <p:cTn id="35" dur="450"/>
-                                  <p:tgtEl>
-                                    <p:spTgt spid="11"/>
-                                  </p:tgtEl>
-                                </p:cBhvr>
-                              </p:animEffect>
-                              <p:set>
-                                <p:cBhvr>
-                                  <p:cTn id="36" dur="1" fill="hold">
-                                    <p:stCondLst>
-                                      <p:cond delay="0"/>
-                                    </p:stCondLst>
-                                  </p:cTn>
-                                  <p:tgtEl>
-                                    <p:spTgt spid="11"/>
-                                  </p:tgtEl>
-                                  <p:attrNameLst>
-                                    <p:attrName>style.visibility</p:attrName>
-                                  </p:attrNameLst>
-                                </p:cBhvr>
-                                <p:to>
-                                  <p:strVal val="visible"/>
-                                </p:to>
-                              </p:set>
-                            </p:childTnLst>
-                          </p:cTn>
-                        </p:par>
-                        <p:par>
-                          <p:cTn id="37" fill="hold" nodeType="withEffect">
-                            <p:stCondLst>
-                              <p:cond delay="0"/>
-                            </p:stCondLst>
-                            <p:childTnLst>
-                              <p:animEffect transition="in" filter="fade">
-                                <p:cBhvr>
-                                  <p:cTn id="38" dur="450"/>
-                                  <p:tgtEl>
-                                    <p:spTgt spid="12"/>
-                                  </p:tgtEl>
-                                </p:cBhvr>
-                              </p:animEffect>
-                              <p:set>
-                                <p:cBhvr>
-                                  <p:cTn id="39" dur="1" fill="hold">
-                                    <p:stCondLst>
-                                      <p:cond delay="0"/>
-                                    </p:stCondLst>
-                                  </p:cTn>
-                                  <p:tgtEl>
-                                    <p:spTgt spid="12"/>
-                                  </p:tgtEl>
-                                  <p:attrNameLst>
-                                    <p:attrName>style.visibility</p:attrName>
-                                  </p:attrNameLst>
-                                </p:cBhvr>
-                                <p:to>
-                                  <p:strVal val="visible"/>
-                                </p:to>
-                              </p:set>
-                            </p:childTnLst>
-                          </p:cTn>
-                        </p:par>
-                      </p:childTnLst>
-                    </p:cTn>
-                  </p:par>
-                </p:childTnLst>
-              </p:cTn>
-              <p:prevCondLst>
-                <p:cond evt="onPrev" delay="0">
-                  <p:tgtEl>
-                    <p:sldTgt/>
-                  </p:tgtEl>
-                </p:cond>
-              </p:prevCondLst>
-              <p:nextCondLst>
-                <p:cond evt="onNext" delay="0">
-                  <p:tgtEl>
-                    <p:sldTgt/>
-                  </p:tgtEl>
-                </p:cond>
-              </p:nextCondLst>
-            </p:seq>
-          </p:childTnLst>
-        </p:cTn>
-      </p:par>
-    </p:tnLst>
-  </p:timing>
 </p:sld>
 </file>
 
